--- a/templates/template.pptx
+++ b/templates/template.pptx
@@ -5,17 +5,22 @@
     <p:sldMasterId id="2147483648" r:id="rId1"/>
   </p:sldMasterIdLst>
   <p:notesMasterIdLst>
-    <p:notesMasterId r:id="rId7"/>
+    <p:notesMasterId r:id="rId12"/>
   </p:notesMasterIdLst>
   <p:handoutMasterIdLst>
-    <p:handoutMasterId r:id="rId8"/>
+    <p:handoutMasterId r:id="rId13"/>
   </p:handoutMasterIdLst>
   <p:sldIdLst>
     <p:sldId id="627" r:id="rId2"/>
     <p:sldId id="1123" r:id="rId3"/>
     <p:sldId id="256" r:id="rId4"/>
     <p:sldId id="257" r:id="rId5"/>
-    <p:sldId id="608" r:id="rId6"/>
+    <p:sldId id="1124" r:id="rId6"/>
+    <p:sldId id="1125" r:id="rId7"/>
+    <p:sldId id="1126" r:id="rId8"/>
+    <p:sldId id="1127" r:id="rId9"/>
+    <p:sldId id="1128" r:id="rId10"/>
+    <p:sldId id="608" r:id="rId11"/>
   </p:sldIdLst>
   <p:sldSz cx="12192000" cy="6858000"/>
   <p:notesSz cx="6858000" cy="9144000"/>
@@ -227,7 +232,7 @@
           <a:p>
             <a:fld id="{481CCCDA-DB13-4C5C-8425-84D29AE9BBBB}" type="datetimeFigureOut">
               <a:rPr lang="zh-CN" altLang="en-US" smtClean="0"/>
-              <a:t>2026/5/28</a:t>
+              <a:t>2026/6/30</a:t>
             </a:fld>
             <a:endParaRPr lang="zh-CN" altLang="en-US"/>
           </a:p>
@@ -405,7 +410,7 @@
           <a:p>
             <a:fld id="{86124FFC-2CF5-4940-9052-5DCA2998C650}" type="datetimeFigureOut">
               <a:rPr lang="zh-CN" altLang="en-US" smtClean="0"/>
-              <a:t>2026/5/28</a:t>
+              <a:t>2026/6/30</a:t>
             </a:fld>
             <a:endParaRPr lang="zh-CN" altLang="en-US"/>
           </a:p>
@@ -762,6 +767,90 @@
 </p:notes>
 </file>
 
+<file path=ppt/notesSlides/notesSlide2.xml><?xml version="1.0" encoding="utf-8"?>
+<p:notes xmlns:a="http://schemas.openxmlformats.org/drawingml/2006/main" xmlns:r="http://schemas.openxmlformats.org/officeDocument/2006/relationships" xmlns:p="http://schemas.openxmlformats.org/presentationml/2006/main">
+  <p:cSld>
+    <p:spTree>
+      <p:nvGrpSpPr>
+        <p:cNvPr id="1" name=""/>
+        <p:cNvGrpSpPr/>
+        <p:nvPr/>
+      </p:nvGrpSpPr>
+      <p:grpSpPr>
+        <a:xfrm>
+          <a:off x="0" y="0"/>
+          <a:ext cx="0" cy="0"/>
+          <a:chOff x="0" y="0"/>
+          <a:chExt cx="0" cy="0"/>
+        </a:xfrm>
+      </p:grpSpPr>
+      <p:sp>
+        <p:nvSpPr>
+          <p:cNvPr id="2" name="幻灯片图像占位符 1"/>
+          <p:cNvSpPr>
+            <a:spLocks noGrp="1" noRot="1" noChangeAspect="1"/>
+          </p:cNvSpPr>
+          <p:nvPr>
+            <p:ph type="sldImg"/>
+          </p:nvPr>
+        </p:nvSpPr>
+        <p:spPr/>
+      </p:sp>
+      <p:sp>
+        <p:nvSpPr>
+          <p:cNvPr id="3" name="备注占位符 2"/>
+          <p:cNvSpPr>
+            <a:spLocks noGrp="1"/>
+          </p:cNvSpPr>
+          <p:nvPr>
+            <p:ph type="body" idx="1"/>
+          </p:nvPr>
+        </p:nvSpPr>
+        <p:spPr/>
+        <p:txBody>
+          <a:bodyPr/>
+          <a:lstStyle/>
+          <a:p>
+            <a:endParaRPr lang="zh-CN" altLang="en-US" dirty="0"/>
+          </a:p>
+        </p:txBody>
+      </p:sp>
+      <p:sp>
+        <p:nvSpPr>
+          <p:cNvPr id="4" name="灯片编号占位符 3"/>
+          <p:cNvSpPr>
+            <a:spLocks noGrp="1"/>
+          </p:cNvSpPr>
+          <p:nvPr>
+            <p:ph type="sldNum" sz="quarter" idx="5"/>
+          </p:nvPr>
+        </p:nvSpPr>
+        <p:spPr/>
+        <p:txBody>
+          <a:bodyPr/>
+          <a:lstStyle/>
+          <a:p>
+            <a:fld id="{6405CFB2-F39A-44C8-A060-ACC50B5EE47A}" type="slidenum">
+              <a:rPr lang="zh-CN" altLang="en-US" smtClean="0"/>
+              <a:t>2</a:t>
+            </a:fld>
+            <a:endParaRPr lang="zh-CN" altLang="en-US"/>
+          </a:p>
+        </p:txBody>
+      </p:sp>
+    </p:spTree>
+    <p:extLst>
+      <p:ext uri="{BB962C8B-B14F-4D97-AF65-F5344CB8AC3E}">
+        <p14:creationId xmlns:p14="http://schemas.microsoft.com/office/powerpoint/2010/main" val="4022330337"/>
+      </p:ext>
+    </p:extLst>
+  </p:cSld>
+  <p:clrMapOvr>
+    <a:masterClrMapping/>
+  </p:clrMapOvr>
+</p:notes>
+</file>
+
 <file path=ppt/slideLayouts/slideLayout1.xml><?xml version="1.0" encoding="utf-8"?>
 <p:sldLayout xmlns:a="http://schemas.openxmlformats.org/drawingml/2006/main" xmlns:r="http://schemas.openxmlformats.org/officeDocument/2006/relationships" xmlns:p="http://schemas.openxmlformats.org/presentationml/2006/main" type="title" preserve="1">
   <p:cSld name="Title Slide">
@@ -941,7 +1030,7 @@
           <a:p>
             <a:fld id="{5BCAD085-E8A6-8845-BD4E-CB4CCA059FC4}" type="datetimeFigureOut">
               <a:rPr lang="en-US" smtClean="0"/>
-              <a:t>5/28/2026</a:t>
+              <a:t>6/30/2026</a:t>
             </a:fld>
             <a:endParaRPr lang="en-US"/>
           </a:p>
@@ -1109,7 +1198,7 @@
           <a:p>
             <a:fld id="{5BCAD085-E8A6-8845-BD4E-CB4CCA059FC4}" type="datetimeFigureOut">
               <a:rPr lang="en-US" smtClean="0"/>
-              <a:t>5/28/2026</a:t>
+              <a:t>6/30/2026</a:t>
             </a:fld>
             <a:endParaRPr lang="en-US"/>
           </a:p>
@@ -1287,7 +1376,7 @@
           <a:p>
             <a:fld id="{5BCAD085-E8A6-8845-BD4E-CB4CCA059FC4}" type="datetimeFigureOut">
               <a:rPr lang="en-US" smtClean="0"/>
-              <a:t>5/28/2026</a:t>
+              <a:t>6/30/2026</a:t>
             </a:fld>
             <a:endParaRPr lang="en-US"/>
           </a:p>
@@ -1819,7 +1908,7 @@
           <a:p>
             <a:fld id="{5BCAD085-E8A6-8845-BD4E-CB4CCA059FC4}" type="datetimeFigureOut">
               <a:rPr lang="en-US" smtClean="0"/>
-              <a:t>5/28/2026</a:t>
+              <a:t>6/30/2026</a:t>
             </a:fld>
             <a:endParaRPr lang="en-US"/>
           </a:p>
@@ -2064,7 +2153,7 @@
           <a:p>
             <a:fld id="{5BCAD085-E8A6-8845-BD4E-CB4CCA059FC4}" type="datetimeFigureOut">
               <a:rPr lang="en-US" smtClean="0"/>
-              <a:t>5/28/2026</a:t>
+              <a:t>6/30/2026</a:t>
             </a:fld>
             <a:endParaRPr lang="en-US"/>
           </a:p>
@@ -2349,7 +2438,7 @@
           <a:p>
             <a:fld id="{5BCAD085-E8A6-8845-BD4E-CB4CCA059FC4}" type="datetimeFigureOut">
               <a:rPr lang="en-US" smtClean="0"/>
-              <a:t>5/28/2026</a:t>
+              <a:t>6/30/2026</a:t>
             </a:fld>
             <a:endParaRPr lang="en-US"/>
           </a:p>
@@ -2768,7 +2857,7 @@
           <a:p>
             <a:fld id="{5BCAD085-E8A6-8845-BD4E-CB4CCA059FC4}" type="datetimeFigureOut">
               <a:rPr lang="en-US" smtClean="0"/>
-              <a:t>5/28/2026</a:t>
+              <a:t>6/30/2026</a:t>
             </a:fld>
             <a:endParaRPr lang="en-US"/>
           </a:p>
@@ -2885,7 +2974,7 @@
           <a:p>
             <a:fld id="{5BCAD085-E8A6-8845-BD4E-CB4CCA059FC4}" type="datetimeFigureOut">
               <a:rPr lang="en-US" smtClean="0"/>
-              <a:t>5/28/2026</a:t>
+              <a:t>6/30/2026</a:t>
             </a:fld>
             <a:endParaRPr lang="en-US"/>
           </a:p>
@@ -2980,7 +3069,7 @@
           <a:p>
             <a:fld id="{5BCAD085-E8A6-8845-BD4E-CB4CCA059FC4}" type="datetimeFigureOut">
               <a:rPr lang="en-US" smtClean="0"/>
-              <a:t>5/28/2026</a:t>
+              <a:t>6/30/2026</a:t>
             </a:fld>
             <a:endParaRPr lang="en-US"/>
           </a:p>
@@ -3255,7 +3344,7 @@
           <a:p>
             <a:fld id="{5BCAD085-E8A6-8845-BD4E-CB4CCA059FC4}" type="datetimeFigureOut">
               <a:rPr lang="en-US" smtClean="0"/>
-              <a:t>5/28/2026</a:t>
+              <a:t>6/30/2026</a:t>
             </a:fld>
             <a:endParaRPr lang="en-US"/>
           </a:p>
@@ -3507,7 +3596,7 @@
           <a:p>
             <a:fld id="{5BCAD085-E8A6-8845-BD4E-CB4CCA059FC4}" type="datetimeFigureOut">
               <a:rPr lang="en-US" smtClean="0"/>
-              <a:t>5/28/2026</a:t>
+              <a:t>6/30/2026</a:t>
             </a:fld>
             <a:endParaRPr lang="en-US"/>
           </a:p>
@@ -3718,7 +3807,7 @@
           <a:p>
             <a:fld id="{5BCAD085-E8A6-8845-BD4E-CB4CCA059FC4}" type="datetimeFigureOut">
               <a:rPr lang="en-US" smtClean="0"/>
-              <a:t>5/28/2026</a:t>
+              <a:t>6/30/2026</a:t>
             </a:fld>
             <a:endParaRPr lang="en-US"/>
           </a:p>
@@ -4126,7 +4215,7 @@
                 <a:cs typeface="+mn-ea"/>
                 <a:sym typeface="+mn-lt"/>
               </a:rPr>
-              <a:t>大大大大标题</a:t>
+              <a:t>大标题</a:t>
             </a:r>
             <a:br>
               <a:rPr lang="en-US" altLang="zh-CN" sz="4400" b="1" dirty="0">
@@ -4168,8 +4257,8 @@
         </p:nvCxnSpPr>
         <p:spPr>
           <a:xfrm>
-            <a:off x="4812624" y="2714457"/>
-            <a:ext cx="0" cy="2872253"/>
+            <a:off x="4812624" y="3685182"/>
+            <a:ext cx="0" cy="1901528"/>
           </a:xfrm>
           <a:prstGeom prst="line">
             <a:avLst/>
@@ -4205,8 +4294,8 @@
         </p:nvSpPr>
         <p:spPr>
           <a:xfrm>
-            <a:off x="5072158" y="2670115"/>
-            <a:ext cx="6299198" cy="2813655"/>
+            <a:off x="5005046" y="3685182"/>
+            <a:ext cx="6299198" cy="1693349"/>
           </a:xfrm>
           <a:prstGeom prst="rect">
             <a:avLst/>
@@ -4229,7 +4318,7 @@
                 <a:cs typeface="+mn-ea"/>
                 <a:sym typeface="+mn-lt"/>
               </a:rPr>
-              <a:t>申 请 人 ：</a:t>
+              <a:t>汇报人 ：</a:t>
             </a:r>
             <a:endParaRPr lang="en-US" altLang="zh-CN" sz="2800" b="1" dirty="0">
               <a:solidFill>
@@ -4252,7 +4341,7 @@
                 <a:cs typeface="+mn-ea"/>
                 <a:sym typeface="+mn-lt"/>
               </a:rPr>
-              <a:t>硕士导师：</a:t>
+              <a:t>导  师 ：</a:t>
             </a:r>
             <a:endParaRPr lang="en-US" altLang="zh-CN" sz="2800" b="1" dirty="0">
               <a:solidFill>
@@ -4275,55 +4364,9 @@
                 <a:cs typeface="+mn-ea"/>
                 <a:sym typeface="+mn-lt"/>
               </a:rPr>
-              <a:t>硕士专业：</a:t>
+              <a:t>专  业 ：</a:t>
             </a:r>
             <a:endParaRPr lang="en-US" altLang="zh-CN" sz="2800" b="1" dirty="0">
-              <a:solidFill>
-                <a:srgbClr val="002060"/>
-              </a:solidFill>
-              <a:latin typeface="+mn-ea"/>
-              <a:cs typeface="+mn-ea"/>
-              <a:sym typeface="+mn-lt"/>
-            </a:endParaRPr>
-          </a:p>
-          <a:p>
-            <a:pPr>
-              <a:lnSpc>
-                <a:spcPct val="130000"/>
-              </a:lnSpc>
-            </a:pPr>
-            <a:r>
-              <a:rPr lang="zh-CN" altLang="en-US" sz="2800" b="1" dirty="0">
-                <a:latin typeface="+mn-ea"/>
-                <a:cs typeface="+mn-ea"/>
-                <a:sym typeface="+mn-lt"/>
-              </a:rPr>
-              <a:t>报考导师：</a:t>
-            </a:r>
-            <a:endParaRPr lang="en-US" altLang="zh-CN" sz="2800" b="1" dirty="0">
-              <a:solidFill>
-                <a:srgbClr val="002060"/>
-              </a:solidFill>
-              <a:latin typeface="+mn-ea"/>
-              <a:cs typeface="+mn-ea"/>
-              <a:sym typeface="+mn-lt"/>
-            </a:endParaRPr>
-          </a:p>
-          <a:p>
-            <a:pPr>
-              <a:lnSpc>
-                <a:spcPct val="130000"/>
-              </a:lnSpc>
-            </a:pPr>
-            <a:r>
-              <a:rPr lang="zh-CN" altLang="en-US" sz="2800" b="1" dirty="0">
-                <a:latin typeface="+mn-ea"/>
-                <a:cs typeface="+mn-ea"/>
-                <a:sym typeface="+mn-lt"/>
-              </a:rPr>
-              <a:t>申请专业：</a:t>
-            </a:r>
-            <a:endParaRPr lang="zh-CN" altLang="en-US" sz="2800" b="1" dirty="0">
               <a:solidFill>
                 <a:srgbClr val="002060"/>
               </a:solidFill>
@@ -4348,7 +4391,7 @@
         </p:nvSpPr>
         <p:spPr>
           <a:xfrm>
-            <a:off x="6411058" y="5864998"/>
+            <a:off x="6604005" y="5827247"/>
             <a:ext cx="2008883" cy="523220"/>
           </a:xfrm>
           <a:prstGeom prst="rect">
@@ -4417,6 +4460,191 @@
     </mc:Choice>
     <mc:Fallback xmlns="">
       <p:transition spd="slow" advTm="20326"/>
+    </mc:Fallback>
+  </mc:AlternateContent>
+</p:sld>
+</file>
+
+<file path=ppt/slides/slide10.xml><?xml version="1.0" encoding="utf-8"?>
+<p:sld xmlns:a="http://schemas.openxmlformats.org/drawingml/2006/main" xmlns:r="http://schemas.openxmlformats.org/officeDocument/2006/relationships" xmlns:p="http://schemas.openxmlformats.org/presentationml/2006/main">
+  <p:cSld>
+    <p:spTree>
+      <p:nvGrpSpPr>
+        <p:cNvPr id="1" name=""/>
+        <p:cNvGrpSpPr/>
+        <p:nvPr/>
+      </p:nvGrpSpPr>
+      <p:grpSpPr>
+        <a:xfrm>
+          <a:off x="0" y="0"/>
+          <a:ext cx="0" cy="0"/>
+          <a:chOff x="0" y="0"/>
+          <a:chExt cx="0" cy="0"/>
+        </a:xfrm>
+      </p:grpSpPr>
+      <p:sp>
+        <p:nvSpPr>
+          <p:cNvPr id="7" name="文本框 6">
+            <a:extLst>
+              <a:ext uri="{FF2B5EF4-FFF2-40B4-BE49-F238E27FC236}">
+                <a16:creationId xmlns:a16="http://schemas.microsoft.com/office/drawing/2014/main" id="{66A19AAD-1CDF-4899-8D9B-772D397CF09A}"/>
+              </a:ext>
+            </a:extLst>
+          </p:cNvPr>
+          <p:cNvSpPr txBox="1"/>
+          <p:nvPr/>
+        </p:nvSpPr>
+        <p:spPr>
+          <a:xfrm>
+            <a:off x="2170700" y="2395120"/>
+            <a:ext cx="9758680" cy="1323439"/>
+          </a:xfrm>
+          <a:prstGeom prst="rect">
+            <a:avLst/>
+          </a:prstGeom>
+          <a:noFill/>
+        </p:spPr>
+        <p:txBody>
+          <a:bodyPr wrap="square" rtlCol="0">
+            <a:spAutoFit/>
+          </a:bodyPr>
+          <a:lstStyle/>
+          <a:p>
+            <a:pPr algn="ctr"/>
+            <a:r>
+              <a:rPr lang="en-US" altLang="zh-CN" sz="8000" dirty="0">
+                <a:gradFill>
+                  <a:gsLst>
+                    <a:gs pos="0">
+                      <a:schemeClr val="accent1"/>
+                    </a:gs>
+                    <a:gs pos="100000">
+                      <a:schemeClr val="bg1">
+                        <a:alpha val="0"/>
+                      </a:schemeClr>
+                    </a:gs>
+                  </a:gsLst>
+                  <a:lin ang="5400000" scaled="1"/>
+                </a:gradFill>
+                <a:latin typeface="Impact" panose="020B0806030902050204" pitchFamily="34" charset="0"/>
+              </a:rPr>
+              <a:t>THANKS FOR LISTENING</a:t>
+            </a:r>
+            <a:endParaRPr lang="zh-CN" altLang="en-US" sz="8000" dirty="0">
+              <a:gradFill>
+                <a:gsLst>
+                  <a:gs pos="0">
+                    <a:schemeClr val="accent1"/>
+                  </a:gs>
+                  <a:gs pos="100000">
+                    <a:schemeClr val="bg1">
+                      <a:alpha val="0"/>
+                    </a:schemeClr>
+                  </a:gs>
+                </a:gsLst>
+                <a:lin ang="5400000" scaled="1"/>
+              </a:gradFill>
+              <a:latin typeface="Impact" panose="020B0806030902050204" pitchFamily="34" charset="0"/>
+            </a:endParaRPr>
+          </a:p>
+        </p:txBody>
+      </p:sp>
+      <p:sp>
+        <p:nvSpPr>
+          <p:cNvPr id="8" name="标题 1">
+            <a:extLst>
+              <a:ext uri="{FF2B5EF4-FFF2-40B4-BE49-F238E27FC236}">
+                <a16:creationId xmlns:a16="http://schemas.microsoft.com/office/drawing/2014/main" id="{ABB4B086-4071-4C4C-9FF8-B987D7306B9B}"/>
+              </a:ext>
+            </a:extLst>
+          </p:cNvPr>
+          <p:cNvSpPr txBox="1">
+            <a:spLocks/>
+          </p:cNvSpPr>
+          <p:nvPr/>
+        </p:nvSpPr>
+        <p:spPr>
+          <a:xfrm>
+            <a:off x="3069349" y="3056840"/>
+            <a:ext cx="8186902" cy="833759"/>
+          </a:xfrm>
+          <a:prstGeom prst="rect">
+            <a:avLst/>
+          </a:prstGeom>
+        </p:spPr>
+        <p:txBody>
+          <a:bodyPr lIns="0" rIns="0" bIns="0" anchor="b" anchorCtr="0">
+            <a:normAutofit/>
+          </a:bodyPr>
+          <a:lstStyle>
+            <a:lvl1pPr algn="ctr" defTabSz="914400" rtl="0" eaLnBrk="1" latinLnBrk="0" hangingPunct="1">
+              <a:lnSpc>
+                <a:spcPct val="90000"/>
+              </a:lnSpc>
+              <a:spcBef>
+                <a:spcPct val="0"/>
+              </a:spcBef>
+              <a:buNone/>
+              <a:defRPr lang="zh-CN" altLang="en-US" sz="4400" b="1" kern="1200" dirty="0">
+                <a:solidFill>
+                  <a:schemeClr val="tx1">
+                    <a:lumMod val="95000"/>
+                    <a:lumOff val="5000"/>
+                  </a:schemeClr>
+                </a:solidFill>
+                <a:latin typeface="+mj-lt"/>
+                <a:ea typeface="+mj-ea"/>
+                <a:cs typeface="+mj-cs"/>
+              </a:defRPr>
+            </a:lvl1pPr>
+          </a:lstStyle>
+          <a:p>
+            <a:r>
+              <a:rPr lang="zh-CN" altLang="en-US" dirty="0">
+                <a:solidFill>
+                  <a:srgbClr val="000000">
+                    <a:lumMod val="95000"/>
+                    <a:lumOff val="5000"/>
+                  </a:srgbClr>
+                </a:solidFill>
+                <a:latin typeface="Segoe UI"/>
+                <a:ea typeface="微软雅黑"/>
+              </a:rPr>
+              <a:t>请各位老师批评指正</a:t>
+            </a:r>
+            <a:r>
+              <a:rPr lang="en-US" altLang="zh-CN" dirty="0">
+                <a:solidFill>
+                  <a:srgbClr val="000000">
+                    <a:lumMod val="95000"/>
+                    <a:lumOff val="5000"/>
+                  </a:srgbClr>
+                </a:solidFill>
+                <a:latin typeface="Segoe UI"/>
+                <a:ea typeface="微软雅黑"/>
+              </a:rPr>
+              <a:t>!</a:t>
+            </a:r>
+            <a:endParaRPr lang="zh-CN" altLang="en-US" dirty="0"/>
+          </a:p>
+        </p:txBody>
+      </p:sp>
+    </p:spTree>
+    <p:extLst>
+      <p:ext uri="{BB962C8B-B14F-4D97-AF65-F5344CB8AC3E}">
+        <p14:creationId xmlns:p14="http://schemas.microsoft.com/office/powerpoint/2010/main" val="2931844051"/>
+      </p:ext>
+    </p:extLst>
+  </p:cSld>
+  <p:clrMapOvr>
+    <a:masterClrMapping/>
+  </p:clrMapOvr>
+  <mc:AlternateContent xmlns:mc="http://schemas.openxmlformats.org/markup-compatibility/2006" xmlns:p14="http://schemas.microsoft.com/office/powerpoint/2010/main">
+    <mc:Choice Requires="p14">
+      <p:transition spd="slow" p14:dur="2000" advTm="7305"/>
+    </mc:Choice>
+    <mc:Fallback xmlns="">
+      <p:transition spd="slow" advTm="7305"/>
     </mc:Fallback>
   </mc:AlternateContent>
 </p:sld>
@@ -4460,7 +4688,7 @@
           <p:nvPr/>
         </p:nvPicPr>
         <p:blipFill>
-          <a:blip r:embed="rId2">
+          <a:blip r:embed="rId3">
             <a:alphaModFix amt="20000"/>
           </a:blip>
           <a:stretch>
@@ -4600,7 +4828,7 @@
           <p:nvPr/>
         </p:nvPicPr>
         <p:blipFill>
-          <a:blip r:embed="rId3"/>
+          <a:blip r:embed="rId4"/>
           <a:stretch>
             <a:fillRect/>
           </a:stretch>
@@ -4844,7 +5072,7 @@
         </p:nvGrpSpPr>
         <p:grpSpPr>
           <a:xfrm>
-            <a:off x="3764213" y="2245666"/>
+            <a:off x="3890048" y="1854084"/>
             <a:ext cx="7430778" cy="828243"/>
             <a:chOff x="3764213" y="2340052"/>
             <a:chExt cx="7430778" cy="828243"/>
@@ -5023,15 +5251,14 @@
               <a:lstStyle/>
               <a:p>
                 <a:r>
-                  <a:rPr lang="zh-CN" altLang="en-US" sz="3200" b="1" i="0" dirty="0">
+                  <a:rPr lang="zh-CN" altLang="en-US" sz="3200" b="1" dirty="0">
                     <a:solidFill>
                       <a:schemeClr val="bg1"/>
                     </a:solidFill>
-                    <a:effectLst/>
                     <a:latin typeface="微软雅黑" panose="020B0503020204020204" pitchFamily="34" charset="-122"/>
                     <a:ea typeface="微软雅黑" panose="020B0503020204020204" pitchFamily="34" charset="-122"/>
                   </a:rPr>
-                  <a:t>项目背景介绍</a:t>
+                  <a:t>研究现状</a:t>
                 </a:r>
                 <a:endParaRPr lang="zh-CN" altLang="en-US" sz="3200" dirty="0">
                   <a:solidFill>
@@ -5057,7 +5284,7 @@
         </p:nvGrpSpPr>
         <p:grpSpPr>
           <a:xfrm>
-            <a:off x="3764213" y="3369970"/>
+            <a:off x="3890048" y="2978388"/>
             <a:ext cx="7430778" cy="828243"/>
             <a:chOff x="3764213" y="2340052"/>
             <a:chExt cx="7430778" cy="828243"/>
@@ -5192,7 +5419,7 @@
                     <a:latin typeface="Times New Roman" panose="02020603050405020304" pitchFamily="18" charset="0"/>
                     <a:cs typeface="Times New Roman" panose="02020603050405020304" pitchFamily="18" charset="0"/>
                   </a:rPr>
-                  <a:t>01</a:t>
+                  <a:t>02</a:t>
                 </a:r>
                 <a:endParaRPr lang="zh-CN" altLang="en-US" sz="3200" b="1" dirty="0">
                   <a:solidFill>
@@ -5244,7 +5471,7 @@
                     <a:latin typeface="微软雅黑" panose="020B0503020204020204" pitchFamily="34" charset="-122"/>
                     <a:ea typeface="微软雅黑" panose="020B0503020204020204" pitchFamily="34" charset="-122"/>
                   </a:rPr>
-                  <a:t>项目背景介绍</a:t>
+                  <a:t>方法介绍</a:t>
                 </a:r>
                 <a:endParaRPr lang="zh-CN" altLang="en-US" sz="3200" dirty="0">
                   <a:solidFill>
@@ -5270,7 +5497,7 @@
         </p:nvGrpSpPr>
         <p:grpSpPr>
           <a:xfrm>
-            <a:off x="3764213" y="4506827"/>
+            <a:off x="3890048" y="4115245"/>
             <a:ext cx="7430778" cy="828243"/>
             <a:chOff x="3764213" y="2340052"/>
             <a:chExt cx="7430778" cy="828243"/>
@@ -5405,7 +5632,7 @@
                     <a:latin typeface="Times New Roman" panose="02020603050405020304" pitchFamily="18" charset="0"/>
                     <a:cs typeface="Times New Roman" panose="02020603050405020304" pitchFamily="18" charset="0"/>
                   </a:rPr>
-                  <a:t>01</a:t>
+                  <a:t>03</a:t>
                 </a:r>
                 <a:endParaRPr lang="zh-CN" altLang="en-US" sz="3200" b="1" dirty="0">
                   <a:solidFill>
@@ -5449,6 +5676,16 @@
               <a:lstStyle/>
               <a:p>
                 <a:r>
+                  <a:rPr lang="zh-CN" altLang="en-US" sz="3200" b="1" dirty="0">
+                    <a:solidFill>
+                      <a:schemeClr val="bg1"/>
+                    </a:solidFill>
+                    <a:latin typeface="微软雅黑" panose="020B0503020204020204" pitchFamily="34" charset="-122"/>
+                    <a:ea typeface="微软雅黑" panose="020B0503020204020204" pitchFamily="34" charset="-122"/>
+                  </a:rPr>
+                  <a:t>实验</a:t>
+                </a:r>
+                <a:r>
                   <a:rPr lang="zh-CN" altLang="en-US" sz="3200" b="1" i="0" dirty="0">
                     <a:solidFill>
                       <a:schemeClr val="bg1"/>
@@ -5457,7 +5694,220 @@
                     <a:latin typeface="微软雅黑" panose="020B0503020204020204" pitchFamily="34" charset="-122"/>
                     <a:ea typeface="微软雅黑" panose="020B0503020204020204" pitchFamily="34" charset="-122"/>
                   </a:rPr>
-                  <a:t>项目背景介绍</a:t>
+                  <a:t>结果</a:t>
+                </a:r>
+                <a:endParaRPr lang="zh-CN" altLang="en-US" sz="3200" dirty="0">
+                  <a:solidFill>
+                    <a:schemeClr val="bg1"/>
+                  </a:solidFill>
+                </a:endParaRPr>
+              </a:p>
+            </p:txBody>
+          </p:sp>
+        </p:grpSp>
+      </p:grpSp>
+      <p:grpSp>
+        <p:nvGrpSpPr>
+          <p:cNvPr id="5" name="组合 4">
+            <a:extLst>
+              <a:ext uri="{FF2B5EF4-FFF2-40B4-BE49-F238E27FC236}">
+                <a16:creationId xmlns:a16="http://schemas.microsoft.com/office/drawing/2014/main" id="{A68A4B9A-735C-3F2C-3E8D-0F2C9D8A20AB}"/>
+              </a:ext>
+            </a:extLst>
+          </p:cNvPr>
+          <p:cNvGrpSpPr/>
+          <p:nvPr/>
+        </p:nvGrpSpPr>
+        <p:grpSpPr>
+          <a:xfrm>
+            <a:off x="3890048" y="5229263"/>
+            <a:ext cx="7430778" cy="828243"/>
+            <a:chOff x="3764213" y="2340052"/>
+            <a:chExt cx="7430778" cy="828243"/>
+          </a:xfrm>
+        </p:grpSpPr>
+        <p:sp>
+          <p:nvSpPr>
+            <p:cNvPr id="7" name="矩形 6">
+              <a:extLst>
+                <a:ext uri="{FF2B5EF4-FFF2-40B4-BE49-F238E27FC236}">
+                  <a16:creationId xmlns:a16="http://schemas.microsoft.com/office/drawing/2014/main" id="{912F1515-FCF7-9F83-3CA6-BC543734D398}"/>
+                </a:ext>
+              </a:extLst>
+            </p:cNvPr>
+            <p:cNvSpPr/>
+            <p:nvPr/>
+          </p:nvSpPr>
+          <p:spPr>
+            <a:xfrm>
+              <a:off x="4683095" y="2340053"/>
+              <a:ext cx="6511896" cy="828242"/>
+            </a:xfrm>
+            <a:prstGeom prst="rect">
+              <a:avLst/>
+            </a:prstGeom>
+            <a:solidFill>
+              <a:schemeClr val="accent1"/>
+            </a:solidFill>
+          </p:spPr>
+          <p:style>
+            <a:lnRef idx="1">
+              <a:schemeClr val="accent1"/>
+            </a:lnRef>
+            <a:fillRef idx="3">
+              <a:schemeClr val="accent1"/>
+            </a:fillRef>
+            <a:effectRef idx="2">
+              <a:schemeClr val="accent1"/>
+            </a:effectRef>
+            <a:fontRef idx="minor">
+              <a:schemeClr val="lt1"/>
+            </a:fontRef>
+          </p:style>
+          <p:txBody>
+            <a:bodyPr rtlCol="0" anchor="ctr"/>
+            <a:lstStyle/>
+            <a:p>
+              <a:pPr algn="ctr"/>
+              <a:endParaRPr lang="zh-CN" altLang="en-US" dirty="0"/>
+            </a:p>
+          </p:txBody>
+        </p:sp>
+        <p:grpSp>
+          <p:nvGrpSpPr>
+            <p:cNvPr id="9" name="组合 8">
+              <a:extLst>
+                <a:ext uri="{FF2B5EF4-FFF2-40B4-BE49-F238E27FC236}">
+                  <a16:creationId xmlns:a16="http://schemas.microsoft.com/office/drawing/2014/main" id="{CC96666D-76CA-6285-F13D-E10E87A68B61}"/>
+                </a:ext>
+              </a:extLst>
+            </p:cNvPr>
+            <p:cNvGrpSpPr/>
+            <p:nvPr/>
+          </p:nvGrpSpPr>
+          <p:grpSpPr>
+            <a:xfrm>
+              <a:off x="3764213" y="2340052"/>
+              <a:ext cx="7281851" cy="828242"/>
+              <a:chOff x="3764213" y="2340052"/>
+              <a:chExt cx="7281851" cy="828242"/>
+            </a:xfrm>
+          </p:grpSpPr>
+          <p:sp>
+            <p:nvSpPr>
+              <p:cNvPr id="11" name="矩形 10">
+                <a:extLst>
+                  <a:ext uri="{FF2B5EF4-FFF2-40B4-BE49-F238E27FC236}">
+                    <a16:creationId xmlns:a16="http://schemas.microsoft.com/office/drawing/2014/main" id="{F6AF77DE-2149-5E70-367E-EC89888A797C}"/>
+                  </a:ext>
+                </a:extLst>
+              </p:cNvPr>
+              <p:cNvSpPr/>
+              <p:nvPr/>
+            </p:nvSpPr>
+            <p:spPr>
+              <a:xfrm>
+                <a:off x="3764213" y="2340052"/>
+                <a:ext cx="838368" cy="828242"/>
+              </a:xfrm>
+              <a:prstGeom prst="rect">
+                <a:avLst/>
+              </a:prstGeom>
+              <a:solidFill>
+                <a:schemeClr val="bg1"/>
+              </a:solidFill>
+              <a:ln>
+                <a:solidFill>
+                  <a:schemeClr val="accent1"/>
+                </a:solidFill>
+              </a:ln>
+              <a:effectLst/>
+            </p:spPr>
+            <p:style>
+              <a:lnRef idx="2">
+                <a:schemeClr val="accent1">
+                  <a:shade val="50000"/>
+                </a:schemeClr>
+              </a:lnRef>
+              <a:fillRef idx="1">
+                <a:schemeClr val="accent1"/>
+              </a:fillRef>
+              <a:effectRef idx="0">
+                <a:schemeClr val="accent1"/>
+              </a:effectRef>
+              <a:fontRef idx="minor">
+                <a:schemeClr val="lt1"/>
+              </a:fontRef>
+            </p:style>
+            <p:txBody>
+              <a:bodyPr rtlCol="0" anchor="ctr"/>
+              <a:lstStyle/>
+              <a:p>
+                <a:pPr algn="ctr"/>
+                <a:r>
+                  <a:rPr lang="en-US" altLang="zh-CN" sz="3200" b="1" dirty="0">
+                    <a:solidFill>
+                      <a:schemeClr val="tx2">
+                        <a:lumMod val="60000"/>
+                        <a:lumOff val="40000"/>
+                      </a:schemeClr>
+                    </a:solidFill>
+                    <a:latin typeface="Times New Roman" panose="02020603050405020304" pitchFamily="18" charset="0"/>
+                    <a:cs typeface="Times New Roman" panose="02020603050405020304" pitchFamily="18" charset="0"/>
+                  </a:rPr>
+                  <a:t>04</a:t>
+                </a:r>
+                <a:endParaRPr lang="zh-CN" altLang="en-US" sz="3200" b="1" dirty="0">
+                  <a:solidFill>
+                    <a:schemeClr val="tx2">
+                      <a:lumMod val="60000"/>
+                      <a:lumOff val="40000"/>
+                    </a:schemeClr>
+                  </a:solidFill>
+                  <a:latin typeface="Times New Roman" panose="02020603050405020304" pitchFamily="18" charset="0"/>
+                  <a:cs typeface="Times New Roman" panose="02020603050405020304" pitchFamily="18" charset="0"/>
+                </a:endParaRPr>
+              </a:p>
+            </p:txBody>
+          </p:sp>
+          <p:sp>
+            <p:nvSpPr>
+              <p:cNvPr id="12" name="文本框 11">
+                <a:extLst>
+                  <a:ext uri="{FF2B5EF4-FFF2-40B4-BE49-F238E27FC236}">
+                    <a16:creationId xmlns:a16="http://schemas.microsoft.com/office/drawing/2014/main" id="{85D152B7-2577-DD1D-A5D8-A851D64A263F}"/>
+                  </a:ext>
+                </a:extLst>
+              </p:cNvPr>
+              <p:cNvSpPr txBox="1"/>
+              <p:nvPr/>
+            </p:nvSpPr>
+            <p:spPr>
+              <a:xfrm>
+                <a:off x="4765435" y="2489134"/>
+                <a:ext cx="6280629" cy="584775"/>
+              </a:xfrm>
+              <a:prstGeom prst="rect">
+                <a:avLst/>
+              </a:prstGeom>
+              <a:noFill/>
+            </p:spPr>
+            <p:txBody>
+              <a:bodyPr wrap="square">
+                <a:spAutoFit/>
+              </a:bodyPr>
+              <a:lstStyle/>
+              <a:p>
+                <a:r>
+                  <a:rPr lang="zh-CN" altLang="en-US" sz="3200" b="1" i="0" dirty="0">
+                    <a:solidFill>
+                      <a:schemeClr val="bg1"/>
+                    </a:solidFill>
+                    <a:effectLst/>
+                    <a:latin typeface="微软雅黑" panose="020B0503020204020204" pitchFamily="34" charset="-122"/>
+                    <a:ea typeface="微软雅黑" panose="020B0503020204020204" pitchFamily="34" charset="-122"/>
+                  </a:rPr>
+                  <a:t>总结</a:t>
                 </a:r>
                 <a:endParaRPr lang="zh-CN" altLang="en-US" sz="3200" dirty="0">
                   <a:solidFill>
@@ -5826,7 +6276,7 @@
                 <a:latin typeface="微软雅黑" panose="020B0503020204020204" pitchFamily="34" charset="-122"/>
                 <a:ea typeface="微软雅黑" panose="020B0503020204020204" pitchFamily="34" charset="-122"/>
               </a:rPr>
-              <a:t>➢ 核心痛点分析</a:t>
+              <a:t>➢ 小标题</a:t>
             </a:r>
             <a:endParaRPr lang="zh-CN" altLang="en-US" sz="2000" dirty="0">
               <a:latin typeface="微软雅黑" panose="020B0503020204020204" pitchFamily="34" charset="-122"/>
@@ -5886,7 +6336,7 @@
                 <a:latin typeface="微软雅黑" panose="020B0503020204020204" pitchFamily="34" charset="-122"/>
                 <a:ea typeface="微软雅黑" panose="020B0503020204020204" pitchFamily="34" charset="-122"/>
               </a:rPr>
-              <a:t>项目背景介绍</a:t>
+              <a:t>模板一</a:t>
             </a:r>
           </a:p>
         </p:txBody>
@@ -5906,7 +6356,7 @@
         <p:spPr>
           <a:xfrm>
             <a:off x="541056" y="1662123"/>
-            <a:ext cx="11365194" cy="1179810"/>
+            <a:ext cx="11365194" cy="1585049"/>
           </a:xfrm>
           <a:prstGeom prst="rect">
             <a:avLst/>
@@ -5924,15 +6374,15 @@
           </a:bodyPr>
           <a:lstStyle/>
           <a:p>
-            <a:pPr algn="l">
+            <a:pPr marL="285750" indent="-285750" algn="l">
               <a:spcBef>
                 <a:spcPts val="375"/>
               </a:spcBef>
               <a:spcAft>
                 <a:spcPts val="600"/>
               </a:spcAft>
-              <a:buFont typeface="Arial" panose="020B0604020202020204" pitchFamily="34" charset="0"/>
-              <a:buChar char="•"/>
+              <a:buFont typeface="Wingdings" panose="05000000000000000000" pitchFamily="2" charset="2"/>
+              <a:buChar char="n"/>
             </a:pPr>
             <a:r>
               <a:rPr lang="zh-CN" altLang="en-US" b="0" i="0" dirty="0">
@@ -5943,67 +6393,73 @@
                 <a:latin typeface="微软雅黑" panose="020B0503020204020204" pitchFamily="34" charset="-122"/>
                 <a:ea typeface="微软雅黑" panose="020B0503020204020204" pitchFamily="34" charset="-122"/>
               </a:rPr>
-              <a:t>现有方案的局限性较高</a:t>
-            </a:r>
-          </a:p>
-          <a:p>
-            <a:pPr algn="l">
+              <a:t>列表</a:t>
+            </a:r>
+            <a:r>
+              <a:rPr lang="en-US" altLang="zh-CN" b="0" i="0" dirty="0">
+                <a:solidFill>
+                  <a:srgbClr val="000000"/>
+                </a:solidFill>
+                <a:effectLst/>
+                <a:latin typeface="微软雅黑" panose="020B0503020204020204" pitchFamily="34" charset="-122"/>
+                <a:ea typeface="微软雅黑" panose="020B0503020204020204" pitchFamily="34" charset="-122"/>
+              </a:rPr>
+              <a:t>1</a:t>
+            </a:r>
+          </a:p>
+          <a:p>
+            <a:pPr marL="285750" indent="-285750" algn="l">
               <a:spcBef>
                 <a:spcPts val="375"/>
               </a:spcBef>
               <a:spcAft>
                 <a:spcPts val="600"/>
               </a:spcAft>
-              <a:buFont typeface="Arial" panose="020B0604020202020204" pitchFamily="34" charset="0"/>
-              <a:buChar char="•"/>
+              <a:buFont typeface="Wingdings" panose="05000000000000000000" pitchFamily="2" charset="2"/>
+              <a:buChar char="n"/>
             </a:pPr>
             <a:r>
-              <a:rPr lang="zh-CN" altLang="en-US" b="0" i="0" dirty="0">
+              <a:rPr lang="zh-CN" altLang="en-US" dirty="0">
                 <a:solidFill>
                   <a:srgbClr val="000000"/>
                 </a:solidFill>
-                <a:effectLst/>
                 <a:latin typeface="微软雅黑" panose="020B0503020204020204" pitchFamily="34" charset="-122"/>
                 <a:ea typeface="微软雅黑" panose="020B0503020204020204" pitchFamily="34" charset="-122"/>
               </a:rPr>
-              <a:t>用户对高颜值 </a:t>
-            </a:r>
-            <a:r>
-              <a:rPr lang="en-US" altLang="zh-CN" b="0" i="0" dirty="0">
+              <a:t>列表</a:t>
+            </a:r>
+            <a:r>
+              <a:rPr lang="en-US" altLang="zh-CN" dirty="0">
                 <a:solidFill>
                   <a:srgbClr val="000000"/>
                 </a:solidFill>
-                <a:effectLst/>
                 <a:latin typeface="微软雅黑" panose="020B0503020204020204" pitchFamily="34" charset="-122"/>
                 <a:ea typeface="微软雅黑" panose="020B0503020204020204" pitchFamily="34" charset="-122"/>
               </a:rPr>
-              <a:t>PPT </a:t>
-            </a:r>
-            <a:r>
-              <a:rPr lang="zh-CN" altLang="en-US" b="0" i="0" dirty="0">
-                <a:solidFill>
-                  <a:srgbClr val="000000"/>
-                </a:solidFill>
-                <a:effectLst/>
-                <a:latin typeface="微软雅黑" panose="020B0503020204020204" pitchFamily="34" charset="-122"/>
-                <a:ea typeface="微软雅黑" panose="020B0503020204020204" pitchFamily="34" charset="-122"/>
-              </a:rPr>
-              <a:t>的需求日益增长</a:t>
-            </a:r>
-          </a:p>
-          <a:p>
-            <a:pPr algn="l">
+              <a:t>2</a:t>
+            </a:r>
+            <a:endParaRPr lang="zh-CN" altLang="en-US" b="0" i="0" dirty="0">
+              <a:solidFill>
+                <a:srgbClr val="000000"/>
+              </a:solidFill>
+              <a:effectLst/>
+              <a:latin typeface="微软雅黑" panose="020B0503020204020204" pitchFamily="34" charset="-122"/>
+              <a:ea typeface="微软雅黑" panose="020B0503020204020204" pitchFamily="34" charset="-122"/>
+            </a:endParaRPr>
+          </a:p>
+          <a:p>
+            <a:pPr marL="285750" indent="-285750" algn="l">
               <a:spcBef>
                 <a:spcPts val="375"/>
               </a:spcBef>
               <a:spcAft>
                 <a:spcPts val="600"/>
               </a:spcAft>
-              <a:buFont typeface="Arial" panose="020B0604020202020204" pitchFamily="34" charset="0"/>
-              <a:buChar char="•"/>
+              <a:buFont typeface="Wingdings" panose="05000000000000000000" pitchFamily="2" charset="2"/>
+              <a:buChar char="n"/>
             </a:pPr>
             <a:r>
-              <a:rPr lang="en-US" altLang="zh-CN" b="0" i="0" dirty="0">
+              <a:rPr lang="zh-CN" altLang="en-US" b="0" i="0" dirty="0">
                 <a:solidFill>
                   <a:srgbClr val="000000"/>
                 </a:solidFill>
@@ -6011,10 +6467,10 @@
                 <a:latin typeface="微软雅黑" panose="020B0503020204020204" pitchFamily="34" charset="-122"/>
                 <a:ea typeface="微软雅黑" panose="020B0503020204020204" pitchFamily="34" charset="-122"/>
               </a:rPr>
-              <a:t>Marp </a:t>
-            </a:r>
-            <a:r>
-              <a:rPr lang="zh-CN" altLang="en-US" b="0" i="0" dirty="0">
+              <a:t>列表</a:t>
+            </a:r>
+            <a:r>
+              <a:rPr lang="en-US" altLang="zh-CN" b="0" i="0" dirty="0">
                 <a:solidFill>
                   <a:srgbClr val="000000"/>
                 </a:solidFill>
@@ -6022,30 +6478,222 @@
                 <a:latin typeface="微软雅黑" panose="020B0503020204020204" pitchFamily="34" charset="-122"/>
                 <a:ea typeface="微软雅黑" panose="020B0503020204020204" pitchFamily="34" charset="-122"/>
               </a:rPr>
-              <a:t>原生导出的 </a:t>
-            </a:r>
-            <a:r>
-              <a:rPr lang="en-US" altLang="zh-CN" b="0" i="0" dirty="0">
+              <a:t>3</a:t>
+            </a:r>
+          </a:p>
+          <a:p>
+            <a:pPr marL="285750" indent="-285750" algn="l">
+              <a:spcBef>
+                <a:spcPts val="375"/>
+              </a:spcBef>
+              <a:spcAft>
+                <a:spcPts val="600"/>
+              </a:spcAft>
+              <a:buFont typeface="Wingdings" panose="05000000000000000000" pitchFamily="2" charset="2"/>
+              <a:buChar char="n"/>
+            </a:pPr>
+            <a:r>
+              <a:rPr lang="zh-CN" altLang="en-US" dirty="0">
                 <a:solidFill>
                   <a:srgbClr val="000000"/>
                 </a:solidFill>
-                <a:effectLst/>
                 <a:latin typeface="微软雅黑" panose="020B0503020204020204" pitchFamily="34" charset="-122"/>
                 <a:ea typeface="微软雅黑" panose="020B0503020204020204" pitchFamily="34" charset="-122"/>
               </a:rPr>
-              <a:t>PPTX </a:t>
-            </a:r>
-            <a:r>
-              <a:rPr lang="zh-CN" altLang="en-US" b="0" i="0" dirty="0">
+              <a:t>列表</a:t>
+            </a:r>
+            <a:r>
+              <a:rPr lang="en-US" altLang="zh-CN" dirty="0">
                 <a:solidFill>
                   <a:srgbClr val="000000"/>
                 </a:solidFill>
-                <a:effectLst/>
                 <a:latin typeface="微软雅黑" panose="020B0503020204020204" pitchFamily="34" charset="-122"/>
                 <a:ea typeface="微软雅黑" panose="020B0503020204020204" pitchFamily="34" charset="-122"/>
               </a:rPr>
-              <a:t>无法二次编辑</a:t>
-            </a:r>
+              <a:t>4</a:t>
+            </a:r>
+            <a:endParaRPr lang="zh-CN" altLang="en-US" b="0" i="0" dirty="0">
+              <a:solidFill>
+                <a:srgbClr val="000000"/>
+              </a:solidFill>
+              <a:effectLst/>
+              <a:latin typeface="微软雅黑" panose="020B0503020204020204" pitchFamily="34" charset="-122"/>
+              <a:ea typeface="微软雅黑" panose="020B0503020204020204" pitchFamily="34" charset="-122"/>
+            </a:endParaRPr>
+          </a:p>
+        </p:txBody>
+      </p:sp>
+      <p:sp>
+        <p:nvSpPr>
+          <p:cNvPr id="7" name="矩形 6">
+            <a:extLst>
+              <a:ext uri="{FF2B5EF4-FFF2-40B4-BE49-F238E27FC236}">
+                <a16:creationId xmlns:a16="http://schemas.microsoft.com/office/drawing/2014/main" id="{B56DAEC9-7C08-03B7-81CB-0BFFF1CE540F}"/>
+              </a:ext>
+            </a:extLst>
+          </p:cNvPr>
+          <p:cNvSpPr/>
+          <p:nvPr/>
+        </p:nvSpPr>
+        <p:spPr>
+          <a:xfrm>
+            <a:off x="541056" y="3530541"/>
+            <a:ext cx="3531798" cy="2470209"/>
+          </a:xfrm>
+          <a:prstGeom prst="rect">
+            <a:avLst/>
+          </a:prstGeom>
+          <a:solidFill>
+            <a:schemeClr val="accent1">
+              <a:lumMod val="60000"/>
+              <a:lumOff val="40000"/>
+            </a:schemeClr>
+          </a:solidFill>
+        </p:spPr>
+        <p:style>
+          <a:lnRef idx="1">
+            <a:schemeClr val="accent1"/>
+          </a:lnRef>
+          <a:fillRef idx="3">
+            <a:schemeClr val="accent1"/>
+          </a:fillRef>
+          <a:effectRef idx="2">
+            <a:schemeClr val="accent1"/>
+          </a:effectRef>
+          <a:fontRef idx="minor">
+            <a:schemeClr val="lt1"/>
+          </a:fontRef>
+        </p:style>
+        <p:txBody>
+          <a:bodyPr rtlCol="0" anchor="ctr"/>
+          <a:lstStyle/>
+          <a:p>
+            <a:pPr algn="ctr"/>
+            <a:r>
+              <a:rPr lang="zh-CN" altLang="en-US" dirty="0"/>
+              <a:t>图片</a:t>
+            </a:r>
+            <a:r>
+              <a:rPr lang="en-US" altLang="zh-CN" dirty="0"/>
+              <a:t>1</a:t>
+            </a:r>
+            <a:endParaRPr lang="zh-CN" altLang="en-US" dirty="0"/>
+          </a:p>
+        </p:txBody>
+      </p:sp>
+      <p:sp>
+        <p:nvSpPr>
+          <p:cNvPr id="9" name="矩形 8">
+            <a:extLst>
+              <a:ext uri="{FF2B5EF4-FFF2-40B4-BE49-F238E27FC236}">
+                <a16:creationId xmlns:a16="http://schemas.microsoft.com/office/drawing/2014/main" id="{0DA4D52F-BAA4-AFD3-EED3-A64DF3C3B70C}"/>
+              </a:ext>
+            </a:extLst>
+          </p:cNvPr>
+          <p:cNvSpPr/>
+          <p:nvPr/>
+        </p:nvSpPr>
+        <p:spPr>
+          <a:xfrm>
+            <a:off x="4159541" y="3530541"/>
+            <a:ext cx="3810000" cy="2470209"/>
+          </a:xfrm>
+          <a:prstGeom prst="rect">
+            <a:avLst/>
+          </a:prstGeom>
+          <a:solidFill>
+            <a:schemeClr val="accent1">
+              <a:lumMod val="60000"/>
+              <a:lumOff val="40000"/>
+            </a:schemeClr>
+          </a:solidFill>
+        </p:spPr>
+        <p:style>
+          <a:lnRef idx="1">
+            <a:schemeClr val="accent1"/>
+          </a:lnRef>
+          <a:fillRef idx="3">
+            <a:schemeClr val="accent1"/>
+          </a:fillRef>
+          <a:effectRef idx="2">
+            <a:schemeClr val="accent1"/>
+          </a:effectRef>
+          <a:fontRef idx="minor">
+            <a:schemeClr val="lt1"/>
+          </a:fontRef>
+        </p:style>
+        <p:txBody>
+          <a:bodyPr rtlCol="0" anchor="ctr"/>
+          <a:lstStyle/>
+          <a:p>
+            <a:pPr algn="ctr"/>
+            <a:r>
+              <a:rPr lang="zh-CN" altLang="en-US" dirty="0"/>
+              <a:t>图片</a:t>
+            </a:r>
+            <a:r>
+              <a:rPr lang="en-US" altLang="zh-CN" dirty="0"/>
+              <a:t>2</a:t>
+            </a:r>
+            <a:endParaRPr lang="zh-CN" altLang="en-US" dirty="0"/>
+          </a:p>
+        </p:txBody>
+      </p:sp>
+      <p:sp>
+        <p:nvSpPr>
+          <p:cNvPr id="10" name="矩形 9">
+            <a:extLst>
+              <a:ext uri="{FF2B5EF4-FFF2-40B4-BE49-F238E27FC236}">
+                <a16:creationId xmlns:a16="http://schemas.microsoft.com/office/drawing/2014/main" id="{76E3650E-7D7E-5D0B-CD73-1B66D1A45CAE}"/>
+              </a:ext>
+            </a:extLst>
+          </p:cNvPr>
+          <p:cNvSpPr/>
+          <p:nvPr/>
+        </p:nvSpPr>
+        <p:spPr>
+          <a:xfrm>
+            <a:off x="8096250" y="3530541"/>
+            <a:ext cx="3810000" cy="2470209"/>
+          </a:xfrm>
+          <a:prstGeom prst="rect">
+            <a:avLst/>
+          </a:prstGeom>
+          <a:solidFill>
+            <a:schemeClr val="accent1">
+              <a:lumMod val="60000"/>
+              <a:lumOff val="40000"/>
+            </a:schemeClr>
+          </a:solidFill>
+        </p:spPr>
+        <p:style>
+          <a:lnRef idx="1">
+            <a:schemeClr val="accent1"/>
+          </a:lnRef>
+          <a:fillRef idx="3">
+            <a:schemeClr val="accent1"/>
+          </a:fillRef>
+          <a:effectRef idx="2">
+            <a:schemeClr val="accent1"/>
+          </a:effectRef>
+          <a:fontRef idx="minor">
+            <a:schemeClr val="lt1"/>
+          </a:fontRef>
+        </p:style>
+        <p:txBody>
+          <a:bodyPr rtlCol="0" anchor="ctr"/>
+          <a:lstStyle/>
+          <a:p>
+            <a:pPr algn="ctr"/>
+            <a:r>
+              <a:rPr lang="zh-CN" altLang="en-US" dirty="0"/>
+              <a:t>图片</a:t>
+            </a:r>
+            <a:r>
+              <a:rPr lang="en-US" altLang="zh-CN" dirty="0"/>
+              <a:t>3</a:t>
+            </a:r>
+            <a:endParaRPr lang="zh-CN" altLang="en-US" dirty="0"/>
           </a:p>
         </p:txBody>
       </p:sp>
@@ -6232,7 +6880,7 @@
         </p:nvSpPr>
         <p:spPr>
           <a:xfrm>
-            <a:off x="0" y="6477000"/>
+            <a:off x="0" y="6473502"/>
             <a:ext cx="12192000" cy="19050"/>
           </a:xfrm>
           <a:prstGeom prst="rect">
@@ -6437,7 +7085,7 @@
                 <a:latin typeface="微软雅黑" panose="020B0503020204020204" pitchFamily="34" charset="-122"/>
                 <a:ea typeface="微软雅黑" panose="020B0503020204020204" pitchFamily="34" charset="-122"/>
               </a:rPr>
-              <a:t>➢ 核心痛点分析</a:t>
+              <a:t>➢ 小标题</a:t>
             </a:r>
             <a:endParaRPr lang="zh-CN" altLang="en-US" sz="2000" dirty="0">
               <a:latin typeface="微软雅黑" panose="020B0503020204020204" pitchFamily="34" charset="-122"/>
@@ -6497,8 +7145,27 @@
                 <a:latin typeface="微软雅黑" panose="020B0503020204020204" pitchFamily="34" charset="-122"/>
                 <a:ea typeface="微软雅黑" panose="020B0503020204020204" pitchFamily="34" charset="-122"/>
               </a:rPr>
-              <a:t>项目背景介绍</a:t>
-            </a:r>
+              <a:t>模板</a:t>
+            </a:r>
+            <a:r>
+              <a:rPr lang="en-US" altLang="zh-CN" sz="3200" b="1" i="0" dirty="0">
+                <a:solidFill>
+                  <a:srgbClr val="4472C4"/>
+                </a:solidFill>
+                <a:effectLst/>
+                <a:latin typeface="微软雅黑" panose="020B0503020204020204" pitchFamily="34" charset="-122"/>
+                <a:ea typeface="微软雅黑" panose="020B0503020204020204" pitchFamily="34" charset="-122"/>
+              </a:rPr>
+              <a:t>2</a:t>
+            </a:r>
+            <a:endParaRPr lang="zh-CN" altLang="en-US" sz="3200" b="1" i="0" dirty="0">
+              <a:solidFill>
+                <a:srgbClr val="4472C4"/>
+              </a:solidFill>
+              <a:effectLst/>
+              <a:latin typeface="微软雅黑" panose="020B0503020204020204" pitchFamily="34" charset="-122"/>
+              <a:ea typeface="微软雅黑" panose="020B0503020204020204" pitchFamily="34" charset="-122"/>
+            </a:endParaRPr>
           </a:p>
         </p:txBody>
       </p:sp>
@@ -6517,7 +7184,7 @@
         <p:spPr>
           <a:xfrm>
             <a:off x="541056" y="1662123"/>
-            <a:ext cx="11365194" cy="707886"/>
+            <a:ext cx="11365194" cy="400110"/>
           </a:xfrm>
           <a:prstGeom prst="rect">
             <a:avLst/>
@@ -6550,26 +7217,33 @@
             <a:r>
               <a:rPr lang="en-US" altLang="zh-CN" sz="2000" b="0" i="0" dirty="0">
                 <a:solidFill>
-                  <a:srgbClr val="FF0000"/>
+                  <a:srgbClr val="C00000"/>
                 </a:solidFill>
                 <a:effectLst/>
                 <a:latin typeface="微软雅黑" panose="020B0503020204020204" pitchFamily="34" charset="-122"/>
                 <a:ea typeface="微软雅黑" panose="020B0503020204020204" pitchFamily="34" charset="-122"/>
               </a:rPr>
-              <a:t>*HIGHLIGHT</a:t>
-            </a:r>
-            <a:r>
-              <a:rPr lang="zh-CN" altLang="en-US" sz="2000" dirty="0">
+              <a:t>*</a:t>
+            </a:r>
+            <a:r>
+              <a:rPr lang="zh-CN" altLang="en-US" sz="2000" b="0" i="0" dirty="0">
+                <a:solidFill>
+                  <a:srgbClr val="C00000"/>
+                </a:solidFill>
+                <a:effectLst/>
                 <a:latin typeface="微软雅黑" panose="020B0503020204020204" pitchFamily="34" charset="-122"/>
                 <a:ea typeface="微软雅黑" panose="020B0503020204020204" pitchFamily="34" charset="-122"/>
               </a:rPr>
-              <a:t>长文字长文字长文字长文字长文字长文字长文字长文字长文字长文字长文字长文字长文字长文字长文字长文字长文字长文字长文字长文字长文字长文字长文字长文字</a:t>
-            </a:r>
-            <a:endParaRPr lang="zh-CN" altLang="en-US" sz="2000" b="0" i="0" dirty="0">
-              <a:effectLst/>
-              <a:latin typeface="微软雅黑" panose="020B0503020204020204" pitchFamily="34" charset="-122"/>
-              <a:ea typeface="微软雅黑" panose="020B0503020204020204" pitchFamily="34" charset="-122"/>
-            </a:endParaRPr>
+              <a:t>高亮：</a:t>
+            </a:r>
+            <a:r>
+              <a:rPr lang="zh-CN" altLang="en-US" sz="2000" b="0" i="0" dirty="0">
+                <a:effectLst/>
+                <a:latin typeface="微软雅黑" panose="020B0503020204020204" pitchFamily="34" charset="-122"/>
+                <a:ea typeface="微软雅黑" panose="020B0503020204020204" pitchFamily="34" charset="-122"/>
+              </a:rPr>
+              <a:t>填写高亮信息</a:t>
+            </a:r>
           </a:p>
         </p:txBody>
       </p:sp>
@@ -6587,7 +7261,7 @@
         </p:nvSpPr>
         <p:spPr>
           <a:xfrm>
-            <a:off x="541056" y="2534940"/>
+            <a:off x="541056" y="2249190"/>
             <a:ext cx="11365194" cy="1179810"/>
           </a:xfrm>
           <a:prstGeom prst="rect">
@@ -6606,127 +7280,265 @@
           </a:bodyPr>
           <a:lstStyle/>
           <a:p>
-            <a:pPr algn="l">
+            <a:pPr marL="285750" indent="-285750">
               <a:spcBef>
                 <a:spcPts val="375"/>
               </a:spcBef>
               <a:spcAft>
                 <a:spcPts val="600"/>
               </a:spcAft>
-              <a:buFont typeface="Arial" panose="020B0604020202020204" pitchFamily="34" charset="0"/>
-              <a:buChar char="•"/>
+              <a:buFont typeface="Wingdings" panose="05000000000000000000" pitchFamily="2" charset="2"/>
+              <a:buChar char="n"/>
             </a:pPr>
             <a:r>
-              <a:rPr lang="zh-CN" altLang="en-US" b="0" i="0" dirty="0">
+              <a:rPr lang="zh-CN" altLang="en-US" dirty="0">
                 <a:solidFill>
                   <a:srgbClr val="000000"/>
                 </a:solidFill>
-                <a:effectLst/>
                 <a:latin typeface="微软雅黑" panose="020B0503020204020204" pitchFamily="34" charset="-122"/>
                 <a:ea typeface="微软雅黑" panose="020B0503020204020204" pitchFamily="34" charset="-122"/>
               </a:rPr>
-              <a:t>现有方案的局限性较高</a:t>
-            </a:r>
-          </a:p>
-          <a:p>
-            <a:pPr algn="l">
+              <a:t>列表</a:t>
+            </a:r>
+            <a:r>
+              <a:rPr lang="en-US" altLang="zh-CN" dirty="0">
+                <a:solidFill>
+                  <a:srgbClr val="000000"/>
+                </a:solidFill>
+                <a:latin typeface="微软雅黑" panose="020B0503020204020204" pitchFamily="34" charset="-122"/>
+                <a:ea typeface="微软雅黑" panose="020B0503020204020204" pitchFamily="34" charset="-122"/>
+              </a:rPr>
+              <a:t>1</a:t>
+            </a:r>
+          </a:p>
+          <a:p>
+            <a:pPr marL="285750" indent="-285750">
               <a:spcBef>
                 <a:spcPts val="375"/>
               </a:spcBef>
               <a:spcAft>
                 <a:spcPts val="600"/>
               </a:spcAft>
-              <a:buFont typeface="Arial" panose="020B0604020202020204" pitchFamily="34" charset="0"/>
-              <a:buChar char="•"/>
+              <a:buFont typeface="Wingdings" panose="05000000000000000000" pitchFamily="2" charset="2"/>
+              <a:buChar char="n"/>
             </a:pPr>
             <a:r>
-              <a:rPr lang="zh-CN" altLang="en-US" b="0" i="0" dirty="0">
+              <a:rPr lang="zh-CN" altLang="en-US" dirty="0">
                 <a:solidFill>
                   <a:srgbClr val="000000"/>
                 </a:solidFill>
-                <a:effectLst/>
                 <a:latin typeface="微软雅黑" panose="020B0503020204020204" pitchFamily="34" charset="-122"/>
                 <a:ea typeface="微软雅黑" panose="020B0503020204020204" pitchFamily="34" charset="-122"/>
               </a:rPr>
-              <a:t>用户对高颜值 </a:t>
-            </a:r>
-            <a:r>
-              <a:rPr lang="en-US" altLang="zh-CN" b="0" i="0" dirty="0">
+              <a:t>列表</a:t>
+            </a:r>
+            <a:r>
+              <a:rPr lang="en-US" altLang="zh-CN" dirty="0">
                 <a:solidFill>
                   <a:srgbClr val="000000"/>
                 </a:solidFill>
-                <a:effectLst/>
                 <a:latin typeface="微软雅黑" panose="020B0503020204020204" pitchFamily="34" charset="-122"/>
                 <a:ea typeface="微软雅黑" panose="020B0503020204020204" pitchFamily="34" charset="-122"/>
               </a:rPr>
-              <a:t>PPT </a:t>
-            </a:r>
-            <a:r>
-              <a:rPr lang="zh-CN" altLang="en-US" b="0" i="0" dirty="0">
-                <a:solidFill>
-                  <a:srgbClr val="000000"/>
-                </a:solidFill>
-                <a:effectLst/>
-                <a:latin typeface="微软雅黑" panose="020B0503020204020204" pitchFamily="34" charset="-122"/>
-                <a:ea typeface="微软雅黑" panose="020B0503020204020204" pitchFamily="34" charset="-122"/>
-              </a:rPr>
-              <a:t>的需求日益增长</a:t>
-            </a:r>
-          </a:p>
-          <a:p>
-            <a:pPr algn="l">
+              <a:t>2</a:t>
+            </a:r>
+            <a:endParaRPr lang="zh-CN" altLang="en-US" dirty="0">
+              <a:solidFill>
+                <a:srgbClr val="000000"/>
+              </a:solidFill>
+              <a:latin typeface="微软雅黑" panose="020B0503020204020204" pitchFamily="34" charset="-122"/>
+              <a:ea typeface="微软雅黑" panose="020B0503020204020204" pitchFamily="34" charset="-122"/>
+            </a:endParaRPr>
+          </a:p>
+          <a:p>
+            <a:pPr marL="285750" indent="-285750">
               <a:spcBef>
                 <a:spcPts val="375"/>
               </a:spcBef>
               <a:spcAft>
                 <a:spcPts val="600"/>
               </a:spcAft>
-              <a:buFont typeface="Arial" panose="020B0604020202020204" pitchFamily="34" charset="0"/>
-              <a:buChar char="•"/>
+              <a:buFont typeface="Wingdings" panose="05000000000000000000" pitchFamily="2" charset="2"/>
+              <a:buChar char="n"/>
             </a:pPr>
             <a:r>
-              <a:rPr lang="en-US" altLang="zh-CN" b="0" i="0" dirty="0">
+              <a:rPr lang="zh-CN" altLang="en-US" dirty="0">
                 <a:solidFill>
                   <a:srgbClr val="000000"/>
                 </a:solidFill>
-                <a:effectLst/>
                 <a:latin typeface="微软雅黑" panose="020B0503020204020204" pitchFamily="34" charset="-122"/>
                 <a:ea typeface="微软雅黑" panose="020B0503020204020204" pitchFamily="34" charset="-122"/>
               </a:rPr>
-              <a:t>Marp </a:t>
-            </a:r>
-            <a:r>
-              <a:rPr lang="zh-CN" altLang="en-US" b="0" i="0" dirty="0">
+              <a:t>列表</a:t>
+            </a:r>
+            <a:r>
+              <a:rPr lang="en-US" altLang="zh-CN" dirty="0">
                 <a:solidFill>
                   <a:srgbClr val="000000"/>
                 </a:solidFill>
-                <a:effectLst/>
                 <a:latin typeface="微软雅黑" panose="020B0503020204020204" pitchFamily="34" charset="-122"/>
                 <a:ea typeface="微软雅黑" panose="020B0503020204020204" pitchFamily="34" charset="-122"/>
               </a:rPr>
-              <a:t>原生导出的 </a:t>
-            </a:r>
-            <a:r>
-              <a:rPr lang="en-US" altLang="zh-CN" b="0" i="0" dirty="0">
-                <a:solidFill>
-                  <a:srgbClr val="000000"/>
-                </a:solidFill>
-                <a:effectLst/>
-                <a:latin typeface="微软雅黑" panose="020B0503020204020204" pitchFamily="34" charset="-122"/>
-                <a:ea typeface="微软雅黑" panose="020B0503020204020204" pitchFamily="34" charset="-122"/>
-              </a:rPr>
-              <a:t>PPTX </a:t>
-            </a:r>
-            <a:r>
-              <a:rPr lang="zh-CN" altLang="en-US" b="0" i="0" dirty="0">
-                <a:solidFill>
-                  <a:srgbClr val="000000"/>
-                </a:solidFill>
-                <a:effectLst/>
-                <a:latin typeface="微软雅黑" panose="020B0503020204020204" pitchFamily="34" charset="-122"/>
-                <a:ea typeface="微软雅黑" panose="020B0503020204020204" pitchFamily="34" charset="-122"/>
-              </a:rPr>
-              <a:t>无法二次编辑</a:t>
+              <a:t>3</a:t>
+            </a:r>
+          </a:p>
+        </p:txBody>
+      </p:sp>
+      <p:sp>
+        <p:nvSpPr>
+          <p:cNvPr id="10" name="矩形 9">
+            <a:extLst>
+              <a:ext uri="{FF2B5EF4-FFF2-40B4-BE49-F238E27FC236}">
+                <a16:creationId xmlns:a16="http://schemas.microsoft.com/office/drawing/2014/main" id="{73A09E2F-7EA1-8162-4FBE-400A6351203C}"/>
+              </a:ext>
+            </a:extLst>
+          </p:cNvPr>
+          <p:cNvSpPr/>
+          <p:nvPr/>
+        </p:nvSpPr>
+        <p:spPr>
+          <a:xfrm>
+            <a:off x="541057" y="3661794"/>
+            <a:ext cx="3531798" cy="2470209"/>
+          </a:xfrm>
+          <a:prstGeom prst="rect">
+            <a:avLst/>
+          </a:prstGeom>
+          <a:solidFill>
+            <a:schemeClr val="accent1">
+              <a:lumMod val="60000"/>
+              <a:lumOff val="40000"/>
+            </a:schemeClr>
+          </a:solidFill>
+        </p:spPr>
+        <p:style>
+          <a:lnRef idx="1">
+            <a:schemeClr val="accent1"/>
+          </a:lnRef>
+          <a:fillRef idx="3">
+            <a:schemeClr val="accent1"/>
+          </a:fillRef>
+          <a:effectRef idx="2">
+            <a:schemeClr val="accent1"/>
+          </a:effectRef>
+          <a:fontRef idx="minor">
+            <a:schemeClr val="lt1"/>
+          </a:fontRef>
+        </p:style>
+        <p:txBody>
+          <a:bodyPr rtlCol="0" anchor="ctr"/>
+          <a:lstStyle/>
+          <a:p>
+            <a:pPr algn="ctr"/>
+            <a:r>
+              <a:rPr lang="zh-CN" altLang="en-US" dirty="0"/>
+              <a:t>图片</a:t>
+            </a:r>
+          </a:p>
+        </p:txBody>
+      </p:sp>
+      <p:sp>
+        <p:nvSpPr>
+          <p:cNvPr id="11" name="矩形 10">
+            <a:extLst>
+              <a:ext uri="{FF2B5EF4-FFF2-40B4-BE49-F238E27FC236}">
+                <a16:creationId xmlns:a16="http://schemas.microsoft.com/office/drawing/2014/main" id="{D783CAC9-BDD5-74AA-A7AE-6D0DC6D9644F}"/>
+              </a:ext>
+            </a:extLst>
+          </p:cNvPr>
+          <p:cNvSpPr/>
+          <p:nvPr/>
+        </p:nvSpPr>
+        <p:spPr>
+          <a:xfrm>
+            <a:off x="4159542" y="3661794"/>
+            <a:ext cx="3810000" cy="2470209"/>
+          </a:xfrm>
+          <a:prstGeom prst="rect">
+            <a:avLst/>
+          </a:prstGeom>
+          <a:solidFill>
+            <a:schemeClr val="accent1">
+              <a:lumMod val="60000"/>
+              <a:lumOff val="40000"/>
+            </a:schemeClr>
+          </a:solidFill>
+        </p:spPr>
+        <p:style>
+          <a:lnRef idx="1">
+            <a:schemeClr val="accent1"/>
+          </a:lnRef>
+          <a:fillRef idx="3">
+            <a:schemeClr val="accent1"/>
+          </a:fillRef>
+          <a:effectRef idx="2">
+            <a:schemeClr val="accent1"/>
+          </a:effectRef>
+          <a:fontRef idx="minor">
+            <a:schemeClr val="lt1"/>
+          </a:fontRef>
+        </p:style>
+        <p:txBody>
+          <a:bodyPr rtlCol="0" anchor="ctr"/>
+          <a:lstStyle/>
+          <a:p>
+            <a:pPr algn="ctr"/>
+            <a:r>
+              <a:rPr lang="zh-CN" altLang="en-US" dirty="0"/>
+              <a:t>图片</a:t>
+            </a:r>
+          </a:p>
+        </p:txBody>
+      </p:sp>
+      <p:sp>
+        <p:nvSpPr>
+          <p:cNvPr id="13" name="矩形 12">
+            <a:extLst>
+              <a:ext uri="{FF2B5EF4-FFF2-40B4-BE49-F238E27FC236}">
+                <a16:creationId xmlns:a16="http://schemas.microsoft.com/office/drawing/2014/main" id="{196EC1B0-07A8-2233-67F9-F42221F842E9}"/>
+              </a:ext>
+            </a:extLst>
+          </p:cNvPr>
+          <p:cNvSpPr/>
+          <p:nvPr/>
+        </p:nvSpPr>
+        <p:spPr>
+          <a:xfrm>
+            <a:off x="8096251" y="3642744"/>
+            <a:ext cx="3810000" cy="2470209"/>
+          </a:xfrm>
+          <a:prstGeom prst="rect">
+            <a:avLst/>
+          </a:prstGeom>
+          <a:solidFill>
+            <a:schemeClr val="accent1">
+              <a:lumMod val="60000"/>
+              <a:lumOff val="40000"/>
+            </a:schemeClr>
+          </a:solidFill>
+        </p:spPr>
+        <p:style>
+          <a:lnRef idx="1">
+            <a:schemeClr val="accent1"/>
+          </a:lnRef>
+          <a:fillRef idx="3">
+            <a:schemeClr val="accent1"/>
+          </a:fillRef>
+          <a:effectRef idx="2">
+            <a:schemeClr val="accent1"/>
+          </a:effectRef>
+          <a:fontRef idx="minor">
+            <a:schemeClr val="lt1"/>
+          </a:fontRef>
+        </p:style>
+        <p:txBody>
+          <a:bodyPr rtlCol="0" anchor="ctr"/>
+          <a:lstStyle/>
+          <a:p>
+            <a:pPr algn="ctr"/>
+            <a:r>
+              <a:rPr lang="zh-CN" altLang="en-US" dirty="0"/>
+              <a:t>图片</a:t>
             </a:r>
           </a:p>
         </p:txBody>
@@ -6749,7 +7561,13 @@
   <p:cSld>
     <p:spTree>
       <p:nvGrpSpPr>
-        <p:cNvPr id="1" name=""/>
+        <p:cNvPr id="1" name="">
+          <a:extLst>
+            <a:ext uri="{FF2B5EF4-FFF2-40B4-BE49-F238E27FC236}">
+              <a16:creationId xmlns:a16="http://schemas.microsoft.com/office/drawing/2014/main" id="{43A46D52-F515-DE3B-EBB1-B3E76657FE46}"/>
+            </a:ext>
+          </a:extLst>
+        </p:cNvPr>
         <p:cNvGrpSpPr/>
         <p:nvPr/>
       </p:nvGrpSpPr>
@@ -6763,10 +7581,202 @@
       </p:grpSpPr>
       <p:sp>
         <p:nvSpPr>
-          <p:cNvPr id="7" name="文本框 6">
+          <p:cNvPr id="2" name="Rectangle 1">
             <a:extLst>
               <a:ext uri="{FF2B5EF4-FFF2-40B4-BE49-F238E27FC236}">
-                <a16:creationId xmlns:a16="http://schemas.microsoft.com/office/drawing/2014/main" id="{66A19AAD-1CDF-4899-8D9B-772D397CF09A}"/>
+                <a16:creationId xmlns:a16="http://schemas.microsoft.com/office/drawing/2014/main" id="{25961815-4A3C-A81E-B721-5AA13E35548B}"/>
+              </a:ext>
+            </a:extLst>
+          </p:cNvPr>
+          <p:cNvSpPr/>
+          <p:nvPr/>
+        </p:nvSpPr>
+        <p:spPr>
+          <a:xfrm>
+            <a:off x="0" y="857250"/>
+            <a:ext cx="7905750" cy="76200"/>
+          </a:xfrm>
+          <a:prstGeom prst="rect">
+            <a:avLst/>
+          </a:prstGeom>
+          <a:solidFill>
+            <a:srgbClr val="5B8BC6"/>
+          </a:solidFill>
+          <a:ln>
+            <a:noFill/>
+          </a:ln>
+          <a:effectLst/>
+        </p:spPr>
+        <p:style>
+          <a:lnRef idx="1">
+            <a:schemeClr val="accent1"/>
+          </a:lnRef>
+          <a:fillRef idx="3">
+            <a:schemeClr val="accent1"/>
+          </a:fillRef>
+          <a:effectRef idx="2">
+            <a:schemeClr val="accent1"/>
+          </a:effectRef>
+          <a:fontRef idx="minor">
+            <a:schemeClr val="lt1"/>
+          </a:fontRef>
+        </p:style>
+        <p:txBody>
+          <a:bodyPr rtlCol="0" anchor="ctr"/>
+          <a:lstStyle/>
+          <a:p>
+            <a:pPr algn="ctr"/>
+            <a:endParaRPr dirty="0">
+              <a:latin typeface="微软雅黑" panose="020B0503020204020204" pitchFamily="34" charset="-122"/>
+              <a:ea typeface="微软雅黑" panose="020B0503020204020204" pitchFamily="34" charset="-122"/>
+            </a:endParaRPr>
+          </a:p>
+        </p:txBody>
+      </p:sp>
+      <p:sp>
+        <p:nvSpPr>
+          <p:cNvPr id="3" name="Rectangle 2">
+            <a:extLst>
+              <a:ext uri="{FF2B5EF4-FFF2-40B4-BE49-F238E27FC236}">
+                <a16:creationId xmlns:a16="http://schemas.microsoft.com/office/drawing/2014/main" id="{034E0313-AE69-9C84-E9C0-E479B3F60070}"/>
+              </a:ext>
+            </a:extLst>
+          </p:cNvPr>
+          <p:cNvSpPr/>
+          <p:nvPr/>
+        </p:nvSpPr>
+        <p:spPr>
+          <a:xfrm>
+            <a:off x="8096250" y="885825"/>
+            <a:ext cx="4095750" cy="28575"/>
+          </a:xfrm>
+          <a:prstGeom prst="rect">
+            <a:avLst/>
+          </a:prstGeom>
+          <a:solidFill>
+            <a:srgbClr val="9CC2E5"/>
+          </a:solidFill>
+          <a:ln>
+            <a:noFill/>
+          </a:ln>
+          <a:effectLst/>
+        </p:spPr>
+        <p:style>
+          <a:lnRef idx="1">
+            <a:schemeClr val="accent1"/>
+          </a:lnRef>
+          <a:fillRef idx="3">
+            <a:schemeClr val="accent1"/>
+          </a:fillRef>
+          <a:effectRef idx="2">
+            <a:schemeClr val="accent1"/>
+          </a:effectRef>
+          <a:fontRef idx="minor">
+            <a:schemeClr val="lt1"/>
+          </a:fontRef>
+        </p:style>
+        <p:txBody>
+          <a:bodyPr rtlCol="0" anchor="ctr"/>
+          <a:lstStyle/>
+          <a:p>
+            <a:pPr algn="ctr"/>
+            <a:endParaRPr dirty="0">
+              <a:latin typeface="微软雅黑" panose="020B0503020204020204" pitchFamily="34" charset="-122"/>
+              <a:ea typeface="微软雅黑" panose="020B0503020204020204" pitchFamily="34" charset="-122"/>
+            </a:endParaRPr>
+          </a:p>
+        </p:txBody>
+      </p:sp>
+      <p:pic>
+        <p:nvPicPr>
+          <p:cNvPr id="4" name="Picture 3" descr="heu_logo_color.png">
+            <a:extLst>
+              <a:ext uri="{FF2B5EF4-FFF2-40B4-BE49-F238E27FC236}">
+                <a16:creationId xmlns:a16="http://schemas.microsoft.com/office/drawing/2014/main" id="{EF470C96-29F0-5B67-BF9B-9D3B64D2FD97}"/>
+              </a:ext>
+            </a:extLst>
+          </p:cNvPr>
+          <p:cNvPicPr>
+            <a:picLocks noChangeAspect="1"/>
+          </p:cNvPicPr>
+          <p:nvPr/>
+        </p:nvPicPr>
+        <p:blipFill>
+          <a:blip r:embed="rId2"/>
+          <a:stretch>
+            <a:fillRect/>
+          </a:stretch>
+        </p:blipFill>
+        <p:spPr>
+          <a:xfrm>
+            <a:off x="9577062" y="158750"/>
+            <a:ext cx="2329188" cy="619125"/>
+          </a:xfrm>
+          <a:prstGeom prst="rect">
+            <a:avLst/>
+          </a:prstGeom>
+        </p:spPr>
+      </p:pic>
+      <p:sp>
+        <p:nvSpPr>
+          <p:cNvPr id="5" name="Rectangle 4">
+            <a:extLst>
+              <a:ext uri="{FF2B5EF4-FFF2-40B4-BE49-F238E27FC236}">
+                <a16:creationId xmlns:a16="http://schemas.microsoft.com/office/drawing/2014/main" id="{ADFBEDC1-9E0B-7C17-8A81-B1755C123C2F}"/>
+              </a:ext>
+            </a:extLst>
+          </p:cNvPr>
+          <p:cNvSpPr/>
+          <p:nvPr/>
+        </p:nvSpPr>
+        <p:spPr>
+          <a:xfrm>
+            <a:off x="0" y="6473502"/>
+            <a:ext cx="12192000" cy="19050"/>
+          </a:xfrm>
+          <a:prstGeom prst="rect">
+            <a:avLst/>
+          </a:prstGeom>
+          <a:solidFill>
+            <a:srgbClr val="3E649A"/>
+          </a:solidFill>
+          <a:ln>
+            <a:noFill/>
+          </a:ln>
+          <a:effectLst/>
+        </p:spPr>
+        <p:style>
+          <a:lnRef idx="1">
+            <a:schemeClr val="accent1"/>
+          </a:lnRef>
+          <a:fillRef idx="3">
+            <a:schemeClr val="accent1"/>
+          </a:fillRef>
+          <a:effectRef idx="2">
+            <a:schemeClr val="accent1"/>
+          </a:effectRef>
+          <a:fontRef idx="minor">
+            <a:schemeClr val="lt1"/>
+          </a:fontRef>
+        </p:style>
+        <p:txBody>
+          <a:bodyPr rtlCol="0" anchor="ctr"/>
+          <a:lstStyle/>
+          <a:p>
+            <a:pPr algn="ctr"/>
+            <a:endParaRPr dirty="0">
+              <a:latin typeface="微软雅黑" panose="020B0503020204020204" pitchFamily="34" charset="-122"/>
+              <a:ea typeface="微软雅黑" panose="020B0503020204020204" pitchFamily="34" charset="-122"/>
+            </a:endParaRPr>
+          </a:p>
+        </p:txBody>
+      </p:sp>
+      <p:sp>
+        <p:nvSpPr>
+          <p:cNvPr id="6" name="TextBox 5">
+            <a:extLst>
+              <a:ext uri="{FF2B5EF4-FFF2-40B4-BE49-F238E27FC236}">
+                <a16:creationId xmlns:a16="http://schemas.microsoft.com/office/drawing/2014/main" id="{E98C2EBF-41A5-CF24-6791-592D274C6963}"/>
               </a:ext>
             </a:extLst>
           </p:cNvPr>
@@ -6775,8 +7785,8 @@
         </p:nvSpPr>
         <p:spPr>
           <a:xfrm>
-            <a:off x="2170700" y="2395120"/>
-            <a:ext cx="9758680" cy="1323439"/>
+            <a:off x="101481" y="6511806"/>
+            <a:ext cx="2087431" cy="369332"/>
           </a:xfrm>
           <a:prstGeom prst="rect">
             <a:avLst/>
@@ -6784,148 +7794,3846 @@
           <a:noFill/>
         </p:spPr>
         <p:txBody>
-          <a:bodyPr wrap="square" rtlCol="0">
+          <a:bodyPr wrap="none">
             <a:spAutoFit/>
           </a:bodyPr>
           <a:lstStyle/>
           <a:p>
-            <a:pPr algn="ctr"/>
-            <a:r>
-              <a:rPr lang="en-US" altLang="zh-CN" sz="8000" dirty="0">
-                <a:gradFill>
-                  <a:gsLst>
-                    <a:gs pos="0">
-                      <a:schemeClr val="accent1"/>
-                    </a:gs>
-                    <a:gs pos="100000">
-                      <a:schemeClr val="bg1">
-                        <a:alpha val="0"/>
-                      </a:schemeClr>
-                    </a:gs>
-                  </a:gsLst>
-                  <a:lin ang="5400000" scaled="1"/>
-                </a:gradFill>
-                <a:latin typeface="Impact" panose="020B0806030902050204" pitchFamily="34" charset="0"/>
+            <a:pPr>
+              <a:defRPr sz="1800">
+                <a:solidFill>
+                  <a:srgbClr val="1E1E1E"/>
+                </a:solidFill>
+                <a:latin typeface="KaiTi"/>
+              </a:defRPr>
+            </a:pPr>
+            <a:r>
+              <a:rPr dirty="0" err="1">
+                <a:solidFill>
+                  <a:schemeClr val="tx1">
+                    <a:lumMod val="50000"/>
+                    <a:lumOff val="50000"/>
+                  </a:schemeClr>
+                </a:solidFill>
+                <a:latin typeface="华文行楷" panose="02010800040101010101" pitchFamily="2" charset="-122"/>
+                <a:ea typeface="华文行楷" panose="02010800040101010101" pitchFamily="2" charset="-122"/>
               </a:rPr>
-              <a:t>THANKS FOR LISTENING</a:t>
-            </a:r>
-            <a:endParaRPr lang="zh-CN" altLang="en-US" sz="8000" dirty="0">
-              <a:gradFill>
-                <a:gsLst>
-                  <a:gs pos="0">
-                    <a:schemeClr val="accent1"/>
-                  </a:gs>
-                  <a:gs pos="100000">
-                    <a:schemeClr val="bg1">
-                      <a:alpha val="0"/>
-                    </a:schemeClr>
-                  </a:gs>
-                </a:gsLst>
-                <a:lin ang="5400000" scaled="1"/>
-              </a:gradFill>
-              <a:latin typeface="Impact" panose="020B0806030902050204" pitchFamily="34" charset="0"/>
+              <a:t>大工至善</a:t>
+            </a:r>
+            <a:r>
+              <a:rPr dirty="0">
+                <a:solidFill>
+                  <a:schemeClr val="tx1">
+                    <a:lumMod val="50000"/>
+                    <a:lumOff val="50000"/>
+                  </a:schemeClr>
+                </a:solidFill>
+                <a:latin typeface="华文行楷" panose="02010800040101010101" pitchFamily="2" charset="-122"/>
+                <a:ea typeface="华文行楷" panose="02010800040101010101" pitchFamily="2" charset="-122"/>
+              </a:rPr>
+              <a:t> </a:t>
+            </a:r>
+            <a:r>
+              <a:rPr dirty="0" err="1">
+                <a:solidFill>
+                  <a:schemeClr val="tx1">
+                    <a:lumMod val="50000"/>
+                    <a:lumOff val="50000"/>
+                  </a:schemeClr>
+                </a:solidFill>
+                <a:latin typeface="华文行楷" panose="02010800040101010101" pitchFamily="2" charset="-122"/>
+                <a:ea typeface="华文行楷" panose="02010800040101010101" pitchFamily="2" charset="-122"/>
+              </a:rPr>
+              <a:t>大学至真</a:t>
+            </a:r>
+            <a:endParaRPr dirty="0">
+              <a:solidFill>
+                <a:schemeClr val="tx1">
+                  <a:lumMod val="50000"/>
+                  <a:lumOff val="50000"/>
+                </a:schemeClr>
+              </a:solidFill>
+              <a:latin typeface="华文行楷" panose="02010800040101010101" pitchFamily="2" charset="-122"/>
+              <a:ea typeface="华文行楷" panose="02010800040101010101" pitchFamily="2" charset="-122"/>
             </a:endParaRPr>
           </a:p>
         </p:txBody>
       </p:sp>
       <p:sp>
         <p:nvSpPr>
-          <p:cNvPr id="8" name="标题 1">
+          <p:cNvPr id="8" name="灯片编号占位符 7">
             <a:extLst>
               <a:ext uri="{FF2B5EF4-FFF2-40B4-BE49-F238E27FC236}">
-                <a16:creationId xmlns:a16="http://schemas.microsoft.com/office/drawing/2014/main" id="{ABB4B086-4071-4C4C-9FF8-B987D7306B9B}"/>
+                <a16:creationId xmlns:a16="http://schemas.microsoft.com/office/drawing/2014/main" id="{34FEDEED-8588-2205-269A-330F03950B32}"/>
               </a:ext>
             </a:extLst>
           </p:cNvPr>
-          <p:cNvSpPr txBox="1">
-            <a:spLocks/>
+          <p:cNvSpPr>
+            <a:spLocks noGrp="1"/>
           </p:cNvSpPr>
+          <p:nvPr>
+            <p:ph type="sldNum" sz="quarter" idx="12"/>
+          </p:nvPr>
+        </p:nvSpPr>
+        <p:spPr>
+          <a:xfrm>
+            <a:off x="11423769" y="6492875"/>
+            <a:ext cx="482481" cy="365125"/>
+          </a:xfrm>
+        </p:spPr>
+        <p:txBody>
+          <a:bodyPr/>
+          <a:lstStyle/>
+          <a:p>
+            <a:fld id="{C1FF6DA9-008F-8B48-92A6-B652298478BF}" type="slidenum">
+              <a:rPr lang="en-US" sz="1400" smtClean="0">
+                <a:latin typeface="Times New Roman" panose="02020603050405020304" pitchFamily="18" charset="0"/>
+                <a:cs typeface="Times New Roman" panose="02020603050405020304" pitchFamily="18" charset="0"/>
+              </a:rPr>
+              <a:t>5</a:t>
+            </a:fld>
+            <a:endParaRPr lang="en-US" sz="1400" dirty="0">
+              <a:latin typeface="Times New Roman" panose="02020603050405020304" pitchFamily="18" charset="0"/>
+              <a:cs typeface="Times New Roman" panose="02020603050405020304" pitchFamily="18" charset="0"/>
+            </a:endParaRPr>
+          </a:p>
+        </p:txBody>
+      </p:sp>
+      <p:sp>
+        <p:nvSpPr>
+          <p:cNvPr id="12" name="文本框 11">
+            <a:extLst>
+              <a:ext uri="{FF2B5EF4-FFF2-40B4-BE49-F238E27FC236}">
+                <a16:creationId xmlns:a16="http://schemas.microsoft.com/office/drawing/2014/main" id="{534F7D8E-4A7D-3214-A3E7-CA89B2DC553C}"/>
+              </a:ext>
+            </a:extLst>
+          </p:cNvPr>
+          <p:cNvSpPr txBox="1"/>
           <p:nvPr/>
         </p:nvSpPr>
         <p:spPr>
           <a:xfrm>
-            <a:off x="3069349" y="3056840"/>
-            <a:ext cx="8186902" cy="833759"/>
+            <a:off x="298569" y="1063020"/>
+            <a:ext cx="6097424" cy="400110"/>
           </a:xfrm>
           <a:prstGeom prst="rect">
             <a:avLst/>
           </a:prstGeom>
-        </p:spPr>
-        <p:txBody>
-          <a:bodyPr lIns="0" rIns="0" bIns="0" anchor="b" anchorCtr="0">
-            <a:normAutofit/>
+          <a:noFill/>
+        </p:spPr>
+        <p:txBody>
+          <a:bodyPr wrap="square">
+            <a:spAutoFit/>
           </a:bodyPr>
-          <a:lstStyle>
-            <a:lvl1pPr algn="ctr" defTabSz="914400" rtl="0" eaLnBrk="1" latinLnBrk="0" hangingPunct="1">
-              <a:lnSpc>
-                <a:spcPct val="90000"/>
-              </a:lnSpc>
+          <a:lstStyle/>
+          <a:p>
+            <a:r>
+              <a:rPr lang="zh-CN" altLang="en-US" sz="2000" b="1" i="0" dirty="0">
+                <a:solidFill>
+                  <a:srgbClr val="000000"/>
+                </a:solidFill>
+                <a:effectLst/>
+                <a:latin typeface="微软雅黑" panose="020B0503020204020204" pitchFamily="34" charset="-122"/>
+                <a:ea typeface="微软雅黑" panose="020B0503020204020204" pitchFamily="34" charset="-122"/>
+              </a:rPr>
+              <a:t>➢ 小标题</a:t>
+            </a:r>
+            <a:endParaRPr lang="zh-CN" altLang="en-US" sz="2000" dirty="0">
+              <a:latin typeface="微软雅黑" panose="020B0503020204020204" pitchFamily="34" charset="-122"/>
+              <a:ea typeface="微软雅黑" panose="020B0503020204020204" pitchFamily="34" charset="-122"/>
+            </a:endParaRPr>
+          </a:p>
+        </p:txBody>
+      </p:sp>
+      <p:sp>
+        <p:nvSpPr>
+          <p:cNvPr id="16" name="文本框 15">
+            <a:extLst>
+              <a:ext uri="{FF2B5EF4-FFF2-40B4-BE49-F238E27FC236}">
+                <a16:creationId xmlns:a16="http://schemas.microsoft.com/office/drawing/2014/main" id="{9AA6376B-35FA-43FF-3010-518FD99C97F4}"/>
+              </a:ext>
+            </a:extLst>
+          </p:cNvPr>
+          <p:cNvSpPr txBox="1"/>
+          <p:nvPr/>
+        </p:nvSpPr>
+        <p:spPr>
+          <a:xfrm>
+            <a:off x="298569" y="163534"/>
+            <a:ext cx="6097424" cy="584775"/>
+          </a:xfrm>
+          <a:prstGeom prst="rect">
+            <a:avLst/>
+          </a:prstGeom>
+          <a:noFill/>
+        </p:spPr>
+        <p:txBody>
+          <a:bodyPr wrap="square">
+            <a:spAutoFit/>
+          </a:bodyPr>
+          <a:lstStyle/>
+          <a:p>
+            <a:pPr algn="l">
+              <a:buNone/>
+            </a:pPr>
+            <a:r>
+              <a:rPr lang="en-US" altLang="zh-CN" sz="3200" b="1" i="0" dirty="0">
+                <a:solidFill>
+                  <a:srgbClr val="4472C4"/>
+                </a:solidFill>
+                <a:effectLst/>
+                <a:latin typeface="微软雅黑" panose="020B0503020204020204" pitchFamily="34" charset="-122"/>
+                <a:ea typeface="微软雅黑" panose="020B0503020204020204" pitchFamily="34" charset="-122"/>
+              </a:rPr>
+              <a:t>03 </a:t>
+            </a:r>
+            <a:r>
+              <a:rPr lang="zh-CN" altLang="en-US" sz="3200" b="1" i="0" dirty="0">
+                <a:solidFill>
+                  <a:srgbClr val="4472C4"/>
+                </a:solidFill>
+                <a:effectLst/>
+                <a:latin typeface="微软雅黑" panose="020B0503020204020204" pitchFamily="34" charset="-122"/>
+                <a:ea typeface="微软雅黑" panose="020B0503020204020204" pitchFamily="34" charset="-122"/>
+              </a:rPr>
+              <a:t>模板</a:t>
+            </a:r>
+            <a:r>
+              <a:rPr lang="en-US" altLang="zh-CN" sz="3200" b="1" dirty="0">
+                <a:solidFill>
+                  <a:srgbClr val="4472C4"/>
+                </a:solidFill>
+                <a:latin typeface="微软雅黑" panose="020B0503020204020204" pitchFamily="34" charset="-122"/>
+                <a:ea typeface="微软雅黑" panose="020B0503020204020204" pitchFamily="34" charset="-122"/>
+              </a:rPr>
+              <a:t>3</a:t>
+            </a:r>
+            <a:endParaRPr lang="zh-CN" altLang="en-US" sz="3200" b="1" i="0" dirty="0">
+              <a:solidFill>
+                <a:srgbClr val="4472C4"/>
+              </a:solidFill>
+              <a:effectLst/>
+              <a:latin typeface="微软雅黑" panose="020B0503020204020204" pitchFamily="34" charset="-122"/>
+              <a:ea typeface="微软雅黑" panose="020B0503020204020204" pitchFamily="34" charset="-122"/>
+            </a:endParaRPr>
+          </a:p>
+        </p:txBody>
+      </p:sp>
+      <p:sp>
+        <p:nvSpPr>
+          <p:cNvPr id="7" name="文本框 6">
+            <a:extLst>
+              <a:ext uri="{FF2B5EF4-FFF2-40B4-BE49-F238E27FC236}">
+                <a16:creationId xmlns:a16="http://schemas.microsoft.com/office/drawing/2014/main" id="{E5A66A47-8246-6487-AC35-287D89CF59C8}"/>
+              </a:ext>
+            </a:extLst>
+          </p:cNvPr>
+          <p:cNvSpPr txBox="1"/>
+          <p:nvPr/>
+        </p:nvSpPr>
+        <p:spPr>
+          <a:xfrm>
+            <a:off x="536177" y="1546326"/>
+            <a:ext cx="11119640" cy="1585049"/>
+          </a:xfrm>
+          <a:prstGeom prst="rect">
+            <a:avLst/>
+          </a:prstGeom>
+          <a:solidFill>
+            <a:schemeClr val="accent1">
+              <a:lumMod val="20000"/>
+              <a:lumOff val="80000"/>
+            </a:schemeClr>
+          </a:solidFill>
+        </p:spPr>
+        <p:txBody>
+          <a:bodyPr wrap="square">
+            <a:spAutoFit/>
+          </a:bodyPr>
+          <a:lstStyle/>
+          <a:p>
+            <a:pPr>
               <a:spcBef>
-                <a:spcPct val="0"/>
+                <a:spcPts val="375"/>
               </a:spcBef>
-              <a:buNone/>
-              <a:defRPr lang="zh-CN" altLang="en-US" sz="4400" b="1" kern="1200" dirty="0">
-                <a:solidFill>
-                  <a:schemeClr val="tx1">
-                    <a:lumMod val="95000"/>
-                    <a:lumOff val="5000"/>
-                  </a:schemeClr>
-                </a:solidFill>
-                <a:latin typeface="+mj-lt"/>
-                <a:ea typeface="+mj-ea"/>
-                <a:cs typeface="+mj-cs"/>
-              </a:defRPr>
-            </a:lvl1pPr>
-          </a:lstStyle>
-          <a:p>
-            <a:r>
-              <a:rPr lang="zh-CN" altLang="en-US" dirty="0">
-                <a:solidFill>
-                  <a:srgbClr val="000000">
-                    <a:lumMod val="95000"/>
-                    <a:lumOff val="5000"/>
-                  </a:srgbClr>
-                </a:solidFill>
-                <a:latin typeface="Segoe UI"/>
-                <a:ea typeface="微软雅黑"/>
+              <a:spcAft>
+                <a:spcPts val="600"/>
+              </a:spcAft>
+            </a:pPr>
+            <a:r>
+              <a:rPr lang="zh-CN" altLang="en-US" b="1" dirty="0">
+                <a:solidFill>
+                  <a:srgbClr val="000000"/>
+                </a:solidFill>
+                <a:latin typeface="微软雅黑" panose="020B0503020204020204" pitchFamily="34" charset="-122"/>
+                <a:ea typeface="微软雅黑" panose="020B0503020204020204" pitchFamily="34" charset="-122"/>
               </a:rPr>
-              <a:t>请各位老师批评指正</a:t>
-            </a:r>
-            <a:r>
-              <a:rPr lang="en-US" altLang="zh-CN" dirty="0">
-                <a:solidFill>
-                  <a:srgbClr val="000000">
-                    <a:lumMod val="95000"/>
-                    <a:lumOff val="5000"/>
-                  </a:srgbClr>
-                </a:solidFill>
-                <a:latin typeface="Segoe UI"/>
-                <a:ea typeface="微软雅黑"/>
+              <a:t>方法</a:t>
+            </a:r>
+            <a:r>
+              <a:rPr lang="en-US" altLang="zh-CN" b="1" dirty="0">
+                <a:solidFill>
+                  <a:srgbClr val="000000"/>
+                </a:solidFill>
+                <a:latin typeface="微软雅黑" panose="020B0503020204020204" pitchFamily="34" charset="-122"/>
+                <a:ea typeface="微软雅黑" panose="020B0503020204020204" pitchFamily="34" charset="-122"/>
               </a:rPr>
-              <a:t>!</a:t>
-            </a:r>
-            <a:endParaRPr lang="zh-CN" altLang="en-US" dirty="0"/>
+              <a:t>1</a:t>
+            </a:r>
+          </a:p>
+          <a:p>
+            <a:pPr>
+              <a:spcBef>
+                <a:spcPts val="375"/>
+              </a:spcBef>
+              <a:spcAft>
+                <a:spcPts val="600"/>
+              </a:spcAft>
+            </a:pPr>
+            <a:endParaRPr lang="en-US" altLang="zh-CN" b="1" dirty="0">
+              <a:solidFill>
+                <a:srgbClr val="000000"/>
+              </a:solidFill>
+              <a:latin typeface="微软雅黑" panose="020B0503020204020204" pitchFamily="34" charset="-122"/>
+              <a:ea typeface="微软雅黑" panose="020B0503020204020204" pitchFamily="34" charset="-122"/>
+            </a:endParaRPr>
+          </a:p>
+          <a:p>
+            <a:pPr>
+              <a:spcBef>
+                <a:spcPts val="375"/>
+              </a:spcBef>
+              <a:spcAft>
+                <a:spcPts val="600"/>
+              </a:spcAft>
+            </a:pPr>
+            <a:endParaRPr lang="en-US" altLang="zh-CN" b="1" dirty="0">
+              <a:solidFill>
+                <a:srgbClr val="000000"/>
+              </a:solidFill>
+              <a:latin typeface="微软雅黑" panose="020B0503020204020204" pitchFamily="34" charset="-122"/>
+              <a:ea typeface="微软雅黑" panose="020B0503020204020204" pitchFamily="34" charset="-122"/>
+            </a:endParaRPr>
+          </a:p>
+          <a:p>
+            <a:pPr>
+              <a:spcBef>
+                <a:spcPts val="375"/>
+              </a:spcBef>
+              <a:spcAft>
+                <a:spcPts val="600"/>
+              </a:spcAft>
+            </a:pPr>
+            <a:endParaRPr lang="en-US" altLang="zh-CN" b="1" dirty="0">
+              <a:solidFill>
+                <a:srgbClr val="000000"/>
+              </a:solidFill>
+              <a:latin typeface="微软雅黑" panose="020B0503020204020204" pitchFamily="34" charset="-122"/>
+              <a:ea typeface="微软雅黑" panose="020B0503020204020204" pitchFamily="34" charset="-122"/>
+            </a:endParaRPr>
+          </a:p>
+        </p:txBody>
+      </p:sp>
+      <p:sp>
+        <p:nvSpPr>
+          <p:cNvPr id="9" name="文本框 8">
+            <a:extLst>
+              <a:ext uri="{FF2B5EF4-FFF2-40B4-BE49-F238E27FC236}">
+                <a16:creationId xmlns:a16="http://schemas.microsoft.com/office/drawing/2014/main" id="{C046C59E-7891-6EE8-E813-93ECC890B7BB}"/>
+              </a:ext>
+            </a:extLst>
+          </p:cNvPr>
+          <p:cNvSpPr txBox="1"/>
+          <p:nvPr/>
+        </p:nvSpPr>
+        <p:spPr>
+          <a:xfrm>
+            <a:off x="536176" y="3374140"/>
+            <a:ext cx="11119641" cy="1585049"/>
+          </a:xfrm>
+          <a:prstGeom prst="rect">
+            <a:avLst/>
+          </a:prstGeom>
+          <a:solidFill>
+            <a:schemeClr val="accent1">
+              <a:lumMod val="20000"/>
+              <a:lumOff val="80000"/>
+            </a:schemeClr>
+          </a:solidFill>
+        </p:spPr>
+        <p:txBody>
+          <a:bodyPr wrap="square">
+            <a:spAutoFit/>
+          </a:bodyPr>
+          <a:lstStyle/>
+          <a:p>
+            <a:pPr>
+              <a:spcBef>
+                <a:spcPts val="375"/>
+              </a:spcBef>
+              <a:spcAft>
+                <a:spcPts val="600"/>
+              </a:spcAft>
+            </a:pPr>
+            <a:r>
+              <a:rPr lang="zh-CN" altLang="en-US" b="1" dirty="0">
+                <a:solidFill>
+                  <a:srgbClr val="000000"/>
+                </a:solidFill>
+                <a:latin typeface="微软雅黑" panose="020B0503020204020204" pitchFamily="34" charset="-122"/>
+                <a:ea typeface="微软雅黑" panose="020B0503020204020204" pitchFamily="34" charset="-122"/>
+              </a:rPr>
+              <a:t>方法</a:t>
+            </a:r>
+            <a:r>
+              <a:rPr lang="en-US" altLang="zh-CN" b="1" dirty="0">
+                <a:solidFill>
+                  <a:srgbClr val="000000"/>
+                </a:solidFill>
+                <a:latin typeface="微软雅黑" panose="020B0503020204020204" pitchFamily="34" charset="-122"/>
+                <a:ea typeface="微软雅黑" panose="020B0503020204020204" pitchFamily="34" charset="-122"/>
+              </a:rPr>
+              <a:t>2</a:t>
+            </a:r>
+          </a:p>
+          <a:p>
+            <a:pPr>
+              <a:spcBef>
+                <a:spcPts val="375"/>
+              </a:spcBef>
+              <a:spcAft>
+                <a:spcPts val="600"/>
+              </a:spcAft>
+            </a:pPr>
+            <a:endParaRPr lang="en-US" altLang="zh-CN" b="1" dirty="0">
+              <a:solidFill>
+                <a:srgbClr val="000000"/>
+              </a:solidFill>
+              <a:latin typeface="微软雅黑" panose="020B0503020204020204" pitchFamily="34" charset="-122"/>
+              <a:ea typeface="微软雅黑" panose="020B0503020204020204" pitchFamily="34" charset="-122"/>
+            </a:endParaRPr>
+          </a:p>
+          <a:p>
+            <a:pPr>
+              <a:spcBef>
+                <a:spcPts val="375"/>
+              </a:spcBef>
+              <a:spcAft>
+                <a:spcPts val="600"/>
+              </a:spcAft>
+            </a:pPr>
+            <a:endParaRPr lang="en-US" altLang="zh-CN" b="1" dirty="0">
+              <a:solidFill>
+                <a:srgbClr val="000000"/>
+              </a:solidFill>
+              <a:latin typeface="微软雅黑" panose="020B0503020204020204" pitchFamily="34" charset="-122"/>
+              <a:ea typeface="微软雅黑" panose="020B0503020204020204" pitchFamily="34" charset="-122"/>
+            </a:endParaRPr>
+          </a:p>
+          <a:p>
+            <a:pPr>
+              <a:spcBef>
+                <a:spcPts val="375"/>
+              </a:spcBef>
+              <a:spcAft>
+                <a:spcPts val="600"/>
+              </a:spcAft>
+            </a:pPr>
+            <a:endParaRPr lang="en-US" altLang="zh-CN" b="1" dirty="0">
+              <a:solidFill>
+                <a:srgbClr val="000000"/>
+              </a:solidFill>
+              <a:latin typeface="微软雅黑" panose="020B0503020204020204" pitchFamily="34" charset="-122"/>
+              <a:ea typeface="微软雅黑" panose="020B0503020204020204" pitchFamily="34" charset="-122"/>
+            </a:endParaRPr>
+          </a:p>
+        </p:txBody>
+      </p:sp>
+      <p:sp>
+        <p:nvSpPr>
+          <p:cNvPr id="17" name="文本框 16">
+            <a:extLst>
+              <a:ext uri="{FF2B5EF4-FFF2-40B4-BE49-F238E27FC236}">
+                <a16:creationId xmlns:a16="http://schemas.microsoft.com/office/drawing/2014/main" id="{A4306AD6-9823-0A24-E56D-3A74712FB986}"/>
+              </a:ext>
+            </a:extLst>
+          </p:cNvPr>
+          <p:cNvSpPr txBox="1"/>
+          <p:nvPr/>
+        </p:nvSpPr>
+        <p:spPr>
+          <a:xfrm>
+            <a:off x="536178" y="5358571"/>
+            <a:ext cx="11119641" cy="400110"/>
+          </a:xfrm>
+          <a:prstGeom prst="rect">
+            <a:avLst/>
+          </a:prstGeom>
+          <a:noFill/>
+          <a:ln w="28575">
+            <a:solidFill>
+              <a:schemeClr val="tx2">
+                <a:lumMod val="40000"/>
+                <a:lumOff val="60000"/>
+              </a:schemeClr>
+            </a:solidFill>
+            <a:prstDash val="dash"/>
+          </a:ln>
+        </p:spPr>
+        <p:txBody>
+          <a:bodyPr wrap="square">
+            <a:spAutoFit/>
+          </a:bodyPr>
+          <a:lstStyle/>
+          <a:p>
+            <a:pPr>
+              <a:spcBef>
+                <a:spcPts val="375"/>
+              </a:spcBef>
+              <a:spcAft>
+                <a:spcPts val="600"/>
+              </a:spcAft>
+            </a:pPr>
+            <a:r>
+              <a:rPr lang="zh-CN" altLang="en-US" sz="2000" b="0" i="0" dirty="0">
+                <a:effectLst/>
+                <a:latin typeface="微软雅黑" panose="020B0503020204020204" pitchFamily="34" charset="-122"/>
+                <a:ea typeface="微软雅黑" panose="020B0503020204020204" pitchFamily="34" charset="-122"/>
+              </a:rPr>
+              <a:t>总结性语句</a:t>
+            </a:r>
           </a:p>
         </p:txBody>
       </p:sp>
     </p:spTree>
     <p:extLst>
       <p:ext uri="{BB962C8B-B14F-4D97-AF65-F5344CB8AC3E}">
-        <p14:creationId xmlns:p14="http://schemas.microsoft.com/office/powerpoint/2010/main" val="2931844051"/>
+        <p14:creationId xmlns:p14="http://schemas.microsoft.com/office/powerpoint/2010/main" val="2497225936"/>
       </p:ext>
     </p:extLst>
   </p:cSld>
   <p:clrMapOvr>
     <a:masterClrMapping/>
   </p:clrMapOvr>
-  <mc:AlternateContent xmlns:mc="http://schemas.openxmlformats.org/markup-compatibility/2006" xmlns:p14="http://schemas.microsoft.com/office/powerpoint/2010/main">
-    <mc:Choice Requires="p14">
-      <p:transition spd="slow" p14:dur="2000" advTm="7305"/>
-    </mc:Choice>
-    <mc:Fallback xmlns="">
-      <p:transition spd="slow" advTm="7305"/>
-    </mc:Fallback>
-  </mc:AlternateContent>
+</p:sld>
+</file>
+
+<file path=ppt/slides/slide6.xml><?xml version="1.0" encoding="utf-8"?>
+<p:sld xmlns:a="http://schemas.openxmlformats.org/drawingml/2006/main" xmlns:r="http://schemas.openxmlformats.org/officeDocument/2006/relationships" xmlns:p="http://schemas.openxmlformats.org/presentationml/2006/main">
+  <p:cSld>
+    <p:spTree>
+      <p:nvGrpSpPr>
+        <p:cNvPr id="1" name="">
+          <a:extLst>
+            <a:ext uri="{FF2B5EF4-FFF2-40B4-BE49-F238E27FC236}">
+              <a16:creationId xmlns:a16="http://schemas.microsoft.com/office/drawing/2014/main" id="{AEC36F75-5B03-9823-9776-987D8DD859D8}"/>
+            </a:ext>
+          </a:extLst>
+        </p:cNvPr>
+        <p:cNvGrpSpPr/>
+        <p:nvPr/>
+      </p:nvGrpSpPr>
+      <p:grpSpPr>
+        <a:xfrm>
+          <a:off x="0" y="0"/>
+          <a:ext cx="0" cy="0"/>
+          <a:chOff x="0" y="0"/>
+          <a:chExt cx="0" cy="0"/>
+        </a:xfrm>
+      </p:grpSpPr>
+      <p:sp>
+        <p:nvSpPr>
+          <p:cNvPr id="2" name="Rectangle 1">
+            <a:extLst>
+              <a:ext uri="{FF2B5EF4-FFF2-40B4-BE49-F238E27FC236}">
+                <a16:creationId xmlns:a16="http://schemas.microsoft.com/office/drawing/2014/main" id="{2B535BD8-E5AD-D8C3-0079-7D6824C9B23D}"/>
+              </a:ext>
+            </a:extLst>
+          </p:cNvPr>
+          <p:cNvSpPr/>
+          <p:nvPr/>
+        </p:nvSpPr>
+        <p:spPr>
+          <a:xfrm>
+            <a:off x="0" y="857250"/>
+            <a:ext cx="7905750" cy="76200"/>
+          </a:xfrm>
+          <a:prstGeom prst="rect">
+            <a:avLst/>
+          </a:prstGeom>
+          <a:solidFill>
+            <a:srgbClr val="5B8BC6"/>
+          </a:solidFill>
+          <a:ln>
+            <a:noFill/>
+          </a:ln>
+          <a:effectLst/>
+        </p:spPr>
+        <p:style>
+          <a:lnRef idx="1">
+            <a:schemeClr val="accent1"/>
+          </a:lnRef>
+          <a:fillRef idx="3">
+            <a:schemeClr val="accent1"/>
+          </a:fillRef>
+          <a:effectRef idx="2">
+            <a:schemeClr val="accent1"/>
+          </a:effectRef>
+          <a:fontRef idx="minor">
+            <a:schemeClr val="lt1"/>
+          </a:fontRef>
+        </p:style>
+        <p:txBody>
+          <a:bodyPr rtlCol="0" anchor="ctr"/>
+          <a:lstStyle/>
+          <a:p>
+            <a:pPr algn="ctr"/>
+            <a:endParaRPr dirty="0">
+              <a:latin typeface="微软雅黑" panose="020B0503020204020204" pitchFamily="34" charset="-122"/>
+              <a:ea typeface="微软雅黑" panose="020B0503020204020204" pitchFamily="34" charset="-122"/>
+            </a:endParaRPr>
+          </a:p>
+        </p:txBody>
+      </p:sp>
+      <p:sp>
+        <p:nvSpPr>
+          <p:cNvPr id="3" name="Rectangle 2">
+            <a:extLst>
+              <a:ext uri="{FF2B5EF4-FFF2-40B4-BE49-F238E27FC236}">
+                <a16:creationId xmlns:a16="http://schemas.microsoft.com/office/drawing/2014/main" id="{27FA981B-1A7E-806E-DECA-79B1BD85D972}"/>
+              </a:ext>
+            </a:extLst>
+          </p:cNvPr>
+          <p:cNvSpPr/>
+          <p:nvPr/>
+        </p:nvSpPr>
+        <p:spPr>
+          <a:xfrm>
+            <a:off x="8096250" y="885825"/>
+            <a:ext cx="4095750" cy="28575"/>
+          </a:xfrm>
+          <a:prstGeom prst="rect">
+            <a:avLst/>
+          </a:prstGeom>
+          <a:solidFill>
+            <a:srgbClr val="9CC2E5"/>
+          </a:solidFill>
+          <a:ln>
+            <a:noFill/>
+          </a:ln>
+          <a:effectLst/>
+        </p:spPr>
+        <p:style>
+          <a:lnRef idx="1">
+            <a:schemeClr val="accent1"/>
+          </a:lnRef>
+          <a:fillRef idx="3">
+            <a:schemeClr val="accent1"/>
+          </a:fillRef>
+          <a:effectRef idx="2">
+            <a:schemeClr val="accent1"/>
+          </a:effectRef>
+          <a:fontRef idx="minor">
+            <a:schemeClr val="lt1"/>
+          </a:fontRef>
+        </p:style>
+        <p:txBody>
+          <a:bodyPr rtlCol="0" anchor="ctr"/>
+          <a:lstStyle/>
+          <a:p>
+            <a:pPr algn="ctr"/>
+            <a:endParaRPr dirty="0">
+              <a:latin typeface="微软雅黑" panose="020B0503020204020204" pitchFamily="34" charset="-122"/>
+              <a:ea typeface="微软雅黑" panose="020B0503020204020204" pitchFamily="34" charset="-122"/>
+            </a:endParaRPr>
+          </a:p>
+        </p:txBody>
+      </p:sp>
+      <p:pic>
+        <p:nvPicPr>
+          <p:cNvPr id="4" name="Picture 3" descr="heu_logo_color.png">
+            <a:extLst>
+              <a:ext uri="{FF2B5EF4-FFF2-40B4-BE49-F238E27FC236}">
+                <a16:creationId xmlns:a16="http://schemas.microsoft.com/office/drawing/2014/main" id="{665F9D0D-697C-65BB-CA2B-093DA87A19EF}"/>
+              </a:ext>
+            </a:extLst>
+          </p:cNvPr>
+          <p:cNvPicPr>
+            <a:picLocks noChangeAspect="1"/>
+          </p:cNvPicPr>
+          <p:nvPr/>
+        </p:nvPicPr>
+        <p:blipFill>
+          <a:blip r:embed="rId2"/>
+          <a:stretch>
+            <a:fillRect/>
+          </a:stretch>
+        </p:blipFill>
+        <p:spPr>
+          <a:xfrm>
+            <a:off x="9577062" y="158750"/>
+            <a:ext cx="2329188" cy="619125"/>
+          </a:xfrm>
+          <a:prstGeom prst="rect">
+            <a:avLst/>
+          </a:prstGeom>
+        </p:spPr>
+      </p:pic>
+      <p:sp>
+        <p:nvSpPr>
+          <p:cNvPr id="5" name="Rectangle 4">
+            <a:extLst>
+              <a:ext uri="{FF2B5EF4-FFF2-40B4-BE49-F238E27FC236}">
+                <a16:creationId xmlns:a16="http://schemas.microsoft.com/office/drawing/2014/main" id="{CCFA6BDD-A7E8-7BF9-A68D-74E3F56ED545}"/>
+              </a:ext>
+            </a:extLst>
+          </p:cNvPr>
+          <p:cNvSpPr/>
+          <p:nvPr/>
+        </p:nvSpPr>
+        <p:spPr>
+          <a:xfrm>
+            <a:off x="0" y="6473502"/>
+            <a:ext cx="12192000" cy="19050"/>
+          </a:xfrm>
+          <a:prstGeom prst="rect">
+            <a:avLst/>
+          </a:prstGeom>
+          <a:solidFill>
+            <a:srgbClr val="3E649A"/>
+          </a:solidFill>
+          <a:ln>
+            <a:noFill/>
+          </a:ln>
+          <a:effectLst/>
+        </p:spPr>
+        <p:style>
+          <a:lnRef idx="1">
+            <a:schemeClr val="accent1"/>
+          </a:lnRef>
+          <a:fillRef idx="3">
+            <a:schemeClr val="accent1"/>
+          </a:fillRef>
+          <a:effectRef idx="2">
+            <a:schemeClr val="accent1"/>
+          </a:effectRef>
+          <a:fontRef idx="minor">
+            <a:schemeClr val="lt1"/>
+          </a:fontRef>
+        </p:style>
+        <p:txBody>
+          <a:bodyPr rtlCol="0" anchor="ctr"/>
+          <a:lstStyle/>
+          <a:p>
+            <a:pPr algn="ctr"/>
+            <a:endParaRPr dirty="0">
+              <a:latin typeface="微软雅黑" panose="020B0503020204020204" pitchFamily="34" charset="-122"/>
+              <a:ea typeface="微软雅黑" panose="020B0503020204020204" pitchFamily="34" charset="-122"/>
+            </a:endParaRPr>
+          </a:p>
+        </p:txBody>
+      </p:sp>
+      <p:sp>
+        <p:nvSpPr>
+          <p:cNvPr id="6" name="TextBox 5">
+            <a:extLst>
+              <a:ext uri="{FF2B5EF4-FFF2-40B4-BE49-F238E27FC236}">
+                <a16:creationId xmlns:a16="http://schemas.microsoft.com/office/drawing/2014/main" id="{58F39006-3904-BC0D-3013-4A6ABE376AAB}"/>
+              </a:ext>
+            </a:extLst>
+          </p:cNvPr>
+          <p:cNvSpPr txBox="1"/>
+          <p:nvPr/>
+        </p:nvSpPr>
+        <p:spPr>
+          <a:xfrm>
+            <a:off x="101481" y="6511806"/>
+            <a:ext cx="2087431" cy="369332"/>
+          </a:xfrm>
+          <a:prstGeom prst="rect">
+            <a:avLst/>
+          </a:prstGeom>
+          <a:noFill/>
+        </p:spPr>
+        <p:txBody>
+          <a:bodyPr wrap="none">
+            <a:spAutoFit/>
+          </a:bodyPr>
+          <a:lstStyle/>
+          <a:p>
+            <a:pPr>
+              <a:defRPr sz="1800">
+                <a:solidFill>
+                  <a:srgbClr val="1E1E1E"/>
+                </a:solidFill>
+                <a:latin typeface="KaiTi"/>
+              </a:defRPr>
+            </a:pPr>
+            <a:r>
+              <a:rPr dirty="0" err="1">
+                <a:solidFill>
+                  <a:schemeClr val="tx1">
+                    <a:lumMod val="50000"/>
+                    <a:lumOff val="50000"/>
+                  </a:schemeClr>
+                </a:solidFill>
+                <a:latin typeface="华文行楷" panose="02010800040101010101" pitchFamily="2" charset="-122"/>
+                <a:ea typeface="华文行楷" panose="02010800040101010101" pitchFamily="2" charset="-122"/>
+              </a:rPr>
+              <a:t>大工至善</a:t>
+            </a:r>
+            <a:r>
+              <a:rPr dirty="0">
+                <a:solidFill>
+                  <a:schemeClr val="tx1">
+                    <a:lumMod val="50000"/>
+                    <a:lumOff val="50000"/>
+                  </a:schemeClr>
+                </a:solidFill>
+                <a:latin typeface="华文行楷" panose="02010800040101010101" pitchFamily="2" charset="-122"/>
+                <a:ea typeface="华文行楷" panose="02010800040101010101" pitchFamily="2" charset="-122"/>
+              </a:rPr>
+              <a:t> </a:t>
+            </a:r>
+            <a:r>
+              <a:rPr dirty="0" err="1">
+                <a:solidFill>
+                  <a:schemeClr val="tx1">
+                    <a:lumMod val="50000"/>
+                    <a:lumOff val="50000"/>
+                  </a:schemeClr>
+                </a:solidFill>
+                <a:latin typeface="华文行楷" panose="02010800040101010101" pitchFamily="2" charset="-122"/>
+                <a:ea typeface="华文行楷" panose="02010800040101010101" pitchFamily="2" charset="-122"/>
+              </a:rPr>
+              <a:t>大学至真</a:t>
+            </a:r>
+            <a:endParaRPr dirty="0">
+              <a:solidFill>
+                <a:schemeClr val="tx1">
+                  <a:lumMod val="50000"/>
+                  <a:lumOff val="50000"/>
+                </a:schemeClr>
+              </a:solidFill>
+              <a:latin typeface="华文行楷" panose="02010800040101010101" pitchFamily="2" charset="-122"/>
+              <a:ea typeface="华文行楷" panose="02010800040101010101" pitchFamily="2" charset="-122"/>
+            </a:endParaRPr>
+          </a:p>
+        </p:txBody>
+      </p:sp>
+      <p:sp>
+        <p:nvSpPr>
+          <p:cNvPr id="8" name="灯片编号占位符 7">
+            <a:extLst>
+              <a:ext uri="{FF2B5EF4-FFF2-40B4-BE49-F238E27FC236}">
+                <a16:creationId xmlns:a16="http://schemas.microsoft.com/office/drawing/2014/main" id="{EE86C22D-4038-B8B3-2616-4913B8FF4F89}"/>
+              </a:ext>
+            </a:extLst>
+          </p:cNvPr>
+          <p:cNvSpPr>
+            <a:spLocks noGrp="1"/>
+          </p:cNvSpPr>
+          <p:nvPr>
+            <p:ph type="sldNum" sz="quarter" idx="12"/>
+          </p:nvPr>
+        </p:nvSpPr>
+        <p:spPr>
+          <a:xfrm>
+            <a:off x="11423769" y="6492875"/>
+            <a:ext cx="482481" cy="365125"/>
+          </a:xfrm>
+        </p:spPr>
+        <p:txBody>
+          <a:bodyPr/>
+          <a:lstStyle/>
+          <a:p>
+            <a:fld id="{C1FF6DA9-008F-8B48-92A6-B652298478BF}" type="slidenum">
+              <a:rPr lang="en-US" sz="1400" smtClean="0">
+                <a:latin typeface="Times New Roman" panose="02020603050405020304" pitchFamily="18" charset="0"/>
+                <a:cs typeface="Times New Roman" panose="02020603050405020304" pitchFamily="18" charset="0"/>
+              </a:rPr>
+              <a:t>6</a:t>
+            </a:fld>
+            <a:endParaRPr lang="en-US" sz="1400" dirty="0">
+              <a:latin typeface="Times New Roman" panose="02020603050405020304" pitchFamily="18" charset="0"/>
+              <a:cs typeface="Times New Roman" panose="02020603050405020304" pitchFamily="18" charset="0"/>
+            </a:endParaRPr>
+          </a:p>
+        </p:txBody>
+      </p:sp>
+      <p:sp>
+        <p:nvSpPr>
+          <p:cNvPr id="12" name="文本框 11">
+            <a:extLst>
+              <a:ext uri="{FF2B5EF4-FFF2-40B4-BE49-F238E27FC236}">
+                <a16:creationId xmlns:a16="http://schemas.microsoft.com/office/drawing/2014/main" id="{91A16891-E540-2656-9CD0-619C344407BF}"/>
+              </a:ext>
+            </a:extLst>
+          </p:cNvPr>
+          <p:cNvSpPr txBox="1"/>
+          <p:nvPr/>
+        </p:nvSpPr>
+        <p:spPr>
+          <a:xfrm>
+            <a:off x="298569" y="1063020"/>
+            <a:ext cx="6097424" cy="400110"/>
+          </a:xfrm>
+          <a:prstGeom prst="rect">
+            <a:avLst/>
+          </a:prstGeom>
+          <a:noFill/>
+        </p:spPr>
+        <p:txBody>
+          <a:bodyPr wrap="square">
+            <a:spAutoFit/>
+          </a:bodyPr>
+          <a:lstStyle/>
+          <a:p>
+            <a:r>
+              <a:rPr lang="zh-CN" altLang="en-US" sz="2000" b="1" i="0" dirty="0">
+                <a:solidFill>
+                  <a:srgbClr val="000000"/>
+                </a:solidFill>
+                <a:effectLst/>
+                <a:latin typeface="微软雅黑" panose="020B0503020204020204" pitchFamily="34" charset="-122"/>
+                <a:ea typeface="微软雅黑" panose="020B0503020204020204" pitchFamily="34" charset="-122"/>
+              </a:rPr>
+              <a:t>➢ 小标题</a:t>
+            </a:r>
+            <a:r>
+              <a:rPr lang="en-US" altLang="zh-CN" sz="2000" b="1" i="0" dirty="0">
+                <a:solidFill>
+                  <a:srgbClr val="000000"/>
+                </a:solidFill>
+                <a:effectLst/>
+                <a:latin typeface="微软雅黑" panose="020B0503020204020204" pitchFamily="34" charset="-122"/>
+                <a:ea typeface="微软雅黑" panose="020B0503020204020204" pitchFamily="34" charset="-122"/>
+              </a:rPr>
+              <a:t>1</a:t>
+            </a:r>
+            <a:endParaRPr lang="zh-CN" altLang="en-US" sz="2000" dirty="0">
+              <a:latin typeface="微软雅黑" panose="020B0503020204020204" pitchFamily="34" charset="-122"/>
+              <a:ea typeface="微软雅黑" panose="020B0503020204020204" pitchFamily="34" charset="-122"/>
+            </a:endParaRPr>
+          </a:p>
+        </p:txBody>
+      </p:sp>
+      <p:sp>
+        <p:nvSpPr>
+          <p:cNvPr id="16" name="文本框 15">
+            <a:extLst>
+              <a:ext uri="{FF2B5EF4-FFF2-40B4-BE49-F238E27FC236}">
+                <a16:creationId xmlns:a16="http://schemas.microsoft.com/office/drawing/2014/main" id="{D28AF0B8-0F26-3478-0438-1C2CAB51011D}"/>
+              </a:ext>
+            </a:extLst>
+          </p:cNvPr>
+          <p:cNvSpPr txBox="1"/>
+          <p:nvPr/>
+        </p:nvSpPr>
+        <p:spPr>
+          <a:xfrm>
+            <a:off x="298569" y="163534"/>
+            <a:ext cx="6097424" cy="584775"/>
+          </a:xfrm>
+          <a:prstGeom prst="rect">
+            <a:avLst/>
+          </a:prstGeom>
+          <a:noFill/>
+        </p:spPr>
+        <p:txBody>
+          <a:bodyPr wrap="square">
+            <a:spAutoFit/>
+          </a:bodyPr>
+          <a:lstStyle/>
+          <a:p>
+            <a:pPr algn="l">
+              <a:buNone/>
+            </a:pPr>
+            <a:r>
+              <a:rPr lang="en-US" altLang="zh-CN" sz="3200" b="1" i="0" dirty="0">
+                <a:solidFill>
+                  <a:srgbClr val="4472C4"/>
+                </a:solidFill>
+                <a:effectLst/>
+                <a:latin typeface="微软雅黑" panose="020B0503020204020204" pitchFamily="34" charset="-122"/>
+                <a:ea typeface="微软雅黑" panose="020B0503020204020204" pitchFamily="34" charset="-122"/>
+              </a:rPr>
+              <a:t>03 </a:t>
+            </a:r>
+            <a:r>
+              <a:rPr lang="zh-CN" altLang="en-US" sz="3200" b="1" i="0" dirty="0">
+                <a:solidFill>
+                  <a:srgbClr val="4472C4"/>
+                </a:solidFill>
+                <a:effectLst/>
+                <a:latin typeface="微软雅黑" panose="020B0503020204020204" pitchFamily="34" charset="-122"/>
+                <a:ea typeface="微软雅黑" panose="020B0503020204020204" pitchFamily="34" charset="-122"/>
+              </a:rPr>
+              <a:t>模板</a:t>
+            </a:r>
+            <a:r>
+              <a:rPr lang="en-US" altLang="zh-CN" sz="3200" b="1" dirty="0">
+                <a:solidFill>
+                  <a:srgbClr val="4472C4"/>
+                </a:solidFill>
+                <a:latin typeface="微软雅黑" panose="020B0503020204020204" pitchFamily="34" charset="-122"/>
+                <a:ea typeface="微软雅黑" panose="020B0503020204020204" pitchFamily="34" charset="-122"/>
+              </a:rPr>
+              <a:t>4</a:t>
+            </a:r>
+            <a:endParaRPr lang="zh-CN" altLang="en-US" sz="3200" b="1" i="0" dirty="0">
+              <a:solidFill>
+                <a:srgbClr val="4472C4"/>
+              </a:solidFill>
+              <a:effectLst/>
+              <a:latin typeface="微软雅黑" panose="020B0503020204020204" pitchFamily="34" charset="-122"/>
+              <a:ea typeface="微软雅黑" panose="020B0503020204020204" pitchFamily="34" charset="-122"/>
+            </a:endParaRPr>
+          </a:p>
+        </p:txBody>
+      </p:sp>
+      <p:sp>
+        <p:nvSpPr>
+          <p:cNvPr id="10" name="文本框 9">
+            <a:extLst>
+              <a:ext uri="{FF2B5EF4-FFF2-40B4-BE49-F238E27FC236}">
+                <a16:creationId xmlns:a16="http://schemas.microsoft.com/office/drawing/2014/main" id="{C23F2583-40F9-4454-EA22-5E36A310122D}"/>
+              </a:ext>
+            </a:extLst>
+          </p:cNvPr>
+          <p:cNvSpPr txBox="1"/>
+          <p:nvPr/>
+        </p:nvSpPr>
+        <p:spPr>
+          <a:xfrm>
+            <a:off x="298569" y="2811673"/>
+            <a:ext cx="6097424" cy="400110"/>
+          </a:xfrm>
+          <a:prstGeom prst="rect">
+            <a:avLst/>
+          </a:prstGeom>
+          <a:noFill/>
+        </p:spPr>
+        <p:txBody>
+          <a:bodyPr wrap="square">
+            <a:spAutoFit/>
+          </a:bodyPr>
+          <a:lstStyle/>
+          <a:p>
+            <a:r>
+              <a:rPr lang="zh-CN" altLang="en-US" sz="2000" b="1" i="0" dirty="0">
+                <a:solidFill>
+                  <a:srgbClr val="000000"/>
+                </a:solidFill>
+                <a:effectLst/>
+                <a:latin typeface="微软雅黑" panose="020B0503020204020204" pitchFamily="34" charset="-122"/>
+                <a:ea typeface="微软雅黑" panose="020B0503020204020204" pitchFamily="34" charset="-122"/>
+              </a:rPr>
+              <a:t>➢ 小标题</a:t>
+            </a:r>
+            <a:r>
+              <a:rPr lang="en-US" altLang="zh-CN" sz="2000" b="1" i="0" dirty="0">
+                <a:solidFill>
+                  <a:srgbClr val="000000"/>
+                </a:solidFill>
+                <a:effectLst/>
+                <a:latin typeface="微软雅黑" panose="020B0503020204020204" pitchFamily="34" charset="-122"/>
+                <a:ea typeface="微软雅黑" panose="020B0503020204020204" pitchFamily="34" charset="-122"/>
+              </a:rPr>
+              <a:t>2</a:t>
+            </a:r>
+            <a:endParaRPr lang="zh-CN" altLang="en-US" sz="2000" dirty="0">
+              <a:latin typeface="微软雅黑" panose="020B0503020204020204" pitchFamily="34" charset="-122"/>
+              <a:ea typeface="微软雅黑" panose="020B0503020204020204" pitchFamily="34" charset="-122"/>
+            </a:endParaRPr>
+          </a:p>
+        </p:txBody>
+      </p:sp>
+      <p:sp>
+        <p:nvSpPr>
+          <p:cNvPr id="11" name="文本框 10">
+            <a:extLst>
+              <a:ext uri="{FF2B5EF4-FFF2-40B4-BE49-F238E27FC236}">
+                <a16:creationId xmlns:a16="http://schemas.microsoft.com/office/drawing/2014/main" id="{F4DE0739-222A-1580-A0A8-454F9C271801}"/>
+              </a:ext>
+            </a:extLst>
+          </p:cNvPr>
+          <p:cNvSpPr txBox="1"/>
+          <p:nvPr/>
+        </p:nvSpPr>
+        <p:spPr>
+          <a:xfrm>
+            <a:off x="298569" y="4478900"/>
+            <a:ext cx="6097424" cy="400110"/>
+          </a:xfrm>
+          <a:prstGeom prst="rect">
+            <a:avLst/>
+          </a:prstGeom>
+          <a:noFill/>
+        </p:spPr>
+        <p:txBody>
+          <a:bodyPr wrap="square">
+            <a:spAutoFit/>
+          </a:bodyPr>
+          <a:lstStyle/>
+          <a:p>
+            <a:r>
+              <a:rPr lang="zh-CN" altLang="en-US" sz="2000" b="1" i="0" dirty="0">
+                <a:solidFill>
+                  <a:srgbClr val="000000"/>
+                </a:solidFill>
+                <a:effectLst/>
+                <a:latin typeface="微软雅黑" panose="020B0503020204020204" pitchFamily="34" charset="-122"/>
+                <a:ea typeface="微软雅黑" panose="020B0503020204020204" pitchFamily="34" charset="-122"/>
+              </a:rPr>
+              <a:t>➢ 小标题</a:t>
+            </a:r>
+            <a:r>
+              <a:rPr lang="en-US" altLang="zh-CN" sz="2000" b="1" i="0" dirty="0">
+                <a:solidFill>
+                  <a:srgbClr val="000000"/>
+                </a:solidFill>
+                <a:effectLst/>
+                <a:latin typeface="微软雅黑" panose="020B0503020204020204" pitchFamily="34" charset="-122"/>
+                <a:ea typeface="微软雅黑" panose="020B0503020204020204" pitchFamily="34" charset="-122"/>
+              </a:rPr>
+              <a:t>3</a:t>
+            </a:r>
+            <a:endParaRPr lang="zh-CN" altLang="en-US" sz="2000" dirty="0">
+              <a:latin typeface="微软雅黑" panose="020B0503020204020204" pitchFamily="34" charset="-122"/>
+              <a:ea typeface="微软雅黑" panose="020B0503020204020204" pitchFamily="34" charset="-122"/>
+            </a:endParaRPr>
+          </a:p>
+        </p:txBody>
+      </p:sp>
+      <p:sp>
+        <p:nvSpPr>
+          <p:cNvPr id="13" name="文本框 12">
+            <a:extLst>
+              <a:ext uri="{FF2B5EF4-FFF2-40B4-BE49-F238E27FC236}">
+                <a16:creationId xmlns:a16="http://schemas.microsoft.com/office/drawing/2014/main" id="{F5532F4A-3134-C497-63D5-2869C19C6525}"/>
+              </a:ext>
+            </a:extLst>
+          </p:cNvPr>
+          <p:cNvSpPr txBox="1"/>
+          <p:nvPr/>
+        </p:nvSpPr>
+        <p:spPr>
+          <a:xfrm>
+            <a:off x="488007" y="1531199"/>
+            <a:ext cx="5651435" cy="1179810"/>
+          </a:xfrm>
+          <a:prstGeom prst="rect">
+            <a:avLst/>
+          </a:prstGeom>
+          <a:solidFill>
+            <a:schemeClr val="accent1">
+              <a:lumMod val="20000"/>
+              <a:lumOff val="80000"/>
+            </a:schemeClr>
+          </a:solidFill>
+        </p:spPr>
+        <p:txBody>
+          <a:bodyPr wrap="square">
+            <a:spAutoFit/>
+          </a:bodyPr>
+          <a:lstStyle/>
+          <a:p>
+            <a:pPr>
+              <a:spcBef>
+                <a:spcPts val="375"/>
+              </a:spcBef>
+              <a:spcAft>
+                <a:spcPts val="600"/>
+              </a:spcAft>
+            </a:pPr>
+            <a:r>
+              <a:rPr lang="zh-CN" altLang="en-US" dirty="0">
+                <a:solidFill>
+                  <a:srgbClr val="000000"/>
+                </a:solidFill>
+                <a:latin typeface="微软雅黑" panose="020B0503020204020204" pitchFamily="34" charset="-122"/>
+                <a:ea typeface="微软雅黑" panose="020B0503020204020204" pitchFamily="34" charset="-122"/>
+              </a:rPr>
+              <a:t>介绍</a:t>
+            </a:r>
+            <a:r>
+              <a:rPr lang="en-US" altLang="zh-CN" dirty="0">
+                <a:solidFill>
+                  <a:srgbClr val="000000"/>
+                </a:solidFill>
+                <a:latin typeface="微软雅黑" panose="020B0503020204020204" pitchFamily="34" charset="-122"/>
+                <a:ea typeface="微软雅黑" panose="020B0503020204020204" pitchFamily="34" charset="-122"/>
+              </a:rPr>
+              <a:t>1</a:t>
+            </a:r>
+          </a:p>
+          <a:p>
+            <a:pPr>
+              <a:spcBef>
+                <a:spcPts val="375"/>
+              </a:spcBef>
+              <a:spcAft>
+                <a:spcPts val="600"/>
+              </a:spcAft>
+            </a:pPr>
+            <a:endParaRPr lang="en-US" altLang="zh-CN" dirty="0">
+              <a:solidFill>
+                <a:srgbClr val="000000"/>
+              </a:solidFill>
+              <a:latin typeface="微软雅黑" panose="020B0503020204020204" pitchFamily="34" charset="-122"/>
+              <a:ea typeface="微软雅黑" panose="020B0503020204020204" pitchFamily="34" charset="-122"/>
+            </a:endParaRPr>
+          </a:p>
+          <a:p>
+            <a:pPr>
+              <a:spcBef>
+                <a:spcPts val="375"/>
+              </a:spcBef>
+              <a:spcAft>
+                <a:spcPts val="600"/>
+              </a:spcAft>
+            </a:pPr>
+            <a:endParaRPr lang="en-US" altLang="zh-CN" dirty="0">
+              <a:solidFill>
+                <a:srgbClr val="000000"/>
+              </a:solidFill>
+              <a:latin typeface="微软雅黑" panose="020B0503020204020204" pitchFamily="34" charset="-122"/>
+              <a:ea typeface="微软雅黑" panose="020B0503020204020204" pitchFamily="34" charset="-122"/>
+            </a:endParaRPr>
+          </a:p>
+        </p:txBody>
+      </p:sp>
+      <p:sp>
+        <p:nvSpPr>
+          <p:cNvPr id="14" name="文本框 13">
+            <a:extLst>
+              <a:ext uri="{FF2B5EF4-FFF2-40B4-BE49-F238E27FC236}">
+                <a16:creationId xmlns:a16="http://schemas.microsoft.com/office/drawing/2014/main" id="{07EBB585-B260-840B-6598-9A072F0E33AB}"/>
+              </a:ext>
+            </a:extLst>
+          </p:cNvPr>
+          <p:cNvSpPr txBox="1"/>
+          <p:nvPr/>
+        </p:nvSpPr>
+        <p:spPr>
+          <a:xfrm>
+            <a:off x="488007" y="3205520"/>
+            <a:ext cx="5651435" cy="1179810"/>
+          </a:xfrm>
+          <a:prstGeom prst="rect">
+            <a:avLst/>
+          </a:prstGeom>
+          <a:solidFill>
+            <a:schemeClr val="accent1">
+              <a:lumMod val="20000"/>
+              <a:lumOff val="80000"/>
+            </a:schemeClr>
+          </a:solidFill>
+        </p:spPr>
+        <p:txBody>
+          <a:bodyPr wrap="square">
+            <a:spAutoFit/>
+          </a:bodyPr>
+          <a:lstStyle/>
+          <a:p>
+            <a:pPr>
+              <a:spcBef>
+                <a:spcPts val="375"/>
+              </a:spcBef>
+              <a:spcAft>
+                <a:spcPts val="600"/>
+              </a:spcAft>
+            </a:pPr>
+            <a:r>
+              <a:rPr lang="zh-CN" altLang="en-US" dirty="0">
+                <a:solidFill>
+                  <a:srgbClr val="000000"/>
+                </a:solidFill>
+                <a:latin typeface="微软雅黑" panose="020B0503020204020204" pitchFamily="34" charset="-122"/>
+                <a:ea typeface="微软雅黑" panose="020B0503020204020204" pitchFamily="34" charset="-122"/>
+              </a:rPr>
+              <a:t>介绍</a:t>
+            </a:r>
+            <a:r>
+              <a:rPr lang="en-US" altLang="zh-CN" dirty="0">
+                <a:solidFill>
+                  <a:srgbClr val="000000"/>
+                </a:solidFill>
+                <a:latin typeface="微软雅黑" panose="020B0503020204020204" pitchFamily="34" charset="-122"/>
+                <a:ea typeface="微软雅黑" panose="020B0503020204020204" pitchFamily="34" charset="-122"/>
+              </a:rPr>
+              <a:t>1</a:t>
+            </a:r>
+          </a:p>
+          <a:p>
+            <a:pPr>
+              <a:spcBef>
+                <a:spcPts val="375"/>
+              </a:spcBef>
+              <a:spcAft>
+                <a:spcPts val="600"/>
+              </a:spcAft>
+            </a:pPr>
+            <a:endParaRPr lang="en-US" altLang="zh-CN" dirty="0">
+              <a:solidFill>
+                <a:srgbClr val="000000"/>
+              </a:solidFill>
+              <a:latin typeface="微软雅黑" panose="020B0503020204020204" pitchFamily="34" charset="-122"/>
+              <a:ea typeface="微软雅黑" panose="020B0503020204020204" pitchFamily="34" charset="-122"/>
+            </a:endParaRPr>
+          </a:p>
+          <a:p>
+            <a:pPr>
+              <a:spcBef>
+                <a:spcPts val="375"/>
+              </a:spcBef>
+              <a:spcAft>
+                <a:spcPts val="600"/>
+              </a:spcAft>
+            </a:pPr>
+            <a:endParaRPr lang="en-US" altLang="zh-CN" dirty="0">
+              <a:solidFill>
+                <a:srgbClr val="000000"/>
+              </a:solidFill>
+              <a:latin typeface="微软雅黑" panose="020B0503020204020204" pitchFamily="34" charset="-122"/>
+              <a:ea typeface="微软雅黑" panose="020B0503020204020204" pitchFamily="34" charset="-122"/>
+            </a:endParaRPr>
+          </a:p>
+        </p:txBody>
+      </p:sp>
+      <p:sp>
+        <p:nvSpPr>
+          <p:cNvPr id="15" name="文本框 14">
+            <a:extLst>
+              <a:ext uri="{FF2B5EF4-FFF2-40B4-BE49-F238E27FC236}">
+                <a16:creationId xmlns:a16="http://schemas.microsoft.com/office/drawing/2014/main" id="{A8EB2E43-A1D4-BAE2-8F55-C2B20194523E}"/>
+              </a:ext>
+            </a:extLst>
+          </p:cNvPr>
+          <p:cNvSpPr txBox="1"/>
+          <p:nvPr/>
+        </p:nvSpPr>
+        <p:spPr>
+          <a:xfrm>
+            <a:off x="488006" y="4898264"/>
+            <a:ext cx="5651435" cy="1179810"/>
+          </a:xfrm>
+          <a:prstGeom prst="rect">
+            <a:avLst/>
+          </a:prstGeom>
+          <a:solidFill>
+            <a:schemeClr val="accent1">
+              <a:lumMod val="20000"/>
+              <a:lumOff val="80000"/>
+            </a:schemeClr>
+          </a:solidFill>
+        </p:spPr>
+        <p:txBody>
+          <a:bodyPr wrap="square">
+            <a:spAutoFit/>
+          </a:bodyPr>
+          <a:lstStyle/>
+          <a:p>
+            <a:pPr>
+              <a:spcBef>
+                <a:spcPts val="375"/>
+              </a:spcBef>
+              <a:spcAft>
+                <a:spcPts val="600"/>
+              </a:spcAft>
+            </a:pPr>
+            <a:r>
+              <a:rPr lang="zh-CN" altLang="en-US" dirty="0">
+                <a:solidFill>
+                  <a:srgbClr val="000000"/>
+                </a:solidFill>
+                <a:latin typeface="微软雅黑" panose="020B0503020204020204" pitchFamily="34" charset="-122"/>
+                <a:ea typeface="微软雅黑" panose="020B0503020204020204" pitchFamily="34" charset="-122"/>
+              </a:rPr>
+              <a:t>介绍</a:t>
+            </a:r>
+            <a:r>
+              <a:rPr lang="en-US" altLang="zh-CN" dirty="0">
+                <a:solidFill>
+                  <a:srgbClr val="000000"/>
+                </a:solidFill>
+                <a:latin typeface="微软雅黑" panose="020B0503020204020204" pitchFamily="34" charset="-122"/>
+                <a:ea typeface="微软雅黑" panose="020B0503020204020204" pitchFamily="34" charset="-122"/>
+              </a:rPr>
+              <a:t>1</a:t>
+            </a:r>
+          </a:p>
+          <a:p>
+            <a:pPr>
+              <a:spcBef>
+                <a:spcPts val="375"/>
+              </a:spcBef>
+              <a:spcAft>
+                <a:spcPts val="600"/>
+              </a:spcAft>
+            </a:pPr>
+            <a:endParaRPr lang="en-US" altLang="zh-CN" dirty="0">
+              <a:solidFill>
+                <a:srgbClr val="000000"/>
+              </a:solidFill>
+              <a:latin typeface="微软雅黑" panose="020B0503020204020204" pitchFamily="34" charset="-122"/>
+              <a:ea typeface="微软雅黑" panose="020B0503020204020204" pitchFamily="34" charset="-122"/>
+            </a:endParaRPr>
+          </a:p>
+          <a:p>
+            <a:pPr>
+              <a:spcBef>
+                <a:spcPts val="375"/>
+              </a:spcBef>
+              <a:spcAft>
+                <a:spcPts val="600"/>
+              </a:spcAft>
+            </a:pPr>
+            <a:endParaRPr lang="en-US" altLang="zh-CN" dirty="0">
+              <a:solidFill>
+                <a:srgbClr val="000000"/>
+              </a:solidFill>
+              <a:latin typeface="微软雅黑" panose="020B0503020204020204" pitchFamily="34" charset="-122"/>
+              <a:ea typeface="微软雅黑" panose="020B0503020204020204" pitchFamily="34" charset="-122"/>
+            </a:endParaRPr>
+          </a:p>
+        </p:txBody>
+      </p:sp>
+      <p:sp>
+        <p:nvSpPr>
+          <p:cNvPr id="18" name="矩形 17">
+            <a:extLst>
+              <a:ext uri="{FF2B5EF4-FFF2-40B4-BE49-F238E27FC236}">
+                <a16:creationId xmlns:a16="http://schemas.microsoft.com/office/drawing/2014/main" id="{CAA341BB-B969-2A31-E6AE-CE2CA4DDF8FD}"/>
+              </a:ext>
+            </a:extLst>
+          </p:cNvPr>
+          <p:cNvSpPr/>
+          <p:nvPr/>
+        </p:nvSpPr>
+        <p:spPr>
+          <a:xfrm>
+            <a:off x="7349629" y="1338940"/>
+            <a:ext cx="3810000" cy="2470209"/>
+          </a:xfrm>
+          <a:prstGeom prst="rect">
+            <a:avLst/>
+          </a:prstGeom>
+          <a:solidFill>
+            <a:schemeClr val="accent1">
+              <a:lumMod val="60000"/>
+              <a:lumOff val="40000"/>
+            </a:schemeClr>
+          </a:solidFill>
+        </p:spPr>
+        <p:style>
+          <a:lnRef idx="1">
+            <a:schemeClr val="accent1"/>
+          </a:lnRef>
+          <a:fillRef idx="3">
+            <a:schemeClr val="accent1"/>
+          </a:fillRef>
+          <a:effectRef idx="2">
+            <a:schemeClr val="accent1"/>
+          </a:effectRef>
+          <a:fontRef idx="minor">
+            <a:schemeClr val="lt1"/>
+          </a:fontRef>
+        </p:style>
+        <p:txBody>
+          <a:bodyPr rtlCol="0" anchor="ctr"/>
+          <a:lstStyle/>
+          <a:p>
+            <a:pPr algn="ctr"/>
+            <a:r>
+              <a:rPr lang="zh-CN" altLang="en-US" dirty="0"/>
+              <a:t>图片</a:t>
+            </a:r>
+            <a:r>
+              <a:rPr lang="en-US" altLang="zh-CN" dirty="0"/>
+              <a:t>1</a:t>
+            </a:r>
+            <a:endParaRPr lang="zh-CN" altLang="en-US" dirty="0"/>
+          </a:p>
+        </p:txBody>
+      </p:sp>
+      <p:sp>
+        <p:nvSpPr>
+          <p:cNvPr id="19" name="矩形 18">
+            <a:extLst>
+              <a:ext uri="{FF2B5EF4-FFF2-40B4-BE49-F238E27FC236}">
+                <a16:creationId xmlns:a16="http://schemas.microsoft.com/office/drawing/2014/main" id="{81C7A6A7-1631-FB06-ADC0-C871FEE2CD2C}"/>
+              </a:ext>
+            </a:extLst>
+          </p:cNvPr>
+          <p:cNvSpPr/>
+          <p:nvPr/>
+        </p:nvSpPr>
+        <p:spPr>
+          <a:xfrm>
+            <a:off x="7349629" y="3906221"/>
+            <a:ext cx="3810000" cy="2470209"/>
+          </a:xfrm>
+          <a:prstGeom prst="rect">
+            <a:avLst/>
+          </a:prstGeom>
+          <a:solidFill>
+            <a:schemeClr val="accent1">
+              <a:lumMod val="60000"/>
+              <a:lumOff val="40000"/>
+            </a:schemeClr>
+          </a:solidFill>
+        </p:spPr>
+        <p:style>
+          <a:lnRef idx="1">
+            <a:schemeClr val="accent1"/>
+          </a:lnRef>
+          <a:fillRef idx="3">
+            <a:schemeClr val="accent1"/>
+          </a:fillRef>
+          <a:effectRef idx="2">
+            <a:schemeClr val="accent1"/>
+          </a:effectRef>
+          <a:fontRef idx="minor">
+            <a:schemeClr val="lt1"/>
+          </a:fontRef>
+        </p:style>
+        <p:txBody>
+          <a:bodyPr rtlCol="0" anchor="ctr"/>
+          <a:lstStyle/>
+          <a:p>
+            <a:pPr algn="ctr"/>
+            <a:r>
+              <a:rPr lang="zh-CN" altLang="en-US" dirty="0"/>
+              <a:t>图片</a:t>
+            </a:r>
+            <a:r>
+              <a:rPr lang="en-US" altLang="zh-CN" dirty="0"/>
+              <a:t>2</a:t>
+            </a:r>
+            <a:endParaRPr lang="zh-CN" altLang="en-US" dirty="0"/>
+          </a:p>
+        </p:txBody>
+      </p:sp>
+    </p:spTree>
+    <p:extLst>
+      <p:ext uri="{BB962C8B-B14F-4D97-AF65-F5344CB8AC3E}">
+        <p14:creationId xmlns:p14="http://schemas.microsoft.com/office/powerpoint/2010/main" val="2714260080"/>
+      </p:ext>
+    </p:extLst>
+  </p:cSld>
+  <p:clrMapOvr>
+    <a:masterClrMapping/>
+  </p:clrMapOvr>
+</p:sld>
+</file>
+
+<file path=ppt/slides/slide7.xml><?xml version="1.0" encoding="utf-8"?>
+<p:sld xmlns:a="http://schemas.openxmlformats.org/drawingml/2006/main" xmlns:r="http://schemas.openxmlformats.org/officeDocument/2006/relationships" xmlns:p="http://schemas.openxmlformats.org/presentationml/2006/main">
+  <p:cSld>
+    <p:spTree>
+      <p:nvGrpSpPr>
+        <p:cNvPr id="1" name="">
+          <a:extLst>
+            <a:ext uri="{FF2B5EF4-FFF2-40B4-BE49-F238E27FC236}">
+              <a16:creationId xmlns:a16="http://schemas.microsoft.com/office/drawing/2014/main" id="{577B3550-ED96-4309-FD4A-45ADD678AF36}"/>
+            </a:ext>
+          </a:extLst>
+        </p:cNvPr>
+        <p:cNvGrpSpPr/>
+        <p:nvPr/>
+      </p:nvGrpSpPr>
+      <p:grpSpPr>
+        <a:xfrm>
+          <a:off x="0" y="0"/>
+          <a:ext cx="0" cy="0"/>
+          <a:chOff x="0" y="0"/>
+          <a:chExt cx="0" cy="0"/>
+        </a:xfrm>
+      </p:grpSpPr>
+      <p:sp>
+        <p:nvSpPr>
+          <p:cNvPr id="2" name="Rectangle 1">
+            <a:extLst>
+              <a:ext uri="{FF2B5EF4-FFF2-40B4-BE49-F238E27FC236}">
+                <a16:creationId xmlns:a16="http://schemas.microsoft.com/office/drawing/2014/main" id="{C3D9E621-5302-6B55-1DDC-A59B441FD935}"/>
+              </a:ext>
+            </a:extLst>
+          </p:cNvPr>
+          <p:cNvSpPr/>
+          <p:nvPr/>
+        </p:nvSpPr>
+        <p:spPr>
+          <a:xfrm>
+            <a:off x="0" y="857250"/>
+            <a:ext cx="7905750" cy="76200"/>
+          </a:xfrm>
+          <a:prstGeom prst="rect">
+            <a:avLst/>
+          </a:prstGeom>
+          <a:solidFill>
+            <a:srgbClr val="5B8BC6"/>
+          </a:solidFill>
+          <a:ln>
+            <a:noFill/>
+          </a:ln>
+          <a:effectLst/>
+        </p:spPr>
+        <p:style>
+          <a:lnRef idx="1">
+            <a:schemeClr val="accent1"/>
+          </a:lnRef>
+          <a:fillRef idx="3">
+            <a:schemeClr val="accent1"/>
+          </a:fillRef>
+          <a:effectRef idx="2">
+            <a:schemeClr val="accent1"/>
+          </a:effectRef>
+          <a:fontRef idx="minor">
+            <a:schemeClr val="lt1"/>
+          </a:fontRef>
+        </p:style>
+        <p:txBody>
+          <a:bodyPr rtlCol="0" anchor="ctr"/>
+          <a:lstStyle/>
+          <a:p>
+            <a:pPr algn="ctr"/>
+            <a:endParaRPr dirty="0">
+              <a:latin typeface="微软雅黑" panose="020B0503020204020204" pitchFamily="34" charset="-122"/>
+              <a:ea typeface="微软雅黑" panose="020B0503020204020204" pitchFamily="34" charset="-122"/>
+            </a:endParaRPr>
+          </a:p>
+        </p:txBody>
+      </p:sp>
+      <p:sp>
+        <p:nvSpPr>
+          <p:cNvPr id="3" name="Rectangle 2">
+            <a:extLst>
+              <a:ext uri="{FF2B5EF4-FFF2-40B4-BE49-F238E27FC236}">
+                <a16:creationId xmlns:a16="http://schemas.microsoft.com/office/drawing/2014/main" id="{DA71AA10-FF0C-5D53-3714-81134920995C}"/>
+              </a:ext>
+            </a:extLst>
+          </p:cNvPr>
+          <p:cNvSpPr/>
+          <p:nvPr/>
+        </p:nvSpPr>
+        <p:spPr>
+          <a:xfrm>
+            <a:off x="8096250" y="885825"/>
+            <a:ext cx="4095750" cy="28575"/>
+          </a:xfrm>
+          <a:prstGeom prst="rect">
+            <a:avLst/>
+          </a:prstGeom>
+          <a:solidFill>
+            <a:srgbClr val="9CC2E5"/>
+          </a:solidFill>
+          <a:ln>
+            <a:noFill/>
+          </a:ln>
+          <a:effectLst/>
+        </p:spPr>
+        <p:style>
+          <a:lnRef idx="1">
+            <a:schemeClr val="accent1"/>
+          </a:lnRef>
+          <a:fillRef idx="3">
+            <a:schemeClr val="accent1"/>
+          </a:fillRef>
+          <a:effectRef idx="2">
+            <a:schemeClr val="accent1"/>
+          </a:effectRef>
+          <a:fontRef idx="minor">
+            <a:schemeClr val="lt1"/>
+          </a:fontRef>
+        </p:style>
+        <p:txBody>
+          <a:bodyPr rtlCol="0" anchor="ctr"/>
+          <a:lstStyle/>
+          <a:p>
+            <a:pPr algn="ctr"/>
+            <a:endParaRPr dirty="0">
+              <a:latin typeface="微软雅黑" panose="020B0503020204020204" pitchFamily="34" charset="-122"/>
+              <a:ea typeface="微软雅黑" panose="020B0503020204020204" pitchFamily="34" charset="-122"/>
+            </a:endParaRPr>
+          </a:p>
+        </p:txBody>
+      </p:sp>
+      <p:pic>
+        <p:nvPicPr>
+          <p:cNvPr id="4" name="Picture 3" descr="heu_logo_color.png">
+            <a:extLst>
+              <a:ext uri="{FF2B5EF4-FFF2-40B4-BE49-F238E27FC236}">
+                <a16:creationId xmlns:a16="http://schemas.microsoft.com/office/drawing/2014/main" id="{A29C62F3-AA6F-3E85-49E1-2A5ED29172CC}"/>
+              </a:ext>
+            </a:extLst>
+          </p:cNvPr>
+          <p:cNvPicPr>
+            <a:picLocks noChangeAspect="1"/>
+          </p:cNvPicPr>
+          <p:nvPr/>
+        </p:nvPicPr>
+        <p:blipFill>
+          <a:blip r:embed="rId2"/>
+          <a:stretch>
+            <a:fillRect/>
+          </a:stretch>
+        </p:blipFill>
+        <p:spPr>
+          <a:xfrm>
+            <a:off x="9577062" y="158750"/>
+            <a:ext cx="2329188" cy="619125"/>
+          </a:xfrm>
+          <a:prstGeom prst="rect">
+            <a:avLst/>
+          </a:prstGeom>
+        </p:spPr>
+      </p:pic>
+      <p:sp>
+        <p:nvSpPr>
+          <p:cNvPr id="5" name="Rectangle 4">
+            <a:extLst>
+              <a:ext uri="{FF2B5EF4-FFF2-40B4-BE49-F238E27FC236}">
+                <a16:creationId xmlns:a16="http://schemas.microsoft.com/office/drawing/2014/main" id="{C92A1262-0F10-63C1-BCC0-E1935E47ADC2}"/>
+              </a:ext>
+            </a:extLst>
+          </p:cNvPr>
+          <p:cNvSpPr/>
+          <p:nvPr/>
+        </p:nvSpPr>
+        <p:spPr>
+          <a:xfrm>
+            <a:off x="0" y="6473502"/>
+            <a:ext cx="12192000" cy="19050"/>
+          </a:xfrm>
+          <a:prstGeom prst="rect">
+            <a:avLst/>
+          </a:prstGeom>
+          <a:solidFill>
+            <a:srgbClr val="3E649A"/>
+          </a:solidFill>
+          <a:ln>
+            <a:noFill/>
+          </a:ln>
+          <a:effectLst/>
+        </p:spPr>
+        <p:style>
+          <a:lnRef idx="1">
+            <a:schemeClr val="accent1"/>
+          </a:lnRef>
+          <a:fillRef idx="3">
+            <a:schemeClr val="accent1"/>
+          </a:fillRef>
+          <a:effectRef idx="2">
+            <a:schemeClr val="accent1"/>
+          </a:effectRef>
+          <a:fontRef idx="minor">
+            <a:schemeClr val="lt1"/>
+          </a:fontRef>
+        </p:style>
+        <p:txBody>
+          <a:bodyPr rtlCol="0" anchor="ctr"/>
+          <a:lstStyle/>
+          <a:p>
+            <a:pPr algn="ctr"/>
+            <a:endParaRPr dirty="0">
+              <a:latin typeface="微软雅黑" panose="020B0503020204020204" pitchFamily="34" charset="-122"/>
+              <a:ea typeface="微软雅黑" panose="020B0503020204020204" pitchFamily="34" charset="-122"/>
+            </a:endParaRPr>
+          </a:p>
+        </p:txBody>
+      </p:sp>
+      <p:sp>
+        <p:nvSpPr>
+          <p:cNvPr id="6" name="TextBox 5">
+            <a:extLst>
+              <a:ext uri="{FF2B5EF4-FFF2-40B4-BE49-F238E27FC236}">
+                <a16:creationId xmlns:a16="http://schemas.microsoft.com/office/drawing/2014/main" id="{AC4A7135-750D-4DDE-7C2A-A9CFBC682180}"/>
+              </a:ext>
+            </a:extLst>
+          </p:cNvPr>
+          <p:cNvSpPr txBox="1"/>
+          <p:nvPr/>
+        </p:nvSpPr>
+        <p:spPr>
+          <a:xfrm>
+            <a:off x="101481" y="6511806"/>
+            <a:ext cx="2087431" cy="369332"/>
+          </a:xfrm>
+          <a:prstGeom prst="rect">
+            <a:avLst/>
+          </a:prstGeom>
+          <a:noFill/>
+        </p:spPr>
+        <p:txBody>
+          <a:bodyPr wrap="none">
+            <a:spAutoFit/>
+          </a:bodyPr>
+          <a:lstStyle/>
+          <a:p>
+            <a:pPr>
+              <a:defRPr sz="1800">
+                <a:solidFill>
+                  <a:srgbClr val="1E1E1E"/>
+                </a:solidFill>
+                <a:latin typeface="KaiTi"/>
+              </a:defRPr>
+            </a:pPr>
+            <a:r>
+              <a:rPr dirty="0" err="1">
+                <a:solidFill>
+                  <a:schemeClr val="tx1">
+                    <a:lumMod val="50000"/>
+                    <a:lumOff val="50000"/>
+                  </a:schemeClr>
+                </a:solidFill>
+                <a:latin typeface="华文行楷" panose="02010800040101010101" pitchFamily="2" charset="-122"/>
+                <a:ea typeface="华文行楷" panose="02010800040101010101" pitchFamily="2" charset="-122"/>
+              </a:rPr>
+              <a:t>大工至善</a:t>
+            </a:r>
+            <a:r>
+              <a:rPr dirty="0">
+                <a:solidFill>
+                  <a:schemeClr val="tx1">
+                    <a:lumMod val="50000"/>
+                    <a:lumOff val="50000"/>
+                  </a:schemeClr>
+                </a:solidFill>
+                <a:latin typeface="华文行楷" panose="02010800040101010101" pitchFamily="2" charset="-122"/>
+                <a:ea typeface="华文行楷" panose="02010800040101010101" pitchFamily="2" charset="-122"/>
+              </a:rPr>
+              <a:t> </a:t>
+            </a:r>
+            <a:r>
+              <a:rPr dirty="0" err="1">
+                <a:solidFill>
+                  <a:schemeClr val="tx1">
+                    <a:lumMod val="50000"/>
+                    <a:lumOff val="50000"/>
+                  </a:schemeClr>
+                </a:solidFill>
+                <a:latin typeface="华文行楷" panose="02010800040101010101" pitchFamily="2" charset="-122"/>
+                <a:ea typeface="华文行楷" panose="02010800040101010101" pitchFamily="2" charset="-122"/>
+              </a:rPr>
+              <a:t>大学至真</a:t>
+            </a:r>
+            <a:endParaRPr dirty="0">
+              <a:solidFill>
+                <a:schemeClr val="tx1">
+                  <a:lumMod val="50000"/>
+                  <a:lumOff val="50000"/>
+                </a:schemeClr>
+              </a:solidFill>
+              <a:latin typeface="华文行楷" panose="02010800040101010101" pitchFamily="2" charset="-122"/>
+              <a:ea typeface="华文行楷" panose="02010800040101010101" pitchFamily="2" charset="-122"/>
+            </a:endParaRPr>
+          </a:p>
+        </p:txBody>
+      </p:sp>
+      <p:sp>
+        <p:nvSpPr>
+          <p:cNvPr id="8" name="灯片编号占位符 7">
+            <a:extLst>
+              <a:ext uri="{FF2B5EF4-FFF2-40B4-BE49-F238E27FC236}">
+                <a16:creationId xmlns:a16="http://schemas.microsoft.com/office/drawing/2014/main" id="{0C01798D-F551-13A1-CC7D-8D30F2AB8097}"/>
+              </a:ext>
+            </a:extLst>
+          </p:cNvPr>
+          <p:cNvSpPr>
+            <a:spLocks noGrp="1"/>
+          </p:cNvSpPr>
+          <p:nvPr>
+            <p:ph type="sldNum" sz="quarter" idx="12"/>
+          </p:nvPr>
+        </p:nvSpPr>
+        <p:spPr>
+          <a:xfrm>
+            <a:off x="11423769" y="6492875"/>
+            <a:ext cx="482481" cy="365125"/>
+          </a:xfrm>
+        </p:spPr>
+        <p:txBody>
+          <a:bodyPr/>
+          <a:lstStyle/>
+          <a:p>
+            <a:fld id="{C1FF6DA9-008F-8B48-92A6-B652298478BF}" type="slidenum">
+              <a:rPr lang="en-US" sz="1400" smtClean="0">
+                <a:latin typeface="Times New Roman" panose="02020603050405020304" pitchFamily="18" charset="0"/>
+                <a:cs typeface="Times New Roman" panose="02020603050405020304" pitchFamily="18" charset="0"/>
+              </a:rPr>
+              <a:t>7</a:t>
+            </a:fld>
+            <a:endParaRPr lang="en-US" sz="1400" dirty="0">
+              <a:latin typeface="Times New Roman" panose="02020603050405020304" pitchFamily="18" charset="0"/>
+              <a:cs typeface="Times New Roman" panose="02020603050405020304" pitchFamily="18" charset="0"/>
+            </a:endParaRPr>
+          </a:p>
+        </p:txBody>
+      </p:sp>
+      <p:sp>
+        <p:nvSpPr>
+          <p:cNvPr id="12" name="文本框 11">
+            <a:extLst>
+              <a:ext uri="{FF2B5EF4-FFF2-40B4-BE49-F238E27FC236}">
+                <a16:creationId xmlns:a16="http://schemas.microsoft.com/office/drawing/2014/main" id="{BD23631E-0737-7CFF-BF9A-E188ABBEF076}"/>
+              </a:ext>
+            </a:extLst>
+          </p:cNvPr>
+          <p:cNvSpPr txBox="1"/>
+          <p:nvPr/>
+        </p:nvSpPr>
+        <p:spPr>
+          <a:xfrm>
+            <a:off x="298569" y="1063020"/>
+            <a:ext cx="6097424" cy="400110"/>
+          </a:xfrm>
+          <a:prstGeom prst="rect">
+            <a:avLst/>
+          </a:prstGeom>
+          <a:noFill/>
+        </p:spPr>
+        <p:txBody>
+          <a:bodyPr wrap="square">
+            <a:spAutoFit/>
+          </a:bodyPr>
+          <a:lstStyle/>
+          <a:p>
+            <a:r>
+              <a:rPr lang="zh-CN" altLang="en-US" sz="2000" b="1" i="0" dirty="0">
+                <a:solidFill>
+                  <a:srgbClr val="000000"/>
+                </a:solidFill>
+                <a:effectLst/>
+                <a:latin typeface="微软雅黑" panose="020B0503020204020204" pitchFamily="34" charset="-122"/>
+                <a:ea typeface="微软雅黑" panose="020B0503020204020204" pitchFamily="34" charset="-122"/>
+              </a:rPr>
+              <a:t>➢ 小标题</a:t>
+            </a:r>
+            <a:endParaRPr lang="zh-CN" altLang="en-US" sz="2000" dirty="0">
+              <a:latin typeface="微软雅黑" panose="020B0503020204020204" pitchFamily="34" charset="-122"/>
+              <a:ea typeface="微软雅黑" panose="020B0503020204020204" pitchFamily="34" charset="-122"/>
+            </a:endParaRPr>
+          </a:p>
+        </p:txBody>
+      </p:sp>
+      <p:sp>
+        <p:nvSpPr>
+          <p:cNvPr id="16" name="文本框 15">
+            <a:extLst>
+              <a:ext uri="{FF2B5EF4-FFF2-40B4-BE49-F238E27FC236}">
+                <a16:creationId xmlns:a16="http://schemas.microsoft.com/office/drawing/2014/main" id="{D8263E7C-6216-FA5D-1453-6DD2EC6E49C4}"/>
+              </a:ext>
+            </a:extLst>
+          </p:cNvPr>
+          <p:cNvSpPr txBox="1"/>
+          <p:nvPr/>
+        </p:nvSpPr>
+        <p:spPr>
+          <a:xfrm>
+            <a:off x="298569" y="163534"/>
+            <a:ext cx="6097424" cy="584775"/>
+          </a:xfrm>
+          <a:prstGeom prst="rect">
+            <a:avLst/>
+          </a:prstGeom>
+          <a:noFill/>
+        </p:spPr>
+        <p:txBody>
+          <a:bodyPr wrap="square">
+            <a:spAutoFit/>
+          </a:bodyPr>
+          <a:lstStyle/>
+          <a:p>
+            <a:pPr algn="l">
+              <a:buNone/>
+            </a:pPr>
+            <a:r>
+              <a:rPr lang="en-US" altLang="zh-CN" sz="3200" b="1" i="0" dirty="0">
+                <a:solidFill>
+                  <a:srgbClr val="4472C4"/>
+                </a:solidFill>
+                <a:effectLst/>
+                <a:latin typeface="微软雅黑" panose="020B0503020204020204" pitchFamily="34" charset="-122"/>
+                <a:ea typeface="微软雅黑" panose="020B0503020204020204" pitchFamily="34" charset="-122"/>
+              </a:rPr>
+              <a:t>03 </a:t>
+            </a:r>
+            <a:r>
+              <a:rPr lang="zh-CN" altLang="en-US" sz="3200" b="1" i="0" dirty="0">
+                <a:solidFill>
+                  <a:srgbClr val="4472C4"/>
+                </a:solidFill>
+                <a:effectLst/>
+                <a:latin typeface="微软雅黑" panose="020B0503020204020204" pitchFamily="34" charset="-122"/>
+                <a:ea typeface="微软雅黑" panose="020B0503020204020204" pitchFamily="34" charset="-122"/>
+              </a:rPr>
+              <a:t>模板</a:t>
+            </a:r>
+            <a:r>
+              <a:rPr lang="en-US" altLang="zh-CN" sz="3200" b="1" dirty="0">
+                <a:solidFill>
+                  <a:srgbClr val="4472C4"/>
+                </a:solidFill>
+                <a:latin typeface="微软雅黑" panose="020B0503020204020204" pitchFamily="34" charset="-122"/>
+                <a:ea typeface="微软雅黑" panose="020B0503020204020204" pitchFamily="34" charset="-122"/>
+              </a:rPr>
+              <a:t>5</a:t>
+            </a:r>
+            <a:endParaRPr lang="zh-CN" altLang="en-US" sz="3200" b="1" i="0" dirty="0">
+              <a:solidFill>
+                <a:srgbClr val="4472C4"/>
+              </a:solidFill>
+              <a:effectLst/>
+              <a:latin typeface="微软雅黑" panose="020B0503020204020204" pitchFamily="34" charset="-122"/>
+              <a:ea typeface="微软雅黑" panose="020B0503020204020204" pitchFamily="34" charset="-122"/>
+            </a:endParaRPr>
+          </a:p>
+        </p:txBody>
+      </p:sp>
+      <p:sp>
+        <p:nvSpPr>
+          <p:cNvPr id="18" name="矩形 17">
+            <a:extLst>
+              <a:ext uri="{FF2B5EF4-FFF2-40B4-BE49-F238E27FC236}">
+                <a16:creationId xmlns:a16="http://schemas.microsoft.com/office/drawing/2014/main" id="{3E003DD9-4FCC-DB55-374A-E625B6C46DC5}"/>
+              </a:ext>
+            </a:extLst>
+          </p:cNvPr>
+          <p:cNvSpPr/>
+          <p:nvPr/>
+        </p:nvSpPr>
+        <p:spPr>
+          <a:xfrm>
+            <a:off x="6931347" y="1280663"/>
+            <a:ext cx="4733662" cy="4720087"/>
+          </a:xfrm>
+          <a:prstGeom prst="rect">
+            <a:avLst/>
+          </a:prstGeom>
+          <a:solidFill>
+            <a:schemeClr val="accent1">
+              <a:lumMod val="60000"/>
+              <a:lumOff val="40000"/>
+            </a:schemeClr>
+          </a:solidFill>
+        </p:spPr>
+        <p:style>
+          <a:lnRef idx="1">
+            <a:schemeClr val="accent1"/>
+          </a:lnRef>
+          <a:fillRef idx="3">
+            <a:schemeClr val="accent1"/>
+          </a:fillRef>
+          <a:effectRef idx="2">
+            <a:schemeClr val="accent1"/>
+          </a:effectRef>
+          <a:fontRef idx="minor">
+            <a:schemeClr val="lt1"/>
+          </a:fontRef>
+        </p:style>
+        <p:txBody>
+          <a:bodyPr rtlCol="0" anchor="ctr"/>
+          <a:lstStyle/>
+          <a:p>
+            <a:pPr algn="ctr"/>
+            <a:r>
+              <a:rPr lang="zh-CN" altLang="en-US" dirty="0"/>
+              <a:t>图片</a:t>
+            </a:r>
+            <a:r>
+              <a:rPr lang="en-US" altLang="zh-CN" dirty="0"/>
+              <a:t>1</a:t>
+            </a:r>
+            <a:endParaRPr lang="zh-CN" altLang="en-US" dirty="0"/>
+          </a:p>
+        </p:txBody>
+      </p:sp>
+      <p:sp>
+        <p:nvSpPr>
+          <p:cNvPr id="7" name="文本框 6">
+            <a:extLst>
+              <a:ext uri="{FF2B5EF4-FFF2-40B4-BE49-F238E27FC236}">
+                <a16:creationId xmlns:a16="http://schemas.microsoft.com/office/drawing/2014/main" id="{5926CEC5-CDDF-8153-8DFB-DD9292DB43D9}"/>
+              </a:ext>
+            </a:extLst>
+          </p:cNvPr>
+          <p:cNvSpPr txBox="1"/>
+          <p:nvPr/>
+        </p:nvSpPr>
+        <p:spPr>
+          <a:xfrm>
+            <a:off x="499669" y="1742197"/>
+            <a:ext cx="5473291" cy="4016484"/>
+          </a:xfrm>
+          <a:prstGeom prst="rect">
+            <a:avLst/>
+          </a:prstGeom>
+          <a:solidFill>
+            <a:schemeClr val="accent1">
+              <a:lumMod val="20000"/>
+              <a:lumOff val="80000"/>
+            </a:schemeClr>
+          </a:solidFill>
+        </p:spPr>
+        <p:txBody>
+          <a:bodyPr wrap="square">
+            <a:spAutoFit/>
+          </a:bodyPr>
+          <a:lstStyle/>
+          <a:p>
+            <a:pPr marL="285750" indent="-285750">
+              <a:spcBef>
+                <a:spcPts val="375"/>
+              </a:spcBef>
+              <a:spcAft>
+                <a:spcPts val="600"/>
+              </a:spcAft>
+              <a:buFont typeface="Wingdings" panose="05000000000000000000" pitchFamily="2" charset="2"/>
+              <a:buChar char="n"/>
+            </a:pPr>
+            <a:r>
+              <a:rPr lang="zh-CN" altLang="en-US" dirty="0">
+                <a:solidFill>
+                  <a:srgbClr val="000000"/>
+                </a:solidFill>
+                <a:latin typeface="微软雅黑" panose="020B0503020204020204" pitchFamily="34" charset="-122"/>
+                <a:ea typeface="微软雅黑" panose="020B0503020204020204" pitchFamily="34" charset="-122"/>
+              </a:rPr>
+              <a:t>描述性文字</a:t>
+            </a:r>
+            <a:endParaRPr lang="en-US" altLang="zh-CN" dirty="0">
+              <a:solidFill>
+                <a:srgbClr val="000000"/>
+              </a:solidFill>
+              <a:latin typeface="微软雅黑" panose="020B0503020204020204" pitchFamily="34" charset="-122"/>
+              <a:ea typeface="微软雅黑" panose="020B0503020204020204" pitchFamily="34" charset="-122"/>
+            </a:endParaRPr>
+          </a:p>
+          <a:p>
+            <a:pPr marL="285750" indent="-285750">
+              <a:spcBef>
+                <a:spcPts val="375"/>
+              </a:spcBef>
+              <a:spcAft>
+                <a:spcPts val="600"/>
+              </a:spcAft>
+              <a:buFont typeface="Wingdings" panose="05000000000000000000" pitchFamily="2" charset="2"/>
+              <a:buChar char="n"/>
+            </a:pPr>
+            <a:endParaRPr lang="en-US" altLang="zh-CN" dirty="0">
+              <a:solidFill>
+                <a:srgbClr val="000000"/>
+              </a:solidFill>
+              <a:latin typeface="微软雅黑" panose="020B0503020204020204" pitchFamily="34" charset="-122"/>
+              <a:ea typeface="微软雅黑" panose="020B0503020204020204" pitchFamily="34" charset="-122"/>
+            </a:endParaRPr>
+          </a:p>
+          <a:p>
+            <a:pPr marL="285750" indent="-285750">
+              <a:spcBef>
+                <a:spcPts val="375"/>
+              </a:spcBef>
+              <a:spcAft>
+                <a:spcPts val="600"/>
+              </a:spcAft>
+              <a:buFont typeface="Wingdings" panose="05000000000000000000" pitchFamily="2" charset="2"/>
+              <a:buChar char="n"/>
+            </a:pPr>
+            <a:endParaRPr lang="en-US" altLang="zh-CN" dirty="0">
+              <a:solidFill>
+                <a:srgbClr val="000000"/>
+              </a:solidFill>
+              <a:latin typeface="微软雅黑" panose="020B0503020204020204" pitchFamily="34" charset="-122"/>
+              <a:ea typeface="微软雅黑" panose="020B0503020204020204" pitchFamily="34" charset="-122"/>
+            </a:endParaRPr>
+          </a:p>
+          <a:p>
+            <a:pPr marL="285750" indent="-285750">
+              <a:spcBef>
+                <a:spcPts val="375"/>
+              </a:spcBef>
+              <a:spcAft>
+                <a:spcPts val="600"/>
+              </a:spcAft>
+              <a:buFont typeface="Wingdings" panose="05000000000000000000" pitchFamily="2" charset="2"/>
+              <a:buChar char="n"/>
+            </a:pPr>
+            <a:endParaRPr lang="en-US" altLang="zh-CN" dirty="0">
+              <a:solidFill>
+                <a:srgbClr val="000000"/>
+              </a:solidFill>
+              <a:latin typeface="微软雅黑" panose="020B0503020204020204" pitchFamily="34" charset="-122"/>
+              <a:ea typeface="微软雅黑" panose="020B0503020204020204" pitchFamily="34" charset="-122"/>
+            </a:endParaRPr>
+          </a:p>
+          <a:p>
+            <a:pPr marL="285750" indent="-285750">
+              <a:spcBef>
+                <a:spcPts val="375"/>
+              </a:spcBef>
+              <a:spcAft>
+                <a:spcPts val="600"/>
+              </a:spcAft>
+              <a:buFont typeface="Wingdings" panose="05000000000000000000" pitchFamily="2" charset="2"/>
+              <a:buChar char="n"/>
+            </a:pPr>
+            <a:endParaRPr lang="en-US" altLang="zh-CN" dirty="0">
+              <a:solidFill>
+                <a:srgbClr val="000000"/>
+              </a:solidFill>
+              <a:latin typeface="微软雅黑" panose="020B0503020204020204" pitchFamily="34" charset="-122"/>
+              <a:ea typeface="微软雅黑" panose="020B0503020204020204" pitchFamily="34" charset="-122"/>
+            </a:endParaRPr>
+          </a:p>
+          <a:p>
+            <a:pPr marL="285750" indent="-285750">
+              <a:spcBef>
+                <a:spcPts val="375"/>
+              </a:spcBef>
+              <a:spcAft>
+                <a:spcPts val="600"/>
+              </a:spcAft>
+              <a:buFont typeface="Wingdings" panose="05000000000000000000" pitchFamily="2" charset="2"/>
+              <a:buChar char="n"/>
+            </a:pPr>
+            <a:endParaRPr lang="en-US" altLang="zh-CN" dirty="0">
+              <a:solidFill>
+                <a:srgbClr val="000000"/>
+              </a:solidFill>
+              <a:latin typeface="微软雅黑" panose="020B0503020204020204" pitchFamily="34" charset="-122"/>
+              <a:ea typeface="微软雅黑" panose="020B0503020204020204" pitchFamily="34" charset="-122"/>
+            </a:endParaRPr>
+          </a:p>
+          <a:p>
+            <a:pPr marL="285750" indent="-285750">
+              <a:spcBef>
+                <a:spcPts val="375"/>
+              </a:spcBef>
+              <a:spcAft>
+                <a:spcPts val="600"/>
+              </a:spcAft>
+              <a:buFont typeface="Wingdings" panose="05000000000000000000" pitchFamily="2" charset="2"/>
+              <a:buChar char="n"/>
+            </a:pPr>
+            <a:endParaRPr lang="en-US" altLang="zh-CN" dirty="0">
+              <a:solidFill>
+                <a:srgbClr val="000000"/>
+              </a:solidFill>
+              <a:latin typeface="微软雅黑" panose="020B0503020204020204" pitchFamily="34" charset="-122"/>
+              <a:ea typeface="微软雅黑" panose="020B0503020204020204" pitchFamily="34" charset="-122"/>
+            </a:endParaRPr>
+          </a:p>
+          <a:p>
+            <a:pPr marL="285750" indent="-285750">
+              <a:spcBef>
+                <a:spcPts val="375"/>
+              </a:spcBef>
+              <a:spcAft>
+                <a:spcPts val="600"/>
+              </a:spcAft>
+              <a:buFont typeface="Wingdings" panose="05000000000000000000" pitchFamily="2" charset="2"/>
+              <a:buChar char="n"/>
+            </a:pPr>
+            <a:endParaRPr lang="en-US" altLang="zh-CN" dirty="0">
+              <a:solidFill>
+                <a:srgbClr val="000000"/>
+              </a:solidFill>
+              <a:latin typeface="微软雅黑" panose="020B0503020204020204" pitchFamily="34" charset="-122"/>
+              <a:ea typeface="微软雅黑" panose="020B0503020204020204" pitchFamily="34" charset="-122"/>
+            </a:endParaRPr>
+          </a:p>
+          <a:p>
+            <a:pPr marL="285750" indent="-285750">
+              <a:spcBef>
+                <a:spcPts val="375"/>
+              </a:spcBef>
+              <a:spcAft>
+                <a:spcPts val="600"/>
+              </a:spcAft>
+              <a:buFont typeface="Wingdings" panose="05000000000000000000" pitchFamily="2" charset="2"/>
+              <a:buChar char="n"/>
+            </a:pPr>
+            <a:endParaRPr lang="en-US" altLang="zh-CN" dirty="0">
+              <a:solidFill>
+                <a:srgbClr val="000000"/>
+              </a:solidFill>
+              <a:latin typeface="微软雅黑" panose="020B0503020204020204" pitchFamily="34" charset="-122"/>
+              <a:ea typeface="微软雅黑" panose="020B0503020204020204" pitchFamily="34" charset="-122"/>
+            </a:endParaRPr>
+          </a:p>
+          <a:p>
+            <a:pPr marL="285750" indent="-285750">
+              <a:spcBef>
+                <a:spcPts val="375"/>
+              </a:spcBef>
+              <a:spcAft>
+                <a:spcPts val="600"/>
+              </a:spcAft>
+              <a:buFont typeface="Wingdings" panose="05000000000000000000" pitchFamily="2" charset="2"/>
+              <a:buChar char="n"/>
+            </a:pPr>
+            <a:endParaRPr lang="en-US" altLang="zh-CN" dirty="0">
+              <a:solidFill>
+                <a:srgbClr val="000000"/>
+              </a:solidFill>
+              <a:latin typeface="微软雅黑" panose="020B0503020204020204" pitchFamily="34" charset="-122"/>
+              <a:ea typeface="微软雅黑" panose="020B0503020204020204" pitchFamily="34" charset="-122"/>
+            </a:endParaRPr>
+          </a:p>
+        </p:txBody>
+      </p:sp>
+    </p:spTree>
+    <p:extLst>
+      <p:ext uri="{BB962C8B-B14F-4D97-AF65-F5344CB8AC3E}">
+        <p14:creationId xmlns:p14="http://schemas.microsoft.com/office/powerpoint/2010/main" val="3385387909"/>
+      </p:ext>
+    </p:extLst>
+  </p:cSld>
+  <p:clrMapOvr>
+    <a:masterClrMapping/>
+  </p:clrMapOvr>
+</p:sld>
+</file>
+
+<file path=ppt/slides/slide8.xml><?xml version="1.0" encoding="utf-8"?>
+<p:sld xmlns:a="http://schemas.openxmlformats.org/drawingml/2006/main" xmlns:r="http://schemas.openxmlformats.org/officeDocument/2006/relationships" xmlns:p="http://schemas.openxmlformats.org/presentationml/2006/main">
+  <p:cSld>
+    <p:spTree>
+      <p:nvGrpSpPr>
+        <p:cNvPr id="1" name="">
+          <a:extLst>
+            <a:ext uri="{FF2B5EF4-FFF2-40B4-BE49-F238E27FC236}">
+              <a16:creationId xmlns:a16="http://schemas.microsoft.com/office/drawing/2014/main" id="{15F3D6C7-6229-4EA2-24E0-47CB8ED4F3F1}"/>
+            </a:ext>
+          </a:extLst>
+        </p:cNvPr>
+        <p:cNvGrpSpPr/>
+        <p:nvPr/>
+      </p:nvGrpSpPr>
+      <p:grpSpPr>
+        <a:xfrm>
+          <a:off x="0" y="0"/>
+          <a:ext cx="0" cy="0"/>
+          <a:chOff x="0" y="0"/>
+          <a:chExt cx="0" cy="0"/>
+        </a:xfrm>
+      </p:grpSpPr>
+      <p:sp>
+        <p:nvSpPr>
+          <p:cNvPr id="2" name="Rectangle 1">
+            <a:extLst>
+              <a:ext uri="{FF2B5EF4-FFF2-40B4-BE49-F238E27FC236}">
+                <a16:creationId xmlns:a16="http://schemas.microsoft.com/office/drawing/2014/main" id="{3DF5B429-65FA-F424-8D1B-73A5DE716D79}"/>
+              </a:ext>
+            </a:extLst>
+          </p:cNvPr>
+          <p:cNvSpPr/>
+          <p:nvPr/>
+        </p:nvSpPr>
+        <p:spPr>
+          <a:xfrm>
+            <a:off x="0" y="857250"/>
+            <a:ext cx="7905750" cy="76200"/>
+          </a:xfrm>
+          <a:prstGeom prst="rect">
+            <a:avLst/>
+          </a:prstGeom>
+          <a:solidFill>
+            <a:srgbClr val="5B8BC6"/>
+          </a:solidFill>
+          <a:ln>
+            <a:noFill/>
+          </a:ln>
+          <a:effectLst/>
+        </p:spPr>
+        <p:style>
+          <a:lnRef idx="1">
+            <a:schemeClr val="accent1"/>
+          </a:lnRef>
+          <a:fillRef idx="3">
+            <a:schemeClr val="accent1"/>
+          </a:fillRef>
+          <a:effectRef idx="2">
+            <a:schemeClr val="accent1"/>
+          </a:effectRef>
+          <a:fontRef idx="minor">
+            <a:schemeClr val="lt1"/>
+          </a:fontRef>
+        </p:style>
+        <p:txBody>
+          <a:bodyPr rtlCol="0" anchor="ctr"/>
+          <a:lstStyle/>
+          <a:p>
+            <a:pPr algn="ctr"/>
+            <a:endParaRPr dirty="0">
+              <a:latin typeface="微软雅黑" panose="020B0503020204020204" pitchFamily="34" charset="-122"/>
+              <a:ea typeface="微软雅黑" panose="020B0503020204020204" pitchFamily="34" charset="-122"/>
+            </a:endParaRPr>
+          </a:p>
+        </p:txBody>
+      </p:sp>
+      <p:sp>
+        <p:nvSpPr>
+          <p:cNvPr id="3" name="Rectangle 2">
+            <a:extLst>
+              <a:ext uri="{FF2B5EF4-FFF2-40B4-BE49-F238E27FC236}">
+                <a16:creationId xmlns:a16="http://schemas.microsoft.com/office/drawing/2014/main" id="{52CF4261-98EB-D0A0-3671-22402AA35422}"/>
+              </a:ext>
+            </a:extLst>
+          </p:cNvPr>
+          <p:cNvSpPr/>
+          <p:nvPr/>
+        </p:nvSpPr>
+        <p:spPr>
+          <a:xfrm>
+            <a:off x="8096250" y="885825"/>
+            <a:ext cx="4095750" cy="28575"/>
+          </a:xfrm>
+          <a:prstGeom prst="rect">
+            <a:avLst/>
+          </a:prstGeom>
+          <a:solidFill>
+            <a:srgbClr val="9CC2E5"/>
+          </a:solidFill>
+          <a:ln>
+            <a:noFill/>
+          </a:ln>
+          <a:effectLst/>
+        </p:spPr>
+        <p:style>
+          <a:lnRef idx="1">
+            <a:schemeClr val="accent1"/>
+          </a:lnRef>
+          <a:fillRef idx="3">
+            <a:schemeClr val="accent1"/>
+          </a:fillRef>
+          <a:effectRef idx="2">
+            <a:schemeClr val="accent1"/>
+          </a:effectRef>
+          <a:fontRef idx="minor">
+            <a:schemeClr val="lt1"/>
+          </a:fontRef>
+        </p:style>
+        <p:txBody>
+          <a:bodyPr rtlCol="0" anchor="ctr"/>
+          <a:lstStyle/>
+          <a:p>
+            <a:pPr algn="ctr"/>
+            <a:endParaRPr dirty="0">
+              <a:latin typeface="微软雅黑" panose="020B0503020204020204" pitchFamily="34" charset="-122"/>
+              <a:ea typeface="微软雅黑" panose="020B0503020204020204" pitchFamily="34" charset="-122"/>
+            </a:endParaRPr>
+          </a:p>
+        </p:txBody>
+      </p:sp>
+      <p:pic>
+        <p:nvPicPr>
+          <p:cNvPr id="4" name="Picture 3" descr="heu_logo_color.png">
+            <a:extLst>
+              <a:ext uri="{FF2B5EF4-FFF2-40B4-BE49-F238E27FC236}">
+                <a16:creationId xmlns:a16="http://schemas.microsoft.com/office/drawing/2014/main" id="{A8C520DD-0025-520B-9B49-F2F395A7CD55}"/>
+              </a:ext>
+            </a:extLst>
+          </p:cNvPr>
+          <p:cNvPicPr>
+            <a:picLocks noChangeAspect="1"/>
+          </p:cNvPicPr>
+          <p:nvPr/>
+        </p:nvPicPr>
+        <p:blipFill>
+          <a:blip r:embed="rId2"/>
+          <a:stretch>
+            <a:fillRect/>
+          </a:stretch>
+        </p:blipFill>
+        <p:spPr>
+          <a:xfrm>
+            <a:off x="9577062" y="158750"/>
+            <a:ext cx="2329188" cy="619125"/>
+          </a:xfrm>
+          <a:prstGeom prst="rect">
+            <a:avLst/>
+          </a:prstGeom>
+        </p:spPr>
+      </p:pic>
+      <p:sp>
+        <p:nvSpPr>
+          <p:cNvPr id="5" name="Rectangle 4">
+            <a:extLst>
+              <a:ext uri="{FF2B5EF4-FFF2-40B4-BE49-F238E27FC236}">
+                <a16:creationId xmlns:a16="http://schemas.microsoft.com/office/drawing/2014/main" id="{ADDAF7B0-D7DC-8130-0EF0-AC48B46E9AF9}"/>
+              </a:ext>
+            </a:extLst>
+          </p:cNvPr>
+          <p:cNvSpPr/>
+          <p:nvPr/>
+        </p:nvSpPr>
+        <p:spPr>
+          <a:xfrm>
+            <a:off x="0" y="6473502"/>
+            <a:ext cx="12192000" cy="19050"/>
+          </a:xfrm>
+          <a:prstGeom prst="rect">
+            <a:avLst/>
+          </a:prstGeom>
+          <a:solidFill>
+            <a:srgbClr val="3E649A"/>
+          </a:solidFill>
+          <a:ln>
+            <a:noFill/>
+          </a:ln>
+          <a:effectLst/>
+        </p:spPr>
+        <p:style>
+          <a:lnRef idx="1">
+            <a:schemeClr val="accent1"/>
+          </a:lnRef>
+          <a:fillRef idx="3">
+            <a:schemeClr val="accent1"/>
+          </a:fillRef>
+          <a:effectRef idx="2">
+            <a:schemeClr val="accent1"/>
+          </a:effectRef>
+          <a:fontRef idx="minor">
+            <a:schemeClr val="lt1"/>
+          </a:fontRef>
+        </p:style>
+        <p:txBody>
+          <a:bodyPr rtlCol="0" anchor="ctr"/>
+          <a:lstStyle/>
+          <a:p>
+            <a:pPr algn="ctr"/>
+            <a:endParaRPr dirty="0">
+              <a:latin typeface="微软雅黑" panose="020B0503020204020204" pitchFamily="34" charset="-122"/>
+              <a:ea typeface="微软雅黑" panose="020B0503020204020204" pitchFamily="34" charset="-122"/>
+            </a:endParaRPr>
+          </a:p>
+        </p:txBody>
+      </p:sp>
+      <p:sp>
+        <p:nvSpPr>
+          <p:cNvPr id="6" name="TextBox 5">
+            <a:extLst>
+              <a:ext uri="{FF2B5EF4-FFF2-40B4-BE49-F238E27FC236}">
+                <a16:creationId xmlns:a16="http://schemas.microsoft.com/office/drawing/2014/main" id="{0E430AF4-3E18-1FF4-1FE8-79A9DD381B51}"/>
+              </a:ext>
+            </a:extLst>
+          </p:cNvPr>
+          <p:cNvSpPr txBox="1"/>
+          <p:nvPr/>
+        </p:nvSpPr>
+        <p:spPr>
+          <a:xfrm>
+            <a:off x="101481" y="6511806"/>
+            <a:ext cx="2087431" cy="369332"/>
+          </a:xfrm>
+          <a:prstGeom prst="rect">
+            <a:avLst/>
+          </a:prstGeom>
+          <a:noFill/>
+        </p:spPr>
+        <p:txBody>
+          <a:bodyPr wrap="none">
+            <a:spAutoFit/>
+          </a:bodyPr>
+          <a:lstStyle/>
+          <a:p>
+            <a:pPr>
+              <a:defRPr sz="1800">
+                <a:solidFill>
+                  <a:srgbClr val="1E1E1E"/>
+                </a:solidFill>
+                <a:latin typeface="KaiTi"/>
+              </a:defRPr>
+            </a:pPr>
+            <a:r>
+              <a:rPr dirty="0" err="1">
+                <a:solidFill>
+                  <a:schemeClr val="tx1">
+                    <a:lumMod val="50000"/>
+                    <a:lumOff val="50000"/>
+                  </a:schemeClr>
+                </a:solidFill>
+                <a:latin typeface="华文行楷" panose="02010800040101010101" pitchFamily="2" charset="-122"/>
+                <a:ea typeface="华文行楷" panose="02010800040101010101" pitchFamily="2" charset="-122"/>
+              </a:rPr>
+              <a:t>大工至善</a:t>
+            </a:r>
+            <a:r>
+              <a:rPr dirty="0">
+                <a:solidFill>
+                  <a:schemeClr val="tx1">
+                    <a:lumMod val="50000"/>
+                    <a:lumOff val="50000"/>
+                  </a:schemeClr>
+                </a:solidFill>
+                <a:latin typeface="华文行楷" panose="02010800040101010101" pitchFamily="2" charset="-122"/>
+                <a:ea typeface="华文行楷" panose="02010800040101010101" pitchFamily="2" charset="-122"/>
+              </a:rPr>
+              <a:t> </a:t>
+            </a:r>
+            <a:r>
+              <a:rPr dirty="0" err="1">
+                <a:solidFill>
+                  <a:schemeClr val="tx1">
+                    <a:lumMod val="50000"/>
+                    <a:lumOff val="50000"/>
+                  </a:schemeClr>
+                </a:solidFill>
+                <a:latin typeface="华文行楷" panose="02010800040101010101" pitchFamily="2" charset="-122"/>
+                <a:ea typeface="华文行楷" panose="02010800040101010101" pitchFamily="2" charset="-122"/>
+              </a:rPr>
+              <a:t>大学至真</a:t>
+            </a:r>
+            <a:endParaRPr dirty="0">
+              <a:solidFill>
+                <a:schemeClr val="tx1">
+                  <a:lumMod val="50000"/>
+                  <a:lumOff val="50000"/>
+                </a:schemeClr>
+              </a:solidFill>
+              <a:latin typeface="华文行楷" panose="02010800040101010101" pitchFamily="2" charset="-122"/>
+              <a:ea typeface="华文行楷" panose="02010800040101010101" pitchFamily="2" charset="-122"/>
+            </a:endParaRPr>
+          </a:p>
+        </p:txBody>
+      </p:sp>
+      <p:sp>
+        <p:nvSpPr>
+          <p:cNvPr id="8" name="灯片编号占位符 7">
+            <a:extLst>
+              <a:ext uri="{FF2B5EF4-FFF2-40B4-BE49-F238E27FC236}">
+                <a16:creationId xmlns:a16="http://schemas.microsoft.com/office/drawing/2014/main" id="{DD61A4E1-A578-CAB9-3102-854F81535B1F}"/>
+              </a:ext>
+            </a:extLst>
+          </p:cNvPr>
+          <p:cNvSpPr>
+            <a:spLocks noGrp="1"/>
+          </p:cNvSpPr>
+          <p:nvPr>
+            <p:ph type="sldNum" sz="quarter" idx="12"/>
+          </p:nvPr>
+        </p:nvSpPr>
+        <p:spPr>
+          <a:xfrm>
+            <a:off x="11423769" y="6492875"/>
+            <a:ext cx="482481" cy="365125"/>
+          </a:xfrm>
+        </p:spPr>
+        <p:txBody>
+          <a:bodyPr/>
+          <a:lstStyle/>
+          <a:p>
+            <a:fld id="{C1FF6DA9-008F-8B48-92A6-B652298478BF}" type="slidenum">
+              <a:rPr lang="en-US" sz="1400" smtClean="0">
+                <a:latin typeface="Times New Roman" panose="02020603050405020304" pitchFamily="18" charset="0"/>
+                <a:cs typeface="Times New Roman" panose="02020603050405020304" pitchFamily="18" charset="0"/>
+              </a:rPr>
+              <a:t>8</a:t>
+            </a:fld>
+            <a:endParaRPr lang="en-US" sz="1400" dirty="0">
+              <a:latin typeface="Times New Roman" panose="02020603050405020304" pitchFamily="18" charset="0"/>
+              <a:cs typeface="Times New Roman" panose="02020603050405020304" pitchFamily="18" charset="0"/>
+            </a:endParaRPr>
+          </a:p>
+        </p:txBody>
+      </p:sp>
+      <p:sp>
+        <p:nvSpPr>
+          <p:cNvPr id="12" name="文本框 11">
+            <a:extLst>
+              <a:ext uri="{FF2B5EF4-FFF2-40B4-BE49-F238E27FC236}">
+                <a16:creationId xmlns:a16="http://schemas.microsoft.com/office/drawing/2014/main" id="{5D56BA18-1F82-188B-B971-038A51D43426}"/>
+              </a:ext>
+            </a:extLst>
+          </p:cNvPr>
+          <p:cNvSpPr txBox="1"/>
+          <p:nvPr/>
+        </p:nvSpPr>
+        <p:spPr>
+          <a:xfrm>
+            <a:off x="298569" y="1063020"/>
+            <a:ext cx="6097424" cy="400110"/>
+          </a:xfrm>
+          <a:prstGeom prst="rect">
+            <a:avLst/>
+          </a:prstGeom>
+          <a:noFill/>
+        </p:spPr>
+        <p:txBody>
+          <a:bodyPr wrap="square">
+            <a:spAutoFit/>
+          </a:bodyPr>
+          <a:lstStyle/>
+          <a:p>
+            <a:r>
+              <a:rPr lang="zh-CN" altLang="en-US" sz="2000" b="1" i="0" dirty="0">
+                <a:solidFill>
+                  <a:srgbClr val="000000"/>
+                </a:solidFill>
+                <a:effectLst/>
+                <a:latin typeface="微软雅黑" panose="020B0503020204020204" pitchFamily="34" charset="-122"/>
+                <a:ea typeface="微软雅黑" panose="020B0503020204020204" pitchFamily="34" charset="-122"/>
+              </a:rPr>
+              <a:t>➢ 小标题</a:t>
+            </a:r>
+            <a:endParaRPr lang="zh-CN" altLang="en-US" sz="2000" dirty="0">
+              <a:latin typeface="微软雅黑" panose="020B0503020204020204" pitchFamily="34" charset="-122"/>
+              <a:ea typeface="微软雅黑" panose="020B0503020204020204" pitchFamily="34" charset="-122"/>
+            </a:endParaRPr>
+          </a:p>
+        </p:txBody>
+      </p:sp>
+      <p:sp>
+        <p:nvSpPr>
+          <p:cNvPr id="16" name="文本框 15">
+            <a:extLst>
+              <a:ext uri="{FF2B5EF4-FFF2-40B4-BE49-F238E27FC236}">
+                <a16:creationId xmlns:a16="http://schemas.microsoft.com/office/drawing/2014/main" id="{599A948A-7E0A-7CCC-5565-58180F1FAF4C}"/>
+              </a:ext>
+            </a:extLst>
+          </p:cNvPr>
+          <p:cNvSpPr txBox="1"/>
+          <p:nvPr/>
+        </p:nvSpPr>
+        <p:spPr>
+          <a:xfrm>
+            <a:off x="298569" y="163534"/>
+            <a:ext cx="6097424" cy="584775"/>
+          </a:xfrm>
+          <a:prstGeom prst="rect">
+            <a:avLst/>
+          </a:prstGeom>
+          <a:noFill/>
+        </p:spPr>
+        <p:txBody>
+          <a:bodyPr wrap="square">
+            <a:spAutoFit/>
+          </a:bodyPr>
+          <a:lstStyle/>
+          <a:p>
+            <a:pPr algn="l">
+              <a:buNone/>
+            </a:pPr>
+            <a:r>
+              <a:rPr lang="en-US" altLang="zh-CN" sz="3200" b="1" i="0" dirty="0">
+                <a:solidFill>
+                  <a:srgbClr val="4472C4"/>
+                </a:solidFill>
+                <a:effectLst/>
+                <a:latin typeface="微软雅黑" panose="020B0503020204020204" pitchFamily="34" charset="-122"/>
+                <a:ea typeface="微软雅黑" panose="020B0503020204020204" pitchFamily="34" charset="-122"/>
+              </a:rPr>
+              <a:t>03 </a:t>
+            </a:r>
+            <a:r>
+              <a:rPr lang="zh-CN" altLang="en-US" sz="3200" b="1" i="0" dirty="0">
+                <a:solidFill>
+                  <a:srgbClr val="4472C4"/>
+                </a:solidFill>
+                <a:effectLst/>
+                <a:latin typeface="微软雅黑" panose="020B0503020204020204" pitchFamily="34" charset="-122"/>
+                <a:ea typeface="微软雅黑" panose="020B0503020204020204" pitchFamily="34" charset="-122"/>
+              </a:rPr>
+              <a:t>模板</a:t>
+            </a:r>
+            <a:r>
+              <a:rPr lang="en-US" altLang="zh-CN" sz="3200" b="1" dirty="0">
+                <a:solidFill>
+                  <a:srgbClr val="4472C4"/>
+                </a:solidFill>
+                <a:latin typeface="微软雅黑" panose="020B0503020204020204" pitchFamily="34" charset="-122"/>
+                <a:ea typeface="微软雅黑" panose="020B0503020204020204" pitchFamily="34" charset="-122"/>
+              </a:rPr>
+              <a:t>5</a:t>
+            </a:r>
+            <a:endParaRPr lang="zh-CN" altLang="en-US" sz="3200" b="1" i="0" dirty="0">
+              <a:solidFill>
+                <a:srgbClr val="4472C4"/>
+              </a:solidFill>
+              <a:effectLst/>
+              <a:latin typeface="微软雅黑" panose="020B0503020204020204" pitchFamily="34" charset="-122"/>
+              <a:ea typeface="微软雅黑" panose="020B0503020204020204" pitchFamily="34" charset="-122"/>
+            </a:endParaRPr>
+          </a:p>
+        </p:txBody>
+      </p:sp>
+      <p:sp>
+        <p:nvSpPr>
+          <p:cNvPr id="18" name="矩形 17">
+            <a:extLst>
+              <a:ext uri="{FF2B5EF4-FFF2-40B4-BE49-F238E27FC236}">
+                <a16:creationId xmlns:a16="http://schemas.microsoft.com/office/drawing/2014/main" id="{AEE27A01-3230-85B5-A330-1E6787DA6FE3}"/>
+              </a:ext>
+            </a:extLst>
+          </p:cNvPr>
+          <p:cNvSpPr/>
+          <p:nvPr/>
+        </p:nvSpPr>
+        <p:spPr>
+          <a:xfrm>
+            <a:off x="6931347" y="1280663"/>
+            <a:ext cx="4733662" cy="4720087"/>
+          </a:xfrm>
+          <a:prstGeom prst="rect">
+            <a:avLst/>
+          </a:prstGeom>
+          <a:solidFill>
+            <a:schemeClr val="accent1">
+              <a:lumMod val="60000"/>
+              <a:lumOff val="40000"/>
+            </a:schemeClr>
+          </a:solidFill>
+        </p:spPr>
+        <p:style>
+          <a:lnRef idx="1">
+            <a:schemeClr val="accent1"/>
+          </a:lnRef>
+          <a:fillRef idx="3">
+            <a:schemeClr val="accent1"/>
+          </a:fillRef>
+          <a:effectRef idx="2">
+            <a:schemeClr val="accent1"/>
+          </a:effectRef>
+          <a:fontRef idx="minor">
+            <a:schemeClr val="lt1"/>
+          </a:fontRef>
+        </p:style>
+        <p:txBody>
+          <a:bodyPr rtlCol="0" anchor="ctr"/>
+          <a:lstStyle/>
+          <a:p>
+            <a:pPr algn="ctr"/>
+            <a:r>
+              <a:rPr lang="zh-CN" altLang="en-US" dirty="0"/>
+              <a:t>图片</a:t>
+            </a:r>
+            <a:r>
+              <a:rPr lang="en-US" altLang="zh-CN" dirty="0"/>
+              <a:t>1</a:t>
+            </a:r>
+            <a:endParaRPr lang="zh-CN" altLang="en-US" dirty="0"/>
+          </a:p>
+        </p:txBody>
+      </p:sp>
+      <p:sp>
+        <p:nvSpPr>
+          <p:cNvPr id="7" name="文本框 6">
+            <a:extLst>
+              <a:ext uri="{FF2B5EF4-FFF2-40B4-BE49-F238E27FC236}">
+                <a16:creationId xmlns:a16="http://schemas.microsoft.com/office/drawing/2014/main" id="{6B5D4241-8E34-675A-F3D0-305D8ED707D3}"/>
+              </a:ext>
+            </a:extLst>
+          </p:cNvPr>
+          <p:cNvSpPr txBox="1"/>
+          <p:nvPr/>
+        </p:nvSpPr>
+        <p:spPr>
+          <a:xfrm>
+            <a:off x="499669" y="1742197"/>
+            <a:ext cx="5473291" cy="4016484"/>
+          </a:xfrm>
+          <a:prstGeom prst="rect">
+            <a:avLst/>
+          </a:prstGeom>
+          <a:solidFill>
+            <a:schemeClr val="accent1">
+              <a:lumMod val="20000"/>
+              <a:lumOff val="80000"/>
+            </a:schemeClr>
+          </a:solidFill>
+        </p:spPr>
+        <p:txBody>
+          <a:bodyPr wrap="square">
+            <a:spAutoFit/>
+          </a:bodyPr>
+          <a:lstStyle/>
+          <a:p>
+            <a:pPr marL="285750" indent="-285750">
+              <a:spcBef>
+                <a:spcPts val="375"/>
+              </a:spcBef>
+              <a:spcAft>
+                <a:spcPts val="600"/>
+              </a:spcAft>
+              <a:buFont typeface="Wingdings" panose="05000000000000000000" pitchFamily="2" charset="2"/>
+              <a:buChar char="n"/>
+            </a:pPr>
+            <a:r>
+              <a:rPr lang="zh-CN" altLang="en-US" dirty="0">
+                <a:solidFill>
+                  <a:srgbClr val="000000"/>
+                </a:solidFill>
+                <a:latin typeface="微软雅黑" panose="020B0503020204020204" pitchFamily="34" charset="-122"/>
+                <a:ea typeface="微软雅黑" panose="020B0503020204020204" pitchFamily="34" charset="-122"/>
+              </a:rPr>
+              <a:t>描述性文字</a:t>
+            </a:r>
+            <a:endParaRPr lang="en-US" altLang="zh-CN" dirty="0">
+              <a:solidFill>
+                <a:srgbClr val="000000"/>
+              </a:solidFill>
+              <a:latin typeface="微软雅黑" panose="020B0503020204020204" pitchFamily="34" charset="-122"/>
+              <a:ea typeface="微软雅黑" panose="020B0503020204020204" pitchFamily="34" charset="-122"/>
+            </a:endParaRPr>
+          </a:p>
+          <a:p>
+            <a:pPr marL="285750" indent="-285750">
+              <a:spcBef>
+                <a:spcPts val="375"/>
+              </a:spcBef>
+              <a:spcAft>
+                <a:spcPts val="600"/>
+              </a:spcAft>
+              <a:buFont typeface="Wingdings" panose="05000000000000000000" pitchFamily="2" charset="2"/>
+              <a:buChar char="n"/>
+            </a:pPr>
+            <a:endParaRPr lang="en-US" altLang="zh-CN" dirty="0">
+              <a:solidFill>
+                <a:srgbClr val="000000"/>
+              </a:solidFill>
+              <a:latin typeface="微软雅黑" panose="020B0503020204020204" pitchFamily="34" charset="-122"/>
+              <a:ea typeface="微软雅黑" panose="020B0503020204020204" pitchFamily="34" charset="-122"/>
+            </a:endParaRPr>
+          </a:p>
+          <a:p>
+            <a:pPr marL="285750" indent="-285750">
+              <a:spcBef>
+                <a:spcPts val="375"/>
+              </a:spcBef>
+              <a:spcAft>
+                <a:spcPts val="600"/>
+              </a:spcAft>
+              <a:buFont typeface="Wingdings" panose="05000000000000000000" pitchFamily="2" charset="2"/>
+              <a:buChar char="n"/>
+            </a:pPr>
+            <a:endParaRPr lang="en-US" altLang="zh-CN" dirty="0">
+              <a:solidFill>
+                <a:srgbClr val="000000"/>
+              </a:solidFill>
+              <a:latin typeface="微软雅黑" panose="020B0503020204020204" pitchFamily="34" charset="-122"/>
+              <a:ea typeface="微软雅黑" panose="020B0503020204020204" pitchFamily="34" charset="-122"/>
+            </a:endParaRPr>
+          </a:p>
+          <a:p>
+            <a:pPr marL="285750" indent="-285750">
+              <a:spcBef>
+                <a:spcPts val="375"/>
+              </a:spcBef>
+              <a:spcAft>
+                <a:spcPts val="600"/>
+              </a:spcAft>
+              <a:buFont typeface="Wingdings" panose="05000000000000000000" pitchFamily="2" charset="2"/>
+              <a:buChar char="n"/>
+            </a:pPr>
+            <a:endParaRPr lang="en-US" altLang="zh-CN" dirty="0">
+              <a:solidFill>
+                <a:srgbClr val="000000"/>
+              </a:solidFill>
+              <a:latin typeface="微软雅黑" panose="020B0503020204020204" pitchFamily="34" charset="-122"/>
+              <a:ea typeface="微软雅黑" panose="020B0503020204020204" pitchFamily="34" charset="-122"/>
+            </a:endParaRPr>
+          </a:p>
+          <a:p>
+            <a:pPr marL="285750" indent="-285750">
+              <a:spcBef>
+                <a:spcPts val="375"/>
+              </a:spcBef>
+              <a:spcAft>
+                <a:spcPts val="600"/>
+              </a:spcAft>
+              <a:buFont typeface="Wingdings" panose="05000000000000000000" pitchFamily="2" charset="2"/>
+              <a:buChar char="n"/>
+            </a:pPr>
+            <a:endParaRPr lang="en-US" altLang="zh-CN" dirty="0">
+              <a:solidFill>
+                <a:srgbClr val="000000"/>
+              </a:solidFill>
+              <a:latin typeface="微软雅黑" panose="020B0503020204020204" pitchFamily="34" charset="-122"/>
+              <a:ea typeface="微软雅黑" panose="020B0503020204020204" pitchFamily="34" charset="-122"/>
+            </a:endParaRPr>
+          </a:p>
+          <a:p>
+            <a:pPr marL="285750" indent="-285750">
+              <a:spcBef>
+                <a:spcPts val="375"/>
+              </a:spcBef>
+              <a:spcAft>
+                <a:spcPts val="600"/>
+              </a:spcAft>
+              <a:buFont typeface="Wingdings" panose="05000000000000000000" pitchFamily="2" charset="2"/>
+              <a:buChar char="n"/>
+            </a:pPr>
+            <a:endParaRPr lang="en-US" altLang="zh-CN" dirty="0">
+              <a:solidFill>
+                <a:srgbClr val="000000"/>
+              </a:solidFill>
+              <a:latin typeface="微软雅黑" panose="020B0503020204020204" pitchFamily="34" charset="-122"/>
+              <a:ea typeface="微软雅黑" panose="020B0503020204020204" pitchFamily="34" charset="-122"/>
+            </a:endParaRPr>
+          </a:p>
+          <a:p>
+            <a:pPr marL="285750" indent="-285750">
+              <a:spcBef>
+                <a:spcPts val="375"/>
+              </a:spcBef>
+              <a:spcAft>
+                <a:spcPts val="600"/>
+              </a:spcAft>
+              <a:buFont typeface="Wingdings" panose="05000000000000000000" pitchFamily="2" charset="2"/>
+              <a:buChar char="n"/>
+            </a:pPr>
+            <a:endParaRPr lang="en-US" altLang="zh-CN" dirty="0">
+              <a:solidFill>
+                <a:srgbClr val="000000"/>
+              </a:solidFill>
+              <a:latin typeface="微软雅黑" panose="020B0503020204020204" pitchFamily="34" charset="-122"/>
+              <a:ea typeface="微软雅黑" panose="020B0503020204020204" pitchFamily="34" charset="-122"/>
+            </a:endParaRPr>
+          </a:p>
+          <a:p>
+            <a:pPr marL="285750" indent="-285750">
+              <a:spcBef>
+                <a:spcPts val="375"/>
+              </a:spcBef>
+              <a:spcAft>
+                <a:spcPts val="600"/>
+              </a:spcAft>
+              <a:buFont typeface="Wingdings" panose="05000000000000000000" pitchFamily="2" charset="2"/>
+              <a:buChar char="n"/>
+            </a:pPr>
+            <a:endParaRPr lang="en-US" altLang="zh-CN" dirty="0">
+              <a:solidFill>
+                <a:srgbClr val="000000"/>
+              </a:solidFill>
+              <a:latin typeface="微软雅黑" panose="020B0503020204020204" pitchFamily="34" charset="-122"/>
+              <a:ea typeface="微软雅黑" panose="020B0503020204020204" pitchFamily="34" charset="-122"/>
+            </a:endParaRPr>
+          </a:p>
+          <a:p>
+            <a:pPr marL="285750" indent="-285750">
+              <a:spcBef>
+                <a:spcPts val="375"/>
+              </a:spcBef>
+              <a:spcAft>
+                <a:spcPts val="600"/>
+              </a:spcAft>
+              <a:buFont typeface="Wingdings" panose="05000000000000000000" pitchFamily="2" charset="2"/>
+              <a:buChar char="n"/>
+            </a:pPr>
+            <a:endParaRPr lang="en-US" altLang="zh-CN" dirty="0">
+              <a:solidFill>
+                <a:srgbClr val="000000"/>
+              </a:solidFill>
+              <a:latin typeface="微软雅黑" panose="020B0503020204020204" pitchFamily="34" charset="-122"/>
+              <a:ea typeface="微软雅黑" panose="020B0503020204020204" pitchFamily="34" charset="-122"/>
+            </a:endParaRPr>
+          </a:p>
+          <a:p>
+            <a:pPr marL="285750" indent="-285750">
+              <a:spcBef>
+                <a:spcPts val="375"/>
+              </a:spcBef>
+              <a:spcAft>
+                <a:spcPts val="600"/>
+              </a:spcAft>
+              <a:buFont typeface="Wingdings" panose="05000000000000000000" pitchFamily="2" charset="2"/>
+              <a:buChar char="n"/>
+            </a:pPr>
+            <a:endParaRPr lang="en-US" altLang="zh-CN" dirty="0">
+              <a:solidFill>
+                <a:srgbClr val="000000"/>
+              </a:solidFill>
+              <a:latin typeface="微软雅黑" panose="020B0503020204020204" pitchFamily="34" charset="-122"/>
+              <a:ea typeface="微软雅黑" panose="020B0503020204020204" pitchFamily="34" charset="-122"/>
+            </a:endParaRPr>
+          </a:p>
+        </p:txBody>
+      </p:sp>
+    </p:spTree>
+    <p:extLst>
+      <p:ext uri="{BB962C8B-B14F-4D97-AF65-F5344CB8AC3E}">
+        <p14:creationId xmlns:p14="http://schemas.microsoft.com/office/powerpoint/2010/main" val="1239588936"/>
+      </p:ext>
+    </p:extLst>
+  </p:cSld>
+  <p:clrMapOvr>
+    <a:masterClrMapping/>
+  </p:clrMapOvr>
+</p:sld>
+</file>
+
+<file path=ppt/slides/slide9.xml><?xml version="1.0" encoding="utf-8"?>
+<p:sld xmlns:a="http://schemas.openxmlformats.org/drawingml/2006/main" xmlns:r="http://schemas.openxmlformats.org/officeDocument/2006/relationships" xmlns:p="http://schemas.openxmlformats.org/presentationml/2006/main">
+  <p:cSld>
+    <p:spTree>
+      <p:nvGrpSpPr>
+        <p:cNvPr id="1" name="">
+          <a:extLst>
+            <a:ext uri="{FF2B5EF4-FFF2-40B4-BE49-F238E27FC236}">
+              <a16:creationId xmlns:a16="http://schemas.microsoft.com/office/drawing/2014/main" id="{C884A71F-F73C-80FE-DAF2-2098CF73C07A}"/>
+            </a:ext>
+          </a:extLst>
+        </p:cNvPr>
+        <p:cNvGrpSpPr/>
+        <p:nvPr/>
+      </p:nvGrpSpPr>
+      <p:grpSpPr>
+        <a:xfrm>
+          <a:off x="0" y="0"/>
+          <a:ext cx="0" cy="0"/>
+          <a:chOff x="0" y="0"/>
+          <a:chExt cx="0" cy="0"/>
+        </a:xfrm>
+      </p:grpSpPr>
+      <p:sp>
+        <p:nvSpPr>
+          <p:cNvPr id="2" name="Rectangle 1">
+            <a:extLst>
+              <a:ext uri="{FF2B5EF4-FFF2-40B4-BE49-F238E27FC236}">
+                <a16:creationId xmlns:a16="http://schemas.microsoft.com/office/drawing/2014/main" id="{3846C102-0EF2-09FD-A355-844D41FF2138}"/>
+              </a:ext>
+            </a:extLst>
+          </p:cNvPr>
+          <p:cNvSpPr/>
+          <p:nvPr/>
+        </p:nvSpPr>
+        <p:spPr>
+          <a:xfrm>
+            <a:off x="0" y="857250"/>
+            <a:ext cx="7905750" cy="76200"/>
+          </a:xfrm>
+          <a:prstGeom prst="rect">
+            <a:avLst/>
+          </a:prstGeom>
+          <a:solidFill>
+            <a:srgbClr val="5B8BC6"/>
+          </a:solidFill>
+          <a:ln>
+            <a:noFill/>
+          </a:ln>
+          <a:effectLst/>
+        </p:spPr>
+        <p:style>
+          <a:lnRef idx="1">
+            <a:schemeClr val="accent1"/>
+          </a:lnRef>
+          <a:fillRef idx="3">
+            <a:schemeClr val="accent1"/>
+          </a:fillRef>
+          <a:effectRef idx="2">
+            <a:schemeClr val="accent1"/>
+          </a:effectRef>
+          <a:fontRef idx="minor">
+            <a:schemeClr val="lt1"/>
+          </a:fontRef>
+        </p:style>
+        <p:txBody>
+          <a:bodyPr rtlCol="0" anchor="ctr"/>
+          <a:lstStyle/>
+          <a:p>
+            <a:pPr algn="ctr"/>
+            <a:endParaRPr dirty="0">
+              <a:latin typeface="微软雅黑" panose="020B0503020204020204" pitchFamily="34" charset="-122"/>
+              <a:ea typeface="微软雅黑" panose="020B0503020204020204" pitchFamily="34" charset="-122"/>
+            </a:endParaRPr>
+          </a:p>
+        </p:txBody>
+      </p:sp>
+      <p:sp>
+        <p:nvSpPr>
+          <p:cNvPr id="3" name="Rectangle 2">
+            <a:extLst>
+              <a:ext uri="{FF2B5EF4-FFF2-40B4-BE49-F238E27FC236}">
+                <a16:creationId xmlns:a16="http://schemas.microsoft.com/office/drawing/2014/main" id="{9C78F5C4-8ED3-FE82-D846-E6A1A0318127}"/>
+              </a:ext>
+            </a:extLst>
+          </p:cNvPr>
+          <p:cNvSpPr/>
+          <p:nvPr/>
+        </p:nvSpPr>
+        <p:spPr>
+          <a:xfrm>
+            <a:off x="8096250" y="885825"/>
+            <a:ext cx="4095750" cy="28575"/>
+          </a:xfrm>
+          <a:prstGeom prst="rect">
+            <a:avLst/>
+          </a:prstGeom>
+          <a:solidFill>
+            <a:srgbClr val="9CC2E5"/>
+          </a:solidFill>
+          <a:ln>
+            <a:noFill/>
+          </a:ln>
+          <a:effectLst/>
+        </p:spPr>
+        <p:style>
+          <a:lnRef idx="1">
+            <a:schemeClr val="accent1"/>
+          </a:lnRef>
+          <a:fillRef idx="3">
+            <a:schemeClr val="accent1"/>
+          </a:fillRef>
+          <a:effectRef idx="2">
+            <a:schemeClr val="accent1"/>
+          </a:effectRef>
+          <a:fontRef idx="minor">
+            <a:schemeClr val="lt1"/>
+          </a:fontRef>
+        </p:style>
+        <p:txBody>
+          <a:bodyPr rtlCol="0" anchor="ctr"/>
+          <a:lstStyle/>
+          <a:p>
+            <a:pPr algn="ctr"/>
+            <a:endParaRPr dirty="0">
+              <a:latin typeface="微软雅黑" panose="020B0503020204020204" pitchFamily="34" charset="-122"/>
+              <a:ea typeface="微软雅黑" panose="020B0503020204020204" pitchFamily="34" charset="-122"/>
+            </a:endParaRPr>
+          </a:p>
+        </p:txBody>
+      </p:sp>
+      <p:pic>
+        <p:nvPicPr>
+          <p:cNvPr id="4" name="Picture 3" descr="heu_logo_color.png">
+            <a:extLst>
+              <a:ext uri="{FF2B5EF4-FFF2-40B4-BE49-F238E27FC236}">
+                <a16:creationId xmlns:a16="http://schemas.microsoft.com/office/drawing/2014/main" id="{100F8301-8158-8B30-CD98-A44817D6C0DC}"/>
+              </a:ext>
+            </a:extLst>
+          </p:cNvPr>
+          <p:cNvPicPr>
+            <a:picLocks noChangeAspect="1"/>
+          </p:cNvPicPr>
+          <p:nvPr/>
+        </p:nvPicPr>
+        <p:blipFill>
+          <a:blip r:embed="rId2"/>
+          <a:stretch>
+            <a:fillRect/>
+          </a:stretch>
+        </p:blipFill>
+        <p:spPr>
+          <a:xfrm>
+            <a:off x="9577062" y="158750"/>
+            <a:ext cx="2329188" cy="619125"/>
+          </a:xfrm>
+          <a:prstGeom prst="rect">
+            <a:avLst/>
+          </a:prstGeom>
+        </p:spPr>
+      </p:pic>
+      <p:sp>
+        <p:nvSpPr>
+          <p:cNvPr id="5" name="Rectangle 4">
+            <a:extLst>
+              <a:ext uri="{FF2B5EF4-FFF2-40B4-BE49-F238E27FC236}">
+                <a16:creationId xmlns:a16="http://schemas.microsoft.com/office/drawing/2014/main" id="{D595CC08-A336-816E-8D49-F45C8CE8368C}"/>
+              </a:ext>
+            </a:extLst>
+          </p:cNvPr>
+          <p:cNvSpPr/>
+          <p:nvPr/>
+        </p:nvSpPr>
+        <p:spPr>
+          <a:xfrm>
+            <a:off x="0" y="6473502"/>
+            <a:ext cx="12192000" cy="19050"/>
+          </a:xfrm>
+          <a:prstGeom prst="rect">
+            <a:avLst/>
+          </a:prstGeom>
+          <a:solidFill>
+            <a:srgbClr val="3E649A"/>
+          </a:solidFill>
+          <a:ln>
+            <a:noFill/>
+          </a:ln>
+          <a:effectLst/>
+        </p:spPr>
+        <p:style>
+          <a:lnRef idx="1">
+            <a:schemeClr val="accent1"/>
+          </a:lnRef>
+          <a:fillRef idx="3">
+            <a:schemeClr val="accent1"/>
+          </a:fillRef>
+          <a:effectRef idx="2">
+            <a:schemeClr val="accent1"/>
+          </a:effectRef>
+          <a:fontRef idx="minor">
+            <a:schemeClr val="lt1"/>
+          </a:fontRef>
+        </p:style>
+        <p:txBody>
+          <a:bodyPr rtlCol="0" anchor="ctr"/>
+          <a:lstStyle/>
+          <a:p>
+            <a:pPr algn="ctr"/>
+            <a:endParaRPr dirty="0">
+              <a:latin typeface="微软雅黑" panose="020B0503020204020204" pitchFamily="34" charset="-122"/>
+              <a:ea typeface="微软雅黑" panose="020B0503020204020204" pitchFamily="34" charset="-122"/>
+            </a:endParaRPr>
+          </a:p>
+        </p:txBody>
+      </p:sp>
+      <p:sp>
+        <p:nvSpPr>
+          <p:cNvPr id="6" name="TextBox 5">
+            <a:extLst>
+              <a:ext uri="{FF2B5EF4-FFF2-40B4-BE49-F238E27FC236}">
+                <a16:creationId xmlns:a16="http://schemas.microsoft.com/office/drawing/2014/main" id="{C847C4C2-346A-73CE-583B-8E56AFA1A7AE}"/>
+              </a:ext>
+            </a:extLst>
+          </p:cNvPr>
+          <p:cNvSpPr txBox="1"/>
+          <p:nvPr/>
+        </p:nvSpPr>
+        <p:spPr>
+          <a:xfrm>
+            <a:off x="101481" y="6511806"/>
+            <a:ext cx="2087431" cy="369332"/>
+          </a:xfrm>
+          <a:prstGeom prst="rect">
+            <a:avLst/>
+          </a:prstGeom>
+          <a:noFill/>
+        </p:spPr>
+        <p:txBody>
+          <a:bodyPr wrap="none">
+            <a:spAutoFit/>
+          </a:bodyPr>
+          <a:lstStyle/>
+          <a:p>
+            <a:pPr>
+              <a:defRPr sz="1800">
+                <a:solidFill>
+                  <a:srgbClr val="1E1E1E"/>
+                </a:solidFill>
+                <a:latin typeface="KaiTi"/>
+              </a:defRPr>
+            </a:pPr>
+            <a:r>
+              <a:rPr dirty="0" err="1">
+                <a:solidFill>
+                  <a:schemeClr val="tx1">
+                    <a:lumMod val="50000"/>
+                    <a:lumOff val="50000"/>
+                  </a:schemeClr>
+                </a:solidFill>
+                <a:latin typeface="华文行楷" panose="02010800040101010101" pitchFamily="2" charset="-122"/>
+                <a:ea typeface="华文行楷" panose="02010800040101010101" pitchFamily="2" charset="-122"/>
+              </a:rPr>
+              <a:t>大工至善</a:t>
+            </a:r>
+            <a:r>
+              <a:rPr dirty="0">
+                <a:solidFill>
+                  <a:schemeClr val="tx1">
+                    <a:lumMod val="50000"/>
+                    <a:lumOff val="50000"/>
+                  </a:schemeClr>
+                </a:solidFill>
+                <a:latin typeface="华文行楷" panose="02010800040101010101" pitchFamily="2" charset="-122"/>
+                <a:ea typeface="华文行楷" panose="02010800040101010101" pitchFamily="2" charset="-122"/>
+              </a:rPr>
+              <a:t> </a:t>
+            </a:r>
+            <a:r>
+              <a:rPr dirty="0" err="1">
+                <a:solidFill>
+                  <a:schemeClr val="tx1">
+                    <a:lumMod val="50000"/>
+                    <a:lumOff val="50000"/>
+                  </a:schemeClr>
+                </a:solidFill>
+                <a:latin typeface="华文行楷" panose="02010800040101010101" pitchFamily="2" charset="-122"/>
+                <a:ea typeface="华文行楷" panose="02010800040101010101" pitchFamily="2" charset="-122"/>
+              </a:rPr>
+              <a:t>大学至真</a:t>
+            </a:r>
+            <a:endParaRPr dirty="0">
+              <a:solidFill>
+                <a:schemeClr val="tx1">
+                  <a:lumMod val="50000"/>
+                  <a:lumOff val="50000"/>
+                </a:schemeClr>
+              </a:solidFill>
+              <a:latin typeface="华文行楷" panose="02010800040101010101" pitchFamily="2" charset="-122"/>
+              <a:ea typeface="华文行楷" panose="02010800040101010101" pitchFamily="2" charset="-122"/>
+            </a:endParaRPr>
+          </a:p>
+        </p:txBody>
+      </p:sp>
+      <p:sp>
+        <p:nvSpPr>
+          <p:cNvPr id="8" name="灯片编号占位符 7">
+            <a:extLst>
+              <a:ext uri="{FF2B5EF4-FFF2-40B4-BE49-F238E27FC236}">
+                <a16:creationId xmlns:a16="http://schemas.microsoft.com/office/drawing/2014/main" id="{83B2D73D-B763-F65D-B0B4-42A08195EA2A}"/>
+              </a:ext>
+            </a:extLst>
+          </p:cNvPr>
+          <p:cNvSpPr>
+            <a:spLocks noGrp="1"/>
+          </p:cNvSpPr>
+          <p:nvPr>
+            <p:ph type="sldNum" sz="quarter" idx="12"/>
+          </p:nvPr>
+        </p:nvSpPr>
+        <p:spPr>
+          <a:xfrm>
+            <a:off x="11423769" y="6492875"/>
+            <a:ext cx="482481" cy="365125"/>
+          </a:xfrm>
+        </p:spPr>
+        <p:txBody>
+          <a:bodyPr/>
+          <a:lstStyle/>
+          <a:p>
+            <a:fld id="{C1FF6DA9-008F-8B48-92A6-B652298478BF}" type="slidenum">
+              <a:rPr lang="en-US" sz="1400" smtClean="0">
+                <a:latin typeface="Times New Roman" panose="02020603050405020304" pitchFamily="18" charset="0"/>
+                <a:cs typeface="Times New Roman" panose="02020603050405020304" pitchFamily="18" charset="0"/>
+              </a:rPr>
+              <a:t>9</a:t>
+            </a:fld>
+            <a:endParaRPr lang="en-US" sz="1400" dirty="0">
+              <a:latin typeface="Times New Roman" panose="02020603050405020304" pitchFamily="18" charset="0"/>
+              <a:cs typeface="Times New Roman" panose="02020603050405020304" pitchFamily="18" charset="0"/>
+            </a:endParaRPr>
+          </a:p>
+        </p:txBody>
+      </p:sp>
+      <p:sp>
+        <p:nvSpPr>
+          <p:cNvPr id="12" name="文本框 11">
+            <a:extLst>
+              <a:ext uri="{FF2B5EF4-FFF2-40B4-BE49-F238E27FC236}">
+                <a16:creationId xmlns:a16="http://schemas.microsoft.com/office/drawing/2014/main" id="{9B6B82AB-7B9D-BBA9-E28C-837257E2E347}"/>
+              </a:ext>
+            </a:extLst>
+          </p:cNvPr>
+          <p:cNvSpPr txBox="1"/>
+          <p:nvPr/>
+        </p:nvSpPr>
+        <p:spPr>
+          <a:xfrm>
+            <a:off x="298569" y="1063020"/>
+            <a:ext cx="6097424" cy="400110"/>
+          </a:xfrm>
+          <a:prstGeom prst="rect">
+            <a:avLst/>
+          </a:prstGeom>
+          <a:noFill/>
+        </p:spPr>
+        <p:txBody>
+          <a:bodyPr wrap="square">
+            <a:spAutoFit/>
+          </a:bodyPr>
+          <a:lstStyle/>
+          <a:p>
+            <a:r>
+              <a:rPr lang="zh-CN" altLang="en-US" sz="2000" b="1" i="0" dirty="0">
+                <a:solidFill>
+                  <a:srgbClr val="000000"/>
+                </a:solidFill>
+                <a:effectLst/>
+                <a:latin typeface="微软雅黑" panose="020B0503020204020204" pitchFamily="34" charset="-122"/>
+                <a:ea typeface="微软雅黑" panose="020B0503020204020204" pitchFamily="34" charset="-122"/>
+              </a:rPr>
+              <a:t>➢ 小标题</a:t>
+            </a:r>
+            <a:endParaRPr lang="zh-CN" altLang="en-US" sz="2000" dirty="0">
+              <a:latin typeface="微软雅黑" panose="020B0503020204020204" pitchFamily="34" charset="-122"/>
+              <a:ea typeface="微软雅黑" panose="020B0503020204020204" pitchFamily="34" charset="-122"/>
+            </a:endParaRPr>
+          </a:p>
+        </p:txBody>
+      </p:sp>
+      <p:sp>
+        <p:nvSpPr>
+          <p:cNvPr id="16" name="文本框 15">
+            <a:extLst>
+              <a:ext uri="{FF2B5EF4-FFF2-40B4-BE49-F238E27FC236}">
+                <a16:creationId xmlns:a16="http://schemas.microsoft.com/office/drawing/2014/main" id="{9A50C9A6-CEEA-5AED-7001-716BF136BFA4}"/>
+              </a:ext>
+            </a:extLst>
+          </p:cNvPr>
+          <p:cNvSpPr txBox="1"/>
+          <p:nvPr/>
+        </p:nvSpPr>
+        <p:spPr>
+          <a:xfrm>
+            <a:off x="298569" y="163534"/>
+            <a:ext cx="6097424" cy="584775"/>
+          </a:xfrm>
+          <a:prstGeom prst="rect">
+            <a:avLst/>
+          </a:prstGeom>
+          <a:noFill/>
+        </p:spPr>
+        <p:txBody>
+          <a:bodyPr wrap="square">
+            <a:spAutoFit/>
+          </a:bodyPr>
+          <a:lstStyle/>
+          <a:p>
+            <a:pPr algn="l">
+              <a:buNone/>
+            </a:pPr>
+            <a:r>
+              <a:rPr lang="en-US" altLang="zh-CN" sz="3200" b="1" i="0" dirty="0">
+                <a:solidFill>
+                  <a:srgbClr val="4472C4"/>
+                </a:solidFill>
+                <a:effectLst/>
+                <a:latin typeface="微软雅黑" panose="020B0503020204020204" pitchFamily="34" charset="-122"/>
+                <a:ea typeface="微软雅黑" panose="020B0503020204020204" pitchFamily="34" charset="-122"/>
+              </a:rPr>
+              <a:t>03 </a:t>
+            </a:r>
+            <a:r>
+              <a:rPr lang="zh-CN" altLang="en-US" sz="3200" b="1" i="0" dirty="0">
+                <a:solidFill>
+                  <a:srgbClr val="4472C4"/>
+                </a:solidFill>
+                <a:effectLst/>
+                <a:latin typeface="微软雅黑" panose="020B0503020204020204" pitchFamily="34" charset="-122"/>
+                <a:ea typeface="微软雅黑" panose="020B0503020204020204" pitchFamily="34" charset="-122"/>
+              </a:rPr>
+              <a:t>模板</a:t>
+            </a:r>
+            <a:r>
+              <a:rPr lang="en-US" altLang="zh-CN" sz="3200" b="1" dirty="0">
+                <a:solidFill>
+                  <a:srgbClr val="4472C4"/>
+                </a:solidFill>
+                <a:latin typeface="微软雅黑" panose="020B0503020204020204" pitchFamily="34" charset="-122"/>
+                <a:ea typeface="微软雅黑" panose="020B0503020204020204" pitchFamily="34" charset="-122"/>
+              </a:rPr>
+              <a:t>6</a:t>
+            </a:r>
+            <a:endParaRPr lang="zh-CN" altLang="en-US" sz="3200" b="1" i="0" dirty="0">
+              <a:solidFill>
+                <a:srgbClr val="4472C4"/>
+              </a:solidFill>
+              <a:effectLst/>
+              <a:latin typeface="微软雅黑" panose="020B0503020204020204" pitchFamily="34" charset="-122"/>
+              <a:ea typeface="微软雅黑" panose="020B0503020204020204" pitchFamily="34" charset="-122"/>
+            </a:endParaRPr>
+          </a:p>
+        </p:txBody>
+      </p:sp>
+      <p:sp>
+        <p:nvSpPr>
+          <p:cNvPr id="18" name="矩形 17">
+            <a:extLst>
+              <a:ext uri="{FF2B5EF4-FFF2-40B4-BE49-F238E27FC236}">
+                <a16:creationId xmlns:a16="http://schemas.microsoft.com/office/drawing/2014/main" id="{14506CED-080E-767A-C65B-DDDC423BD782}"/>
+              </a:ext>
+            </a:extLst>
+          </p:cNvPr>
+          <p:cNvSpPr/>
+          <p:nvPr/>
+        </p:nvSpPr>
+        <p:spPr>
+          <a:xfrm>
+            <a:off x="6931347" y="1280663"/>
+            <a:ext cx="4733662" cy="4720087"/>
+          </a:xfrm>
+          <a:prstGeom prst="rect">
+            <a:avLst/>
+          </a:prstGeom>
+          <a:solidFill>
+            <a:schemeClr val="accent1">
+              <a:lumMod val="60000"/>
+              <a:lumOff val="40000"/>
+            </a:schemeClr>
+          </a:solidFill>
+        </p:spPr>
+        <p:style>
+          <a:lnRef idx="1">
+            <a:schemeClr val="accent1"/>
+          </a:lnRef>
+          <a:fillRef idx="3">
+            <a:schemeClr val="accent1"/>
+          </a:fillRef>
+          <a:effectRef idx="2">
+            <a:schemeClr val="accent1"/>
+          </a:effectRef>
+          <a:fontRef idx="minor">
+            <a:schemeClr val="lt1"/>
+          </a:fontRef>
+        </p:style>
+        <p:txBody>
+          <a:bodyPr rtlCol="0" anchor="ctr"/>
+          <a:lstStyle/>
+          <a:p>
+            <a:pPr algn="ctr"/>
+            <a:r>
+              <a:rPr lang="zh-CN" altLang="en-US" dirty="0"/>
+              <a:t>图片</a:t>
+            </a:r>
+            <a:r>
+              <a:rPr lang="en-US" altLang="zh-CN" dirty="0"/>
+              <a:t>1</a:t>
+            </a:r>
+            <a:endParaRPr lang="zh-CN" altLang="en-US" dirty="0"/>
+          </a:p>
+        </p:txBody>
+      </p:sp>
+      <p:graphicFrame>
+        <p:nvGraphicFramePr>
+          <p:cNvPr id="9" name="表格 8">
+            <a:extLst>
+              <a:ext uri="{FF2B5EF4-FFF2-40B4-BE49-F238E27FC236}">
+                <a16:creationId xmlns:a16="http://schemas.microsoft.com/office/drawing/2014/main" id="{B6536AB4-2E50-7771-AEC7-0C34389EA66A}"/>
+              </a:ext>
+            </a:extLst>
+          </p:cNvPr>
+          <p:cNvGraphicFramePr>
+            <a:graphicFrameLocks noGrp="1"/>
+          </p:cNvGraphicFramePr>
+          <p:nvPr>
+            <p:extLst>
+              <p:ext uri="{D42A27DB-BD31-4B8C-83A1-F6EECF244321}">
+                <p14:modId xmlns:p14="http://schemas.microsoft.com/office/powerpoint/2010/main" val="1478651644"/>
+              </p:ext>
+            </p:extLst>
+          </p:nvPr>
+        </p:nvGraphicFramePr>
+        <p:xfrm>
+          <a:off x="526991" y="1836993"/>
+          <a:ext cx="5081865" cy="3864918"/>
+        </p:xfrm>
+        <a:graphic>
+          <a:graphicData uri="http://schemas.openxmlformats.org/drawingml/2006/table">
+            <a:tbl>
+              <a:tblPr firstRow="1" bandRow="1">
+                <a:tableStyleId>{5C22544A-7EE6-4342-B048-85BDC9FD1C3A}</a:tableStyleId>
+              </a:tblPr>
+              <a:tblGrid>
+                <a:gridCol w="1693955">
+                  <a:extLst>
+                    <a:ext uri="{9D8B030D-6E8A-4147-A177-3AD203B41FA5}">
+                      <a16:colId xmlns:a16="http://schemas.microsoft.com/office/drawing/2014/main" val="3019716584"/>
+                    </a:ext>
+                  </a:extLst>
+                </a:gridCol>
+                <a:gridCol w="1693955">
+                  <a:extLst>
+                    <a:ext uri="{9D8B030D-6E8A-4147-A177-3AD203B41FA5}">
+                      <a16:colId xmlns:a16="http://schemas.microsoft.com/office/drawing/2014/main" val="2699497774"/>
+                    </a:ext>
+                  </a:extLst>
+                </a:gridCol>
+                <a:gridCol w="1693955">
+                  <a:extLst>
+                    <a:ext uri="{9D8B030D-6E8A-4147-A177-3AD203B41FA5}">
+                      <a16:colId xmlns:a16="http://schemas.microsoft.com/office/drawing/2014/main" val="4102928413"/>
+                    </a:ext>
+                  </a:extLst>
+                </a:gridCol>
+              </a:tblGrid>
+              <a:tr h="1288306">
+                <a:tc>
+                  <a:txBody>
+                    <a:bodyPr/>
+                    <a:lstStyle/>
+                    <a:p>
+                      <a:r>
+                        <a:rPr lang="zh-CN" altLang="en-US" dirty="0">
+                          <a:solidFill>
+                            <a:schemeClr val="tx1"/>
+                          </a:solidFill>
+                        </a:rPr>
+                        <a:t>表格</a:t>
+                      </a:r>
+                    </a:p>
+                  </a:txBody>
+                  <a:tcPr>
+                    <a:solidFill>
+                      <a:schemeClr val="accent1">
+                        <a:lumMod val="40000"/>
+                        <a:lumOff val="60000"/>
+                      </a:schemeClr>
+                    </a:solidFill>
+                  </a:tcPr>
+                </a:tc>
+                <a:tc>
+                  <a:txBody>
+                    <a:bodyPr/>
+                    <a:lstStyle/>
+                    <a:p>
+                      <a:endParaRPr lang="zh-CN" altLang="en-US"/>
+                    </a:p>
+                  </a:txBody>
+                  <a:tcPr>
+                    <a:solidFill>
+                      <a:schemeClr val="accent1">
+                        <a:lumMod val="40000"/>
+                        <a:lumOff val="60000"/>
+                      </a:schemeClr>
+                    </a:solidFill>
+                  </a:tcPr>
+                </a:tc>
+                <a:tc>
+                  <a:txBody>
+                    <a:bodyPr/>
+                    <a:lstStyle/>
+                    <a:p>
+                      <a:endParaRPr lang="zh-CN" altLang="en-US" dirty="0"/>
+                    </a:p>
+                  </a:txBody>
+                  <a:tcPr>
+                    <a:solidFill>
+                      <a:schemeClr val="accent1">
+                        <a:lumMod val="40000"/>
+                        <a:lumOff val="60000"/>
+                      </a:schemeClr>
+                    </a:solidFill>
+                  </a:tcPr>
+                </a:tc>
+                <a:extLst>
+                  <a:ext uri="{0D108BD9-81ED-4DB2-BD59-A6C34878D82A}">
+                    <a16:rowId xmlns:a16="http://schemas.microsoft.com/office/drawing/2014/main" val="3740263972"/>
+                  </a:ext>
+                </a:extLst>
+              </a:tr>
+              <a:tr h="1288306">
+                <a:tc>
+                  <a:txBody>
+                    <a:bodyPr/>
+                    <a:lstStyle/>
+                    <a:p>
+                      <a:endParaRPr lang="zh-CN" altLang="en-US" dirty="0"/>
+                    </a:p>
+                  </a:txBody>
+                  <a:tcPr>
+                    <a:solidFill>
+                      <a:schemeClr val="accent1">
+                        <a:lumMod val="40000"/>
+                        <a:lumOff val="60000"/>
+                      </a:schemeClr>
+                    </a:solidFill>
+                  </a:tcPr>
+                </a:tc>
+                <a:tc>
+                  <a:txBody>
+                    <a:bodyPr/>
+                    <a:lstStyle/>
+                    <a:p>
+                      <a:endParaRPr lang="zh-CN" altLang="en-US" dirty="0"/>
+                    </a:p>
+                  </a:txBody>
+                  <a:tcPr>
+                    <a:solidFill>
+                      <a:schemeClr val="accent1">
+                        <a:lumMod val="40000"/>
+                        <a:lumOff val="60000"/>
+                      </a:schemeClr>
+                    </a:solidFill>
+                  </a:tcPr>
+                </a:tc>
+                <a:tc>
+                  <a:txBody>
+                    <a:bodyPr/>
+                    <a:lstStyle/>
+                    <a:p>
+                      <a:endParaRPr lang="zh-CN" altLang="en-US" dirty="0"/>
+                    </a:p>
+                  </a:txBody>
+                  <a:tcPr>
+                    <a:solidFill>
+                      <a:schemeClr val="accent1">
+                        <a:lumMod val="40000"/>
+                        <a:lumOff val="60000"/>
+                      </a:schemeClr>
+                    </a:solidFill>
+                  </a:tcPr>
+                </a:tc>
+                <a:extLst>
+                  <a:ext uri="{0D108BD9-81ED-4DB2-BD59-A6C34878D82A}">
+                    <a16:rowId xmlns:a16="http://schemas.microsoft.com/office/drawing/2014/main" val="2441945290"/>
+                  </a:ext>
+                </a:extLst>
+              </a:tr>
+              <a:tr h="1288306">
+                <a:tc>
+                  <a:txBody>
+                    <a:bodyPr/>
+                    <a:lstStyle/>
+                    <a:p>
+                      <a:endParaRPr lang="zh-CN" altLang="en-US"/>
+                    </a:p>
+                  </a:txBody>
+                  <a:tcPr>
+                    <a:solidFill>
+                      <a:schemeClr val="accent1">
+                        <a:lumMod val="40000"/>
+                        <a:lumOff val="60000"/>
+                      </a:schemeClr>
+                    </a:solidFill>
+                  </a:tcPr>
+                </a:tc>
+                <a:tc>
+                  <a:txBody>
+                    <a:bodyPr/>
+                    <a:lstStyle/>
+                    <a:p>
+                      <a:endParaRPr lang="zh-CN" altLang="en-US"/>
+                    </a:p>
+                  </a:txBody>
+                  <a:tcPr>
+                    <a:solidFill>
+                      <a:schemeClr val="accent1">
+                        <a:lumMod val="40000"/>
+                        <a:lumOff val="60000"/>
+                      </a:schemeClr>
+                    </a:solidFill>
+                  </a:tcPr>
+                </a:tc>
+                <a:tc>
+                  <a:txBody>
+                    <a:bodyPr/>
+                    <a:lstStyle/>
+                    <a:p>
+                      <a:endParaRPr lang="zh-CN" altLang="en-US" dirty="0"/>
+                    </a:p>
+                  </a:txBody>
+                  <a:tcPr>
+                    <a:solidFill>
+                      <a:schemeClr val="accent1">
+                        <a:lumMod val="40000"/>
+                        <a:lumOff val="60000"/>
+                      </a:schemeClr>
+                    </a:solidFill>
+                  </a:tcPr>
+                </a:tc>
+                <a:extLst>
+                  <a:ext uri="{0D108BD9-81ED-4DB2-BD59-A6C34878D82A}">
+                    <a16:rowId xmlns:a16="http://schemas.microsoft.com/office/drawing/2014/main" val="1752158468"/>
+                  </a:ext>
+                </a:extLst>
+              </a:tr>
+            </a:tbl>
+          </a:graphicData>
+        </a:graphic>
+      </p:graphicFrame>
+    </p:spTree>
+    <p:extLst>
+      <p:ext uri="{BB962C8B-B14F-4D97-AF65-F5344CB8AC3E}">
+        <p14:creationId xmlns:p14="http://schemas.microsoft.com/office/powerpoint/2010/main" val="2290668377"/>
+      </p:ext>
+    </p:extLst>
+  </p:cSld>
+  <p:clrMapOvr>
+    <a:masterClrMapping/>
+  </p:clrMapOvr>
 </p:sld>
 </file>
 

--- a/templates/template.pptx
+++ b/templates/template.pptx
@@ -5,10 +5,10 @@
     <p:sldMasterId id="2147483648" r:id="rId1"/>
   </p:sldMasterIdLst>
   <p:notesMasterIdLst>
-    <p:notesMasterId r:id="rId12"/>
+    <p:notesMasterId r:id="rId11"/>
   </p:notesMasterIdLst>
   <p:handoutMasterIdLst>
-    <p:handoutMasterId r:id="rId13"/>
+    <p:handoutMasterId r:id="rId12"/>
   </p:handoutMasterIdLst>
   <p:sldIdLst>
     <p:sldId id="627" r:id="rId2"/>
@@ -18,9 +18,8 @@
     <p:sldId id="1124" r:id="rId6"/>
     <p:sldId id="1125" r:id="rId7"/>
     <p:sldId id="1126" r:id="rId8"/>
-    <p:sldId id="1127" r:id="rId9"/>
-    <p:sldId id="1128" r:id="rId10"/>
-    <p:sldId id="608" r:id="rId11"/>
+    <p:sldId id="1128" r:id="rId9"/>
+    <p:sldId id="608" r:id="rId10"/>
   </p:sldIdLst>
   <p:sldSz cx="12192000" cy="6858000"/>
   <p:notesSz cx="6858000" cy="9144000"/>
@@ -4465,191 +4464,6 @@
 </p:sld>
 </file>
 
-<file path=ppt/slides/slide10.xml><?xml version="1.0" encoding="utf-8"?>
-<p:sld xmlns:a="http://schemas.openxmlformats.org/drawingml/2006/main" xmlns:r="http://schemas.openxmlformats.org/officeDocument/2006/relationships" xmlns:p="http://schemas.openxmlformats.org/presentationml/2006/main">
-  <p:cSld>
-    <p:spTree>
-      <p:nvGrpSpPr>
-        <p:cNvPr id="1" name=""/>
-        <p:cNvGrpSpPr/>
-        <p:nvPr/>
-      </p:nvGrpSpPr>
-      <p:grpSpPr>
-        <a:xfrm>
-          <a:off x="0" y="0"/>
-          <a:ext cx="0" cy="0"/>
-          <a:chOff x="0" y="0"/>
-          <a:chExt cx="0" cy="0"/>
-        </a:xfrm>
-      </p:grpSpPr>
-      <p:sp>
-        <p:nvSpPr>
-          <p:cNvPr id="7" name="文本框 6">
-            <a:extLst>
-              <a:ext uri="{FF2B5EF4-FFF2-40B4-BE49-F238E27FC236}">
-                <a16:creationId xmlns:a16="http://schemas.microsoft.com/office/drawing/2014/main" id="{66A19AAD-1CDF-4899-8D9B-772D397CF09A}"/>
-              </a:ext>
-            </a:extLst>
-          </p:cNvPr>
-          <p:cNvSpPr txBox="1"/>
-          <p:nvPr/>
-        </p:nvSpPr>
-        <p:spPr>
-          <a:xfrm>
-            <a:off x="2170700" y="2395120"/>
-            <a:ext cx="9758680" cy="1323439"/>
-          </a:xfrm>
-          <a:prstGeom prst="rect">
-            <a:avLst/>
-          </a:prstGeom>
-          <a:noFill/>
-        </p:spPr>
-        <p:txBody>
-          <a:bodyPr wrap="square" rtlCol="0">
-            <a:spAutoFit/>
-          </a:bodyPr>
-          <a:lstStyle/>
-          <a:p>
-            <a:pPr algn="ctr"/>
-            <a:r>
-              <a:rPr lang="en-US" altLang="zh-CN" sz="8000" dirty="0">
-                <a:gradFill>
-                  <a:gsLst>
-                    <a:gs pos="0">
-                      <a:schemeClr val="accent1"/>
-                    </a:gs>
-                    <a:gs pos="100000">
-                      <a:schemeClr val="bg1">
-                        <a:alpha val="0"/>
-                      </a:schemeClr>
-                    </a:gs>
-                  </a:gsLst>
-                  <a:lin ang="5400000" scaled="1"/>
-                </a:gradFill>
-                <a:latin typeface="Impact" panose="020B0806030902050204" pitchFamily="34" charset="0"/>
-              </a:rPr>
-              <a:t>THANKS FOR LISTENING</a:t>
-            </a:r>
-            <a:endParaRPr lang="zh-CN" altLang="en-US" sz="8000" dirty="0">
-              <a:gradFill>
-                <a:gsLst>
-                  <a:gs pos="0">
-                    <a:schemeClr val="accent1"/>
-                  </a:gs>
-                  <a:gs pos="100000">
-                    <a:schemeClr val="bg1">
-                      <a:alpha val="0"/>
-                    </a:schemeClr>
-                  </a:gs>
-                </a:gsLst>
-                <a:lin ang="5400000" scaled="1"/>
-              </a:gradFill>
-              <a:latin typeface="Impact" panose="020B0806030902050204" pitchFamily="34" charset="0"/>
-            </a:endParaRPr>
-          </a:p>
-        </p:txBody>
-      </p:sp>
-      <p:sp>
-        <p:nvSpPr>
-          <p:cNvPr id="8" name="标题 1">
-            <a:extLst>
-              <a:ext uri="{FF2B5EF4-FFF2-40B4-BE49-F238E27FC236}">
-                <a16:creationId xmlns:a16="http://schemas.microsoft.com/office/drawing/2014/main" id="{ABB4B086-4071-4C4C-9FF8-B987D7306B9B}"/>
-              </a:ext>
-            </a:extLst>
-          </p:cNvPr>
-          <p:cNvSpPr txBox="1">
-            <a:spLocks/>
-          </p:cNvSpPr>
-          <p:nvPr/>
-        </p:nvSpPr>
-        <p:spPr>
-          <a:xfrm>
-            <a:off x="3069349" y="3056840"/>
-            <a:ext cx="8186902" cy="833759"/>
-          </a:xfrm>
-          <a:prstGeom prst="rect">
-            <a:avLst/>
-          </a:prstGeom>
-        </p:spPr>
-        <p:txBody>
-          <a:bodyPr lIns="0" rIns="0" bIns="0" anchor="b" anchorCtr="0">
-            <a:normAutofit/>
-          </a:bodyPr>
-          <a:lstStyle>
-            <a:lvl1pPr algn="ctr" defTabSz="914400" rtl="0" eaLnBrk="1" latinLnBrk="0" hangingPunct="1">
-              <a:lnSpc>
-                <a:spcPct val="90000"/>
-              </a:lnSpc>
-              <a:spcBef>
-                <a:spcPct val="0"/>
-              </a:spcBef>
-              <a:buNone/>
-              <a:defRPr lang="zh-CN" altLang="en-US" sz="4400" b="1" kern="1200" dirty="0">
-                <a:solidFill>
-                  <a:schemeClr val="tx1">
-                    <a:lumMod val="95000"/>
-                    <a:lumOff val="5000"/>
-                  </a:schemeClr>
-                </a:solidFill>
-                <a:latin typeface="+mj-lt"/>
-                <a:ea typeface="+mj-ea"/>
-                <a:cs typeface="+mj-cs"/>
-              </a:defRPr>
-            </a:lvl1pPr>
-          </a:lstStyle>
-          <a:p>
-            <a:r>
-              <a:rPr lang="zh-CN" altLang="en-US" dirty="0">
-                <a:solidFill>
-                  <a:srgbClr val="000000">
-                    <a:lumMod val="95000"/>
-                    <a:lumOff val="5000"/>
-                  </a:srgbClr>
-                </a:solidFill>
-                <a:latin typeface="Segoe UI"/>
-                <a:ea typeface="微软雅黑"/>
-              </a:rPr>
-              <a:t>请各位老师批评指正</a:t>
-            </a:r>
-            <a:r>
-              <a:rPr lang="en-US" altLang="zh-CN" dirty="0">
-                <a:solidFill>
-                  <a:srgbClr val="000000">
-                    <a:lumMod val="95000"/>
-                    <a:lumOff val="5000"/>
-                  </a:srgbClr>
-                </a:solidFill>
-                <a:latin typeface="Segoe UI"/>
-                <a:ea typeface="微软雅黑"/>
-              </a:rPr>
-              <a:t>!</a:t>
-            </a:r>
-            <a:endParaRPr lang="zh-CN" altLang="en-US" dirty="0"/>
-          </a:p>
-        </p:txBody>
-      </p:sp>
-    </p:spTree>
-    <p:extLst>
-      <p:ext uri="{BB962C8B-B14F-4D97-AF65-F5344CB8AC3E}">
-        <p14:creationId xmlns:p14="http://schemas.microsoft.com/office/powerpoint/2010/main" val="2931844051"/>
-      </p:ext>
-    </p:extLst>
-  </p:cSld>
-  <p:clrMapOvr>
-    <a:masterClrMapping/>
-  </p:clrMapOvr>
-  <mc:AlternateContent xmlns:mc="http://schemas.openxmlformats.org/markup-compatibility/2006" xmlns:p14="http://schemas.microsoft.com/office/powerpoint/2010/main">
-    <mc:Choice Requires="p14">
-      <p:transition spd="slow" p14:dur="2000" advTm="7305"/>
-    </mc:Choice>
-    <mc:Fallback xmlns="">
-      <p:transition spd="slow" advTm="7305"/>
-    </mc:Fallback>
-  </mc:AlternateContent>
-</p:sld>
-</file>
-
 <file path=ppt/slides/slide2.xml><?xml version="1.0" encoding="utf-8"?>
 <p:sld xmlns:a="http://schemas.openxmlformats.org/drawingml/2006/main" xmlns:r="http://schemas.openxmlformats.org/officeDocument/2006/relationships" xmlns:p="http://schemas.openxmlformats.org/presentationml/2006/main">
   <p:cSld>
@@ -10105,774 +9919,6 @@
         <p:cNvPr id="1" name="">
           <a:extLst>
             <a:ext uri="{FF2B5EF4-FFF2-40B4-BE49-F238E27FC236}">
-              <a16:creationId xmlns:a16="http://schemas.microsoft.com/office/drawing/2014/main" id="{15F3D6C7-6229-4EA2-24E0-47CB8ED4F3F1}"/>
-            </a:ext>
-          </a:extLst>
-        </p:cNvPr>
-        <p:cNvGrpSpPr/>
-        <p:nvPr/>
-      </p:nvGrpSpPr>
-      <p:grpSpPr>
-        <a:xfrm>
-          <a:off x="0" y="0"/>
-          <a:ext cx="0" cy="0"/>
-          <a:chOff x="0" y="0"/>
-          <a:chExt cx="0" cy="0"/>
-        </a:xfrm>
-      </p:grpSpPr>
-      <p:sp>
-        <p:nvSpPr>
-          <p:cNvPr id="2" name="Rectangle 1">
-            <a:extLst>
-              <a:ext uri="{FF2B5EF4-FFF2-40B4-BE49-F238E27FC236}">
-                <a16:creationId xmlns:a16="http://schemas.microsoft.com/office/drawing/2014/main" id="{3DF5B429-65FA-F424-8D1B-73A5DE716D79}"/>
-              </a:ext>
-            </a:extLst>
-          </p:cNvPr>
-          <p:cNvSpPr/>
-          <p:nvPr/>
-        </p:nvSpPr>
-        <p:spPr>
-          <a:xfrm>
-            <a:off x="0" y="857250"/>
-            <a:ext cx="7905750" cy="76200"/>
-          </a:xfrm>
-          <a:prstGeom prst="rect">
-            <a:avLst/>
-          </a:prstGeom>
-          <a:solidFill>
-            <a:srgbClr val="5B8BC6"/>
-          </a:solidFill>
-          <a:ln>
-            <a:noFill/>
-          </a:ln>
-          <a:effectLst/>
-        </p:spPr>
-        <p:style>
-          <a:lnRef idx="1">
-            <a:schemeClr val="accent1"/>
-          </a:lnRef>
-          <a:fillRef idx="3">
-            <a:schemeClr val="accent1"/>
-          </a:fillRef>
-          <a:effectRef idx="2">
-            <a:schemeClr val="accent1"/>
-          </a:effectRef>
-          <a:fontRef idx="minor">
-            <a:schemeClr val="lt1"/>
-          </a:fontRef>
-        </p:style>
-        <p:txBody>
-          <a:bodyPr rtlCol="0" anchor="ctr"/>
-          <a:lstStyle/>
-          <a:p>
-            <a:pPr algn="ctr"/>
-            <a:endParaRPr dirty="0">
-              <a:latin typeface="微软雅黑" panose="020B0503020204020204" pitchFamily="34" charset="-122"/>
-              <a:ea typeface="微软雅黑" panose="020B0503020204020204" pitchFamily="34" charset="-122"/>
-            </a:endParaRPr>
-          </a:p>
-        </p:txBody>
-      </p:sp>
-      <p:sp>
-        <p:nvSpPr>
-          <p:cNvPr id="3" name="Rectangle 2">
-            <a:extLst>
-              <a:ext uri="{FF2B5EF4-FFF2-40B4-BE49-F238E27FC236}">
-                <a16:creationId xmlns:a16="http://schemas.microsoft.com/office/drawing/2014/main" id="{52CF4261-98EB-D0A0-3671-22402AA35422}"/>
-              </a:ext>
-            </a:extLst>
-          </p:cNvPr>
-          <p:cNvSpPr/>
-          <p:nvPr/>
-        </p:nvSpPr>
-        <p:spPr>
-          <a:xfrm>
-            <a:off x="8096250" y="885825"/>
-            <a:ext cx="4095750" cy="28575"/>
-          </a:xfrm>
-          <a:prstGeom prst="rect">
-            <a:avLst/>
-          </a:prstGeom>
-          <a:solidFill>
-            <a:srgbClr val="9CC2E5"/>
-          </a:solidFill>
-          <a:ln>
-            <a:noFill/>
-          </a:ln>
-          <a:effectLst/>
-        </p:spPr>
-        <p:style>
-          <a:lnRef idx="1">
-            <a:schemeClr val="accent1"/>
-          </a:lnRef>
-          <a:fillRef idx="3">
-            <a:schemeClr val="accent1"/>
-          </a:fillRef>
-          <a:effectRef idx="2">
-            <a:schemeClr val="accent1"/>
-          </a:effectRef>
-          <a:fontRef idx="minor">
-            <a:schemeClr val="lt1"/>
-          </a:fontRef>
-        </p:style>
-        <p:txBody>
-          <a:bodyPr rtlCol="0" anchor="ctr"/>
-          <a:lstStyle/>
-          <a:p>
-            <a:pPr algn="ctr"/>
-            <a:endParaRPr dirty="0">
-              <a:latin typeface="微软雅黑" panose="020B0503020204020204" pitchFamily="34" charset="-122"/>
-              <a:ea typeface="微软雅黑" panose="020B0503020204020204" pitchFamily="34" charset="-122"/>
-            </a:endParaRPr>
-          </a:p>
-        </p:txBody>
-      </p:sp>
-      <p:pic>
-        <p:nvPicPr>
-          <p:cNvPr id="4" name="Picture 3" descr="heu_logo_color.png">
-            <a:extLst>
-              <a:ext uri="{FF2B5EF4-FFF2-40B4-BE49-F238E27FC236}">
-                <a16:creationId xmlns:a16="http://schemas.microsoft.com/office/drawing/2014/main" id="{A8C520DD-0025-520B-9B49-F2F395A7CD55}"/>
-              </a:ext>
-            </a:extLst>
-          </p:cNvPr>
-          <p:cNvPicPr>
-            <a:picLocks noChangeAspect="1"/>
-          </p:cNvPicPr>
-          <p:nvPr/>
-        </p:nvPicPr>
-        <p:blipFill>
-          <a:blip r:embed="rId2"/>
-          <a:stretch>
-            <a:fillRect/>
-          </a:stretch>
-        </p:blipFill>
-        <p:spPr>
-          <a:xfrm>
-            <a:off x="9577062" y="158750"/>
-            <a:ext cx="2329188" cy="619125"/>
-          </a:xfrm>
-          <a:prstGeom prst="rect">
-            <a:avLst/>
-          </a:prstGeom>
-        </p:spPr>
-      </p:pic>
-      <p:sp>
-        <p:nvSpPr>
-          <p:cNvPr id="5" name="Rectangle 4">
-            <a:extLst>
-              <a:ext uri="{FF2B5EF4-FFF2-40B4-BE49-F238E27FC236}">
-                <a16:creationId xmlns:a16="http://schemas.microsoft.com/office/drawing/2014/main" id="{ADDAF7B0-D7DC-8130-0EF0-AC48B46E9AF9}"/>
-              </a:ext>
-            </a:extLst>
-          </p:cNvPr>
-          <p:cNvSpPr/>
-          <p:nvPr/>
-        </p:nvSpPr>
-        <p:spPr>
-          <a:xfrm>
-            <a:off x="0" y="6473502"/>
-            <a:ext cx="12192000" cy="19050"/>
-          </a:xfrm>
-          <a:prstGeom prst="rect">
-            <a:avLst/>
-          </a:prstGeom>
-          <a:solidFill>
-            <a:srgbClr val="3E649A"/>
-          </a:solidFill>
-          <a:ln>
-            <a:noFill/>
-          </a:ln>
-          <a:effectLst/>
-        </p:spPr>
-        <p:style>
-          <a:lnRef idx="1">
-            <a:schemeClr val="accent1"/>
-          </a:lnRef>
-          <a:fillRef idx="3">
-            <a:schemeClr val="accent1"/>
-          </a:fillRef>
-          <a:effectRef idx="2">
-            <a:schemeClr val="accent1"/>
-          </a:effectRef>
-          <a:fontRef idx="minor">
-            <a:schemeClr val="lt1"/>
-          </a:fontRef>
-        </p:style>
-        <p:txBody>
-          <a:bodyPr rtlCol="0" anchor="ctr"/>
-          <a:lstStyle/>
-          <a:p>
-            <a:pPr algn="ctr"/>
-            <a:endParaRPr dirty="0">
-              <a:latin typeface="微软雅黑" panose="020B0503020204020204" pitchFamily="34" charset="-122"/>
-              <a:ea typeface="微软雅黑" panose="020B0503020204020204" pitchFamily="34" charset="-122"/>
-            </a:endParaRPr>
-          </a:p>
-        </p:txBody>
-      </p:sp>
-      <p:sp>
-        <p:nvSpPr>
-          <p:cNvPr id="6" name="TextBox 5">
-            <a:extLst>
-              <a:ext uri="{FF2B5EF4-FFF2-40B4-BE49-F238E27FC236}">
-                <a16:creationId xmlns:a16="http://schemas.microsoft.com/office/drawing/2014/main" id="{0E430AF4-3E18-1FF4-1FE8-79A9DD381B51}"/>
-              </a:ext>
-            </a:extLst>
-          </p:cNvPr>
-          <p:cNvSpPr txBox="1"/>
-          <p:nvPr/>
-        </p:nvSpPr>
-        <p:spPr>
-          <a:xfrm>
-            <a:off x="101481" y="6511806"/>
-            <a:ext cx="2087431" cy="369332"/>
-          </a:xfrm>
-          <a:prstGeom prst="rect">
-            <a:avLst/>
-          </a:prstGeom>
-          <a:noFill/>
-        </p:spPr>
-        <p:txBody>
-          <a:bodyPr wrap="none">
-            <a:spAutoFit/>
-          </a:bodyPr>
-          <a:lstStyle/>
-          <a:p>
-            <a:pPr>
-              <a:defRPr sz="1800">
-                <a:solidFill>
-                  <a:srgbClr val="1E1E1E"/>
-                </a:solidFill>
-                <a:latin typeface="KaiTi"/>
-              </a:defRPr>
-            </a:pPr>
-            <a:r>
-              <a:rPr dirty="0" err="1">
-                <a:solidFill>
-                  <a:schemeClr val="tx1">
-                    <a:lumMod val="50000"/>
-                    <a:lumOff val="50000"/>
-                  </a:schemeClr>
-                </a:solidFill>
-                <a:latin typeface="华文行楷" panose="02010800040101010101" pitchFamily="2" charset="-122"/>
-                <a:ea typeface="华文行楷" panose="02010800040101010101" pitchFamily="2" charset="-122"/>
-              </a:rPr>
-              <a:t>大工至善</a:t>
-            </a:r>
-            <a:r>
-              <a:rPr dirty="0">
-                <a:solidFill>
-                  <a:schemeClr val="tx1">
-                    <a:lumMod val="50000"/>
-                    <a:lumOff val="50000"/>
-                  </a:schemeClr>
-                </a:solidFill>
-                <a:latin typeface="华文行楷" panose="02010800040101010101" pitchFamily="2" charset="-122"/>
-                <a:ea typeface="华文行楷" panose="02010800040101010101" pitchFamily="2" charset="-122"/>
-              </a:rPr>
-              <a:t> </a:t>
-            </a:r>
-            <a:r>
-              <a:rPr dirty="0" err="1">
-                <a:solidFill>
-                  <a:schemeClr val="tx1">
-                    <a:lumMod val="50000"/>
-                    <a:lumOff val="50000"/>
-                  </a:schemeClr>
-                </a:solidFill>
-                <a:latin typeface="华文行楷" panose="02010800040101010101" pitchFamily="2" charset="-122"/>
-                <a:ea typeface="华文行楷" panose="02010800040101010101" pitchFamily="2" charset="-122"/>
-              </a:rPr>
-              <a:t>大学至真</a:t>
-            </a:r>
-            <a:endParaRPr dirty="0">
-              <a:solidFill>
-                <a:schemeClr val="tx1">
-                  <a:lumMod val="50000"/>
-                  <a:lumOff val="50000"/>
-                </a:schemeClr>
-              </a:solidFill>
-              <a:latin typeface="华文行楷" panose="02010800040101010101" pitchFamily="2" charset="-122"/>
-              <a:ea typeface="华文行楷" panose="02010800040101010101" pitchFamily="2" charset="-122"/>
-            </a:endParaRPr>
-          </a:p>
-        </p:txBody>
-      </p:sp>
-      <p:sp>
-        <p:nvSpPr>
-          <p:cNvPr id="8" name="灯片编号占位符 7">
-            <a:extLst>
-              <a:ext uri="{FF2B5EF4-FFF2-40B4-BE49-F238E27FC236}">
-                <a16:creationId xmlns:a16="http://schemas.microsoft.com/office/drawing/2014/main" id="{DD61A4E1-A578-CAB9-3102-854F81535B1F}"/>
-              </a:ext>
-            </a:extLst>
-          </p:cNvPr>
-          <p:cNvSpPr>
-            <a:spLocks noGrp="1"/>
-          </p:cNvSpPr>
-          <p:nvPr>
-            <p:ph type="sldNum" sz="quarter" idx="12"/>
-          </p:nvPr>
-        </p:nvSpPr>
-        <p:spPr>
-          <a:xfrm>
-            <a:off x="11423769" y="6492875"/>
-            <a:ext cx="482481" cy="365125"/>
-          </a:xfrm>
-        </p:spPr>
-        <p:txBody>
-          <a:bodyPr/>
-          <a:lstStyle/>
-          <a:p>
-            <a:fld id="{C1FF6DA9-008F-8B48-92A6-B652298478BF}" type="slidenum">
-              <a:rPr lang="en-US" sz="1400" smtClean="0">
-                <a:latin typeface="Times New Roman" panose="02020603050405020304" pitchFamily="18" charset="0"/>
-                <a:cs typeface="Times New Roman" panose="02020603050405020304" pitchFamily="18" charset="0"/>
-              </a:rPr>
-              <a:t>8</a:t>
-            </a:fld>
-            <a:endParaRPr lang="en-US" sz="1400" dirty="0">
-              <a:latin typeface="Times New Roman" panose="02020603050405020304" pitchFamily="18" charset="0"/>
-              <a:cs typeface="Times New Roman" panose="02020603050405020304" pitchFamily="18" charset="0"/>
-            </a:endParaRPr>
-          </a:p>
-        </p:txBody>
-      </p:sp>
-      <p:sp>
-        <p:nvSpPr>
-          <p:cNvPr id="12" name="文本框 11">
-            <a:extLst>
-              <a:ext uri="{FF2B5EF4-FFF2-40B4-BE49-F238E27FC236}">
-                <a16:creationId xmlns:a16="http://schemas.microsoft.com/office/drawing/2014/main" id="{5D56BA18-1F82-188B-B971-038A51D43426}"/>
-              </a:ext>
-            </a:extLst>
-          </p:cNvPr>
-          <p:cNvSpPr txBox="1"/>
-          <p:nvPr/>
-        </p:nvSpPr>
-        <p:spPr>
-          <a:xfrm>
-            <a:off x="298569" y="1063020"/>
-            <a:ext cx="6097424" cy="400110"/>
-          </a:xfrm>
-          <a:prstGeom prst="rect">
-            <a:avLst/>
-          </a:prstGeom>
-          <a:noFill/>
-        </p:spPr>
-        <p:txBody>
-          <a:bodyPr wrap="square">
-            <a:spAutoFit/>
-          </a:bodyPr>
-          <a:lstStyle/>
-          <a:p>
-            <a:r>
-              <a:rPr lang="zh-CN" altLang="en-US" sz="2000" b="1" i="0" dirty="0">
-                <a:solidFill>
-                  <a:srgbClr val="000000"/>
-                </a:solidFill>
-                <a:effectLst/>
-                <a:latin typeface="微软雅黑" panose="020B0503020204020204" pitchFamily="34" charset="-122"/>
-                <a:ea typeface="微软雅黑" panose="020B0503020204020204" pitchFamily="34" charset="-122"/>
-              </a:rPr>
-              <a:t>➢ 小标题</a:t>
-            </a:r>
-            <a:endParaRPr lang="zh-CN" altLang="en-US" sz="2000" dirty="0">
-              <a:latin typeface="微软雅黑" panose="020B0503020204020204" pitchFamily="34" charset="-122"/>
-              <a:ea typeface="微软雅黑" panose="020B0503020204020204" pitchFamily="34" charset="-122"/>
-            </a:endParaRPr>
-          </a:p>
-        </p:txBody>
-      </p:sp>
-      <p:sp>
-        <p:nvSpPr>
-          <p:cNvPr id="16" name="文本框 15">
-            <a:extLst>
-              <a:ext uri="{FF2B5EF4-FFF2-40B4-BE49-F238E27FC236}">
-                <a16:creationId xmlns:a16="http://schemas.microsoft.com/office/drawing/2014/main" id="{599A948A-7E0A-7CCC-5565-58180F1FAF4C}"/>
-              </a:ext>
-            </a:extLst>
-          </p:cNvPr>
-          <p:cNvSpPr txBox="1"/>
-          <p:nvPr/>
-        </p:nvSpPr>
-        <p:spPr>
-          <a:xfrm>
-            <a:off x="298569" y="163534"/>
-            <a:ext cx="6097424" cy="584775"/>
-          </a:xfrm>
-          <a:prstGeom prst="rect">
-            <a:avLst/>
-          </a:prstGeom>
-          <a:noFill/>
-        </p:spPr>
-        <p:txBody>
-          <a:bodyPr wrap="square">
-            <a:spAutoFit/>
-          </a:bodyPr>
-          <a:lstStyle/>
-          <a:p>
-            <a:pPr algn="l">
-              <a:buNone/>
-            </a:pPr>
-            <a:r>
-              <a:rPr lang="en-US" altLang="zh-CN" sz="3200" b="1" i="0" dirty="0">
-                <a:solidFill>
-                  <a:srgbClr val="4472C4"/>
-                </a:solidFill>
-                <a:effectLst/>
-                <a:latin typeface="微软雅黑" panose="020B0503020204020204" pitchFamily="34" charset="-122"/>
-                <a:ea typeface="微软雅黑" panose="020B0503020204020204" pitchFamily="34" charset="-122"/>
-              </a:rPr>
-              <a:t>03 </a:t>
-            </a:r>
-            <a:r>
-              <a:rPr lang="zh-CN" altLang="en-US" sz="3200" b="1" i="0" dirty="0">
-                <a:solidFill>
-                  <a:srgbClr val="4472C4"/>
-                </a:solidFill>
-                <a:effectLst/>
-                <a:latin typeface="微软雅黑" panose="020B0503020204020204" pitchFamily="34" charset="-122"/>
-                <a:ea typeface="微软雅黑" panose="020B0503020204020204" pitchFamily="34" charset="-122"/>
-              </a:rPr>
-              <a:t>模板</a:t>
-            </a:r>
-            <a:r>
-              <a:rPr lang="en-US" altLang="zh-CN" sz="3200" b="1" dirty="0">
-                <a:solidFill>
-                  <a:srgbClr val="4472C4"/>
-                </a:solidFill>
-                <a:latin typeface="微软雅黑" panose="020B0503020204020204" pitchFamily="34" charset="-122"/>
-                <a:ea typeface="微软雅黑" panose="020B0503020204020204" pitchFamily="34" charset="-122"/>
-              </a:rPr>
-              <a:t>5</a:t>
-            </a:r>
-            <a:endParaRPr lang="zh-CN" altLang="en-US" sz="3200" b="1" i="0" dirty="0">
-              <a:solidFill>
-                <a:srgbClr val="4472C4"/>
-              </a:solidFill>
-              <a:effectLst/>
-              <a:latin typeface="微软雅黑" panose="020B0503020204020204" pitchFamily="34" charset="-122"/>
-              <a:ea typeface="微软雅黑" panose="020B0503020204020204" pitchFamily="34" charset="-122"/>
-            </a:endParaRPr>
-          </a:p>
-        </p:txBody>
-      </p:sp>
-      <p:sp>
-        <p:nvSpPr>
-          <p:cNvPr id="18" name="矩形 17">
-            <a:extLst>
-              <a:ext uri="{FF2B5EF4-FFF2-40B4-BE49-F238E27FC236}">
-                <a16:creationId xmlns:a16="http://schemas.microsoft.com/office/drawing/2014/main" id="{AEE27A01-3230-85B5-A330-1E6787DA6FE3}"/>
-              </a:ext>
-            </a:extLst>
-          </p:cNvPr>
-          <p:cNvSpPr/>
-          <p:nvPr/>
-        </p:nvSpPr>
-        <p:spPr>
-          <a:xfrm>
-            <a:off x="6931347" y="1280663"/>
-            <a:ext cx="4733662" cy="4720087"/>
-          </a:xfrm>
-          <a:prstGeom prst="rect">
-            <a:avLst/>
-          </a:prstGeom>
-          <a:solidFill>
-            <a:schemeClr val="accent1">
-              <a:lumMod val="60000"/>
-              <a:lumOff val="40000"/>
-            </a:schemeClr>
-          </a:solidFill>
-        </p:spPr>
-        <p:style>
-          <a:lnRef idx="1">
-            <a:schemeClr val="accent1"/>
-          </a:lnRef>
-          <a:fillRef idx="3">
-            <a:schemeClr val="accent1"/>
-          </a:fillRef>
-          <a:effectRef idx="2">
-            <a:schemeClr val="accent1"/>
-          </a:effectRef>
-          <a:fontRef idx="minor">
-            <a:schemeClr val="lt1"/>
-          </a:fontRef>
-        </p:style>
-        <p:txBody>
-          <a:bodyPr rtlCol="0" anchor="ctr"/>
-          <a:lstStyle/>
-          <a:p>
-            <a:pPr algn="ctr"/>
-            <a:r>
-              <a:rPr lang="zh-CN" altLang="en-US" dirty="0"/>
-              <a:t>图片</a:t>
-            </a:r>
-            <a:r>
-              <a:rPr lang="en-US" altLang="zh-CN" dirty="0"/>
-              <a:t>1</a:t>
-            </a:r>
-            <a:endParaRPr lang="zh-CN" altLang="en-US" dirty="0"/>
-          </a:p>
-        </p:txBody>
-      </p:sp>
-      <p:sp>
-        <p:nvSpPr>
-          <p:cNvPr id="7" name="文本框 6">
-            <a:extLst>
-              <a:ext uri="{FF2B5EF4-FFF2-40B4-BE49-F238E27FC236}">
-                <a16:creationId xmlns:a16="http://schemas.microsoft.com/office/drawing/2014/main" id="{6B5D4241-8E34-675A-F3D0-305D8ED707D3}"/>
-              </a:ext>
-            </a:extLst>
-          </p:cNvPr>
-          <p:cNvSpPr txBox="1"/>
-          <p:nvPr/>
-        </p:nvSpPr>
-        <p:spPr>
-          <a:xfrm>
-            <a:off x="499669" y="1742197"/>
-            <a:ext cx="5473291" cy="4016484"/>
-          </a:xfrm>
-          <a:prstGeom prst="rect">
-            <a:avLst/>
-          </a:prstGeom>
-          <a:solidFill>
-            <a:schemeClr val="accent1">
-              <a:lumMod val="20000"/>
-              <a:lumOff val="80000"/>
-            </a:schemeClr>
-          </a:solidFill>
-        </p:spPr>
-        <p:txBody>
-          <a:bodyPr wrap="square">
-            <a:spAutoFit/>
-          </a:bodyPr>
-          <a:lstStyle/>
-          <a:p>
-            <a:pPr marL="285750" indent="-285750">
-              <a:spcBef>
-                <a:spcPts val="375"/>
-              </a:spcBef>
-              <a:spcAft>
-                <a:spcPts val="600"/>
-              </a:spcAft>
-              <a:buFont typeface="Wingdings" panose="05000000000000000000" pitchFamily="2" charset="2"/>
-              <a:buChar char="n"/>
-            </a:pPr>
-            <a:r>
-              <a:rPr lang="zh-CN" altLang="en-US" dirty="0">
-                <a:solidFill>
-                  <a:srgbClr val="000000"/>
-                </a:solidFill>
-                <a:latin typeface="微软雅黑" panose="020B0503020204020204" pitchFamily="34" charset="-122"/>
-                <a:ea typeface="微软雅黑" panose="020B0503020204020204" pitchFamily="34" charset="-122"/>
-              </a:rPr>
-              <a:t>描述性文字</a:t>
-            </a:r>
-            <a:endParaRPr lang="en-US" altLang="zh-CN" dirty="0">
-              <a:solidFill>
-                <a:srgbClr val="000000"/>
-              </a:solidFill>
-              <a:latin typeface="微软雅黑" panose="020B0503020204020204" pitchFamily="34" charset="-122"/>
-              <a:ea typeface="微软雅黑" panose="020B0503020204020204" pitchFamily="34" charset="-122"/>
-            </a:endParaRPr>
-          </a:p>
-          <a:p>
-            <a:pPr marL="285750" indent="-285750">
-              <a:spcBef>
-                <a:spcPts val="375"/>
-              </a:spcBef>
-              <a:spcAft>
-                <a:spcPts val="600"/>
-              </a:spcAft>
-              <a:buFont typeface="Wingdings" panose="05000000000000000000" pitchFamily="2" charset="2"/>
-              <a:buChar char="n"/>
-            </a:pPr>
-            <a:endParaRPr lang="en-US" altLang="zh-CN" dirty="0">
-              <a:solidFill>
-                <a:srgbClr val="000000"/>
-              </a:solidFill>
-              <a:latin typeface="微软雅黑" panose="020B0503020204020204" pitchFamily="34" charset="-122"/>
-              <a:ea typeface="微软雅黑" panose="020B0503020204020204" pitchFamily="34" charset="-122"/>
-            </a:endParaRPr>
-          </a:p>
-          <a:p>
-            <a:pPr marL="285750" indent="-285750">
-              <a:spcBef>
-                <a:spcPts val="375"/>
-              </a:spcBef>
-              <a:spcAft>
-                <a:spcPts val="600"/>
-              </a:spcAft>
-              <a:buFont typeface="Wingdings" panose="05000000000000000000" pitchFamily="2" charset="2"/>
-              <a:buChar char="n"/>
-            </a:pPr>
-            <a:endParaRPr lang="en-US" altLang="zh-CN" dirty="0">
-              <a:solidFill>
-                <a:srgbClr val="000000"/>
-              </a:solidFill>
-              <a:latin typeface="微软雅黑" panose="020B0503020204020204" pitchFamily="34" charset="-122"/>
-              <a:ea typeface="微软雅黑" panose="020B0503020204020204" pitchFamily="34" charset="-122"/>
-            </a:endParaRPr>
-          </a:p>
-          <a:p>
-            <a:pPr marL="285750" indent="-285750">
-              <a:spcBef>
-                <a:spcPts val="375"/>
-              </a:spcBef>
-              <a:spcAft>
-                <a:spcPts val="600"/>
-              </a:spcAft>
-              <a:buFont typeface="Wingdings" panose="05000000000000000000" pitchFamily="2" charset="2"/>
-              <a:buChar char="n"/>
-            </a:pPr>
-            <a:endParaRPr lang="en-US" altLang="zh-CN" dirty="0">
-              <a:solidFill>
-                <a:srgbClr val="000000"/>
-              </a:solidFill>
-              <a:latin typeface="微软雅黑" panose="020B0503020204020204" pitchFamily="34" charset="-122"/>
-              <a:ea typeface="微软雅黑" panose="020B0503020204020204" pitchFamily="34" charset="-122"/>
-            </a:endParaRPr>
-          </a:p>
-          <a:p>
-            <a:pPr marL="285750" indent="-285750">
-              <a:spcBef>
-                <a:spcPts val="375"/>
-              </a:spcBef>
-              <a:spcAft>
-                <a:spcPts val="600"/>
-              </a:spcAft>
-              <a:buFont typeface="Wingdings" panose="05000000000000000000" pitchFamily="2" charset="2"/>
-              <a:buChar char="n"/>
-            </a:pPr>
-            <a:endParaRPr lang="en-US" altLang="zh-CN" dirty="0">
-              <a:solidFill>
-                <a:srgbClr val="000000"/>
-              </a:solidFill>
-              <a:latin typeface="微软雅黑" panose="020B0503020204020204" pitchFamily="34" charset="-122"/>
-              <a:ea typeface="微软雅黑" panose="020B0503020204020204" pitchFamily="34" charset="-122"/>
-            </a:endParaRPr>
-          </a:p>
-          <a:p>
-            <a:pPr marL="285750" indent="-285750">
-              <a:spcBef>
-                <a:spcPts val="375"/>
-              </a:spcBef>
-              <a:spcAft>
-                <a:spcPts val="600"/>
-              </a:spcAft>
-              <a:buFont typeface="Wingdings" panose="05000000000000000000" pitchFamily="2" charset="2"/>
-              <a:buChar char="n"/>
-            </a:pPr>
-            <a:endParaRPr lang="en-US" altLang="zh-CN" dirty="0">
-              <a:solidFill>
-                <a:srgbClr val="000000"/>
-              </a:solidFill>
-              <a:latin typeface="微软雅黑" panose="020B0503020204020204" pitchFamily="34" charset="-122"/>
-              <a:ea typeface="微软雅黑" panose="020B0503020204020204" pitchFamily="34" charset="-122"/>
-            </a:endParaRPr>
-          </a:p>
-          <a:p>
-            <a:pPr marL="285750" indent="-285750">
-              <a:spcBef>
-                <a:spcPts val="375"/>
-              </a:spcBef>
-              <a:spcAft>
-                <a:spcPts val="600"/>
-              </a:spcAft>
-              <a:buFont typeface="Wingdings" panose="05000000000000000000" pitchFamily="2" charset="2"/>
-              <a:buChar char="n"/>
-            </a:pPr>
-            <a:endParaRPr lang="en-US" altLang="zh-CN" dirty="0">
-              <a:solidFill>
-                <a:srgbClr val="000000"/>
-              </a:solidFill>
-              <a:latin typeface="微软雅黑" panose="020B0503020204020204" pitchFamily="34" charset="-122"/>
-              <a:ea typeface="微软雅黑" panose="020B0503020204020204" pitchFamily="34" charset="-122"/>
-            </a:endParaRPr>
-          </a:p>
-          <a:p>
-            <a:pPr marL="285750" indent="-285750">
-              <a:spcBef>
-                <a:spcPts val="375"/>
-              </a:spcBef>
-              <a:spcAft>
-                <a:spcPts val="600"/>
-              </a:spcAft>
-              <a:buFont typeface="Wingdings" panose="05000000000000000000" pitchFamily="2" charset="2"/>
-              <a:buChar char="n"/>
-            </a:pPr>
-            <a:endParaRPr lang="en-US" altLang="zh-CN" dirty="0">
-              <a:solidFill>
-                <a:srgbClr val="000000"/>
-              </a:solidFill>
-              <a:latin typeface="微软雅黑" panose="020B0503020204020204" pitchFamily="34" charset="-122"/>
-              <a:ea typeface="微软雅黑" panose="020B0503020204020204" pitchFamily="34" charset="-122"/>
-            </a:endParaRPr>
-          </a:p>
-          <a:p>
-            <a:pPr marL="285750" indent="-285750">
-              <a:spcBef>
-                <a:spcPts val="375"/>
-              </a:spcBef>
-              <a:spcAft>
-                <a:spcPts val="600"/>
-              </a:spcAft>
-              <a:buFont typeface="Wingdings" panose="05000000000000000000" pitchFamily="2" charset="2"/>
-              <a:buChar char="n"/>
-            </a:pPr>
-            <a:endParaRPr lang="en-US" altLang="zh-CN" dirty="0">
-              <a:solidFill>
-                <a:srgbClr val="000000"/>
-              </a:solidFill>
-              <a:latin typeface="微软雅黑" panose="020B0503020204020204" pitchFamily="34" charset="-122"/>
-              <a:ea typeface="微软雅黑" panose="020B0503020204020204" pitchFamily="34" charset="-122"/>
-            </a:endParaRPr>
-          </a:p>
-          <a:p>
-            <a:pPr marL="285750" indent="-285750">
-              <a:spcBef>
-                <a:spcPts val="375"/>
-              </a:spcBef>
-              <a:spcAft>
-                <a:spcPts val="600"/>
-              </a:spcAft>
-              <a:buFont typeface="Wingdings" panose="05000000000000000000" pitchFamily="2" charset="2"/>
-              <a:buChar char="n"/>
-            </a:pPr>
-            <a:endParaRPr lang="en-US" altLang="zh-CN" dirty="0">
-              <a:solidFill>
-                <a:srgbClr val="000000"/>
-              </a:solidFill>
-              <a:latin typeface="微软雅黑" panose="020B0503020204020204" pitchFamily="34" charset="-122"/>
-              <a:ea typeface="微软雅黑" panose="020B0503020204020204" pitchFamily="34" charset="-122"/>
-            </a:endParaRPr>
-          </a:p>
-        </p:txBody>
-      </p:sp>
-    </p:spTree>
-    <p:extLst>
-      <p:ext uri="{BB962C8B-B14F-4D97-AF65-F5344CB8AC3E}">
-        <p14:creationId xmlns:p14="http://schemas.microsoft.com/office/powerpoint/2010/main" val="1239588936"/>
-      </p:ext>
-    </p:extLst>
-  </p:cSld>
-  <p:clrMapOvr>
-    <a:masterClrMapping/>
-  </p:clrMapOvr>
-</p:sld>
-</file>
-
-<file path=ppt/slides/slide9.xml><?xml version="1.0" encoding="utf-8"?>
-<p:sld xmlns:a="http://schemas.openxmlformats.org/drawingml/2006/main" xmlns:r="http://schemas.openxmlformats.org/officeDocument/2006/relationships" xmlns:p="http://schemas.openxmlformats.org/presentationml/2006/main">
-  <p:cSld>
-    <p:spTree>
-      <p:nvGrpSpPr>
-        <p:cNvPr id="1" name="">
-          <a:extLst>
-            <a:ext uri="{FF2B5EF4-FFF2-40B4-BE49-F238E27FC236}">
               <a16:creationId xmlns:a16="http://schemas.microsoft.com/office/drawing/2014/main" id="{C884A71F-F73C-80FE-DAF2-2098CF73C07A}"/>
             </a:ext>
           </a:extLst>
@@ -11199,7 +10245,7 @@
                 <a:latin typeface="Times New Roman" panose="02020603050405020304" pitchFamily="18" charset="0"/>
                 <a:cs typeface="Times New Roman" panose="02020603050405020304" pitchFamily="18" charset="0"/>
               </a:rPr>
-              <a:t>9</a:t>
+              <a:t>8</a:t>
             </a:fld>
             <a:endParaRPr lang="en-US" sz="1400" dirty="0">
               <a:latin typeface="Times New Roman" panose="02020603050405020304" pitchFamily="18" charset="0"/>
@@ -11634,6 +10680,191 @@
   <p:clrMapOvr>
     <a:masterClrMapping/>
   </p:clrMapOvr>
+</p:sld>
+</file>
+
+<file path=ppt/slides/slide9.xml><?xml version="1.0" encoding="utf-8"?>
+<p:sld xmlns:a="http://schemas.openxmlformats.org/drawingml/2006/main" xmlns:r="http://schemas.openxmlformats.org/officeDocument/2006/relationships" xmlns:p="http://schemas.openxmlformats.org/presentationml/2006/main">
+  <p:cSld>
+    <p:spTree>
+      <p:nvGrpSpPr>
+        <p:cNvPr id="1" name=""/>
+        <p:cNvGrpSpPr/>
+        <p:nvPr/>
+      </p:nvGrpSpPr>
+      <p:grpSpPr>
+        <a:xfrm>
+          <a:off x="0" y="0"/>
+          <a:ext cx="0" cy="0"/>
+          <a:chOff x="0" y="0"/>
+          <a:chExt cx="0" cy="0"/>
+        </a:xfrm>
+      </p:grpSpPr>
+      <p:sp>
+        <p:nvSpPr>
+          <p:cNvPr id="7" name="文本框 6">
+            <a:extLst>
+              <a:ext uri="{FF2B5EF4-FFF2-40B4-BE49-F238E27FC236}">
+                <a16:creationId xmlns:a16="http://schemas.microsoft.com/office/drawing/2014/main" id="{66A19AAD-1CDF-4899-8D9B-772D397CF09A}"/>
+              </a:ext>
+            </a:extLst>
+          </p:cNvPr>
+          <p:cNvSpPr txBox="1"/>
+          <p:nvPr/>
+        </p:nvSpPr>
+        <p:spPr>
+          <a:xfrm>
+            <a:off x="2170700" y="2395120"/>
+            <a:ext cx="9758680" cy="1323439"/>
+          </a:xfrm>
+          <a:prstGeom prst="rect">
+            <a:avLst/>
+          </a:prstGeom>
+          <a:noFill/>
+        </p:spPr>
+        <p:txBody>
+          <a:bodyPr wrap="square" rtlCol="0">
+            <a:spAutoFit/>
+          </a:bodyPr>
+          <a:lstStyle/>
+          <a:p>
+            <a:pPr algn="ctr"/>
+            <a:r>
+              <a:rPr lang="en-US" altLang="zh-CN" sz="8000" dirty="0">
+                <a:gradFill>
+                  <a:gsLst>
+                    <a:gs pos="0">
+                      <a:schemeClr val="accent1"/>
+                    </a:gs>
+                    <a:gs pos="100000">
+                      <a:schemeClr val="bg1">
+                        <a:alpha val="0"/>
+                      </a:schemeClr>
+                    </a:gs>
+                  </a:gsLst>
+                  <a:lin ang="5400000" scaled="1"/>
+                </a:gradFill>
+                <a:latin typeface="Impact" panose="020B0806030902050204" pitchFamily="34" charset="0"/>
+              </a:rPr>
+              <a:t>THANKS FOR LISTENING</a:t>
+            </a:r>
+            <a:endParaRPr lang="zh-CN" altLang="en-US" sz="8000" dirty="0">
+              <a:gradFill>
+                <a:gsLst>
+                  <a:gs pos="0">
+                    <a:schemeClr val="accent1"/>
+                  </a:gs>
+                  <a:gs pos="100000">
+                    <a:schemeClr val="bg1">
+                      <a:alpha val="0"/>
+                    </a:schemeClr>
+                  </a:gs>
+                </a:gsLst>
+                <a:lin ang="5400000" scaled="1"/>
+              </a:gradFill>
+              <a:latin typeface="Impact" panose="020B0806030902050204" pitchFamily="34" charset="0"/>
+            </a:endParaRPr>
+          </a:p>
+        </p:txBody>
+      </p:sp>
+      <p:sp>
+        <p:nvSpPr>
+          <p:cNvPr id="8" name="标题 1">
+            <a:extLst>
+              <a:ext uri="{FF2B5EF4-FFF2-40B4-BE49-F238E27FC236}">
+                <a16:creationId xmlns:a16="http://schemas.microsoft.com/office/drawing/2014/main" id="{ABB4B086-4071-4C4C-9FF8-B987D7306B9B}"/>
+              </a:ext>
+            </a:extLst>
+          </p:cNvPr>
+          <p:cNvSpPr txBox="1">
+            <a:spLocks/>
+          </p:cNvSpPr>
+          <p:nvPr/>
+        </p:nvSpPr>
+        <p:spPr>
+          <a:xfrm>
+            <a:off x="3069349" y="3056840"/>
+            <a:ext cx="8186902" cy="833759"/>
+          </a:xfrm>
+          <a:prstGeom prst="rect">
+            <a:avLst/>
+          </a:prstGeom>
+        </p:spPr>
+        <p:txBody>
+          <a:bodyPr lIns="0" rIns="0" bIns="0" anchor="b" anchorCtr="0">
+            <a:normAutofit/>
+          </a:bodyPr>
+          <a:lstStyle>
+            <a:lvl1pPr algn="ctr" defTabSz="914400" rtl="0" eaLnBrk="1" latinLnBrk="0" hangingPunct="1">
+              <a:lnSpc>
+                <a:spcPct val="90000"/>
+              </a:lnSpc>
+              <a:spcBef>
+                <a:spcPct val="0"/>
+              </a:spcBef>
+              <a:buNone/>
+              <a:defRPr lang="zh-CN" altLang="en-US" sz="4400" b="1" kern="1200" dirty="0">
+                <a:solidFill>
+                  <a:schemeClr val="tx1">
+                    <a:lumMod val="95000"/>
+                    <a:lumOff val="5000"/>
+                  </a:schemeClr>
+                </a:solidFill>
+                <a:latin typeface="+mj-lt"/>
+                <a:ea typeface="+mj-ea"/>
+                <a:cs typeface="+mj-cs"/>
+              </a:defRPr>
+            </a:lvl1pPr>
+          </a:lstStyle>
+          <a:p>
+            <a:r>
+              <a:rPr lang="zh-CN" altLang="en-US" dirty="0">
+                <a:solidFill>
+                  <a:srgbClr val="000000">
+                    <a:lumMod val="95000"/>
+                    <a:lumOff val="5000"/>
+                  </a:srgbClr>
+                </a:solidFill>
+                <a:latin typeface="Segoe UI"/>
+                <a:ea typeface="微软雅黑"/>
+              </a:rPr>
+              <a:t>请各位老师批评指正</a:t>
+            </a:r>
+            <a:r>
+              <a:rPr lang="en-US" altLang="zh-CN" dirty="0">
+                <a:solidFill>
+                  <a:srgbClr val="000000">
+                    <a:lumMod val="95000"/>
+                    <a:lumOff val="5000"/>
+                  </a:srgbClr>
+                </a:solidFill>
+                <a:latin typeface="Segoe UI"/>
+                <a:ea typeface="微软雅黑"/>
+              </a:rPr>
+              <a:t>!</a:t>
+            </a:r>
+            <a:endParaRPr lang="zh-CN" altLang="en-US" dirty="0"/>
+          </a:p>
+        </p:txBody>
+      </p:sp>
+    </p:spTree>
+    <p:extLst>
+      <p:ext uri="{BB962C8B-B14F-4D97-AF65-F5344CB8AC3E}">
+        <p14:creationId xmlns:p14="http://schemas.microsoft.com/office/powerpoint/2010/main" val="2931844051"/>
+      </p:ext>
+    </p:extLst>
+  </p:cSld>
+  <p:clrMapOvr>
+    <a:masterClrMapping/>
+  </p:clrMapOvr>
+  <mc:AlternateContent xmlns:mc="http://schemas.openxmlformats.org/markup-compatibility/2006" xmlns:p14="http://schemas.microsoft.com/office/powerpoint/2010/main">
+    <mc:Choice Requires="p14">
+      <p:transition spd="slow" p14:dur="2000" advTm="7305"/>
+    </mc:Choice>
+    <mc:Fallback xmlns="">
+      <p:transition spd="slow" advTm="7305"/>
+    </mc:Fallback>
+  </mc:AlternateContent>
 </p:sld>
 </file>
 
